--- a/downloads/presentations/modules/lesson-65-grant-and-funding-management-for-ai-projects.pptx
+++ b/downloads/presentations/modules/lesson-65-grant-and-funding-management-for-ai-projects.pptx
@@ -3099,6 +3099,45 @@
           </a:p>
         </p:txBody>
       </p:sp>
+      <p:sp>
+        <p:nvSpPr>
+          <p:cNvPr id="8" name="Text 5"/>
+          <p:cNvSpPr/>
+          <p:nvPr/>
+        </p:nvSpPr>
+        <p:spPr>
+          <a:xfrm>
+            <a:off x="11137392" y="6510528"/>
+            <a:ext cx="411480" cy="201168"/>
+          </a:xfrm>
+          <a:prstGeom prst="rect">
+            <a:avLst/>
+          </a:prstGeom>
+          <a:noFill/>
+          <a:ln/>
+        </p:spPr>
+        <p:txBody>
+          <a:bodyPr wrap="square" lIns="0" tIns="0" rIns="0" bIns="0" rtlCol="0" anchor="ctr"/>
+          <a:lstStyle/>
+          <a:p>
+            <a:pPr algn="r" indent="0" marL="0">
+              <a:buNone/>
+            </a:pPr>
+            <a:r>
+              <a:rPr lang="en-US" sz="900" dirty="0">
+                <a:solidFill>
+                  <a:srgbClr val="5F7181"/>
+                </a:solidFill>
+                <a:latin typeface="Aptos" pitchFamily="34" charset="0"/>
+                <a:ea typeface="Aptos" pitchFamily="34" charset="-122"/>
+                <a:cs typeface="Aptos" pitchFamily="34" charset="-120"/>
+              </a:rPr>
+              <a:t>1</a:t>
+            </a:r>
+            <a:endParaRPr lang="en-US" sz="900" dirty="0"/>
+          </a:p>
+        </p:txBody>
+      </p:sp>
     </p:spTree>
   </p:cSld>
   <p:clrMapOvr>
@@ -3292,7 +3331,7 @@
                 <a:ea typeface="Aptos" pitchFamily="34" charset="-122"/>
                 <a:cs typeface="Aptos" pitchFamily="34" charset="-120"/>
               </a:rPr>
-              <a:t>© Paula Soper</a:t>
+              <a:t>Â© Paula Soper</a:t>
             </a:r>
             <a:endParaRPr lang="en-US" sz="800" dirty="0"/>
           </a:p>
@@ -3300,7 +3339,46 @@
       </p:sp>
       <p:sp>
         <p:nvSpPr>
-          <p:cNvPr id="7" name="Shape 5"/>
+          <p:cNvPr id="7" name="Text 5"/>
+          <p:cNvSpPr/>
+          <p:nvPr/>
+        </p:nvSpPr>
+        <p:spPr>
+          <a:xfrm>
+            <a:off x="11137392" y="6510528"/>
+            <a:ext cx="411480" cy="201168"/>
+          </a:xfrm>
+          <a:prstGeom prst="rect">
+            <a:avLst/>
+          </a:prstGeom>
+          <a:noFill/>
+          <a:ln/>
+        </p:spPr>
+        <p:txBody>
+          <a:bodyPr wrap="square" lIns="0" tIns="0" rIns="0" bIns="0" rtlCol="0" anchor="ctr"/>
+          <a:lstStyle/>
+          <a:p>
+            <a:pPr algn="r" indent="0" marL="0">
+              <a:buNone/>
+            </a:pPr>
+            <a:r>
+              <a:rPr lang="en-US" sz="900" dirty="0">
+                <a:solidFill>
+                  <a:srgbClr val="5F7181"/>
+                </a:solidFill>
+                <a:latin typeface="Aptos" pitchFamily="34" charset="0"/>
+                <a:ea typeface="Aptos" pitchFamily="34" charset="-122"/>
+                <a:cs typeface="Aptos" pitchFamily="34" charset="-120"/>
+              </a:rPr>
+              <a:t>10</a:t>
+            </a:r>
+            <a:endParaRPr lang="en-US" sz="900" dirty="0"/>
+          </a:p>
+        </p:txBody>
+      </p:sp>
+      <p:sp>
+        <p:nvSpPr>
+          <p:cNvPr id="8" name="Shape 6"/>
           <p:cNvSpPr/>
           <p:nvPr/>
         </p:nvSpPr>
@@ -3325,7 +3403,7 @@
       </p:sp>
       <p:sp>
         <p:nvSpPr>
-          <p:cNvPr id="8" name="Text 6"/>
+          <p:cNvPr id="9" name="Text 7"/>
           <p:cNvSpPr/>
           <p:nvPr/>
         </p:nvSpPr>
@@ -3364,14 +3442,14 @@
       </p:sp>
       <p:sp>
         <p:nvSpPr>
-          <p:cNvPr id="9" name="Text 7"/>
+          <p:cNvPr id="10" name="Text 8"/>
           <p:cNvSpPr/>
           <p:nvPr/>
         </p:nvSpPr>
         <p:spPr>
           <a:xfrm>
             <a:off x="640080" y="621792"/>
-            <a:ext cx="10881360" cy="566928"/>
+            <a:ext cx="10881360" cy="713232"/>
           </a:xfrm>
           <a:prstGeom prst="rect">
             <a:avLst/>
@@ -3389,7 +3467,7 @@
               <a:buNone/>
             </a:pPr>
             <a:r>
-              <a:rPr lang="en-US" sz="2700" b="1" dirty="0">
+              <a:rPr lang="en-US" sz="3400" b="1" dirty="0">
                 <a:solidFill>
                   <a:srgbClr val="003A63"/>
                 </a:solidFill>
@@ -3399,20 +3477,20 @@
               </a:rPr>
               <a:t>Public Health Example</a:t>
             </a:r>
-            <a:endParaRPr lang="en-US" sz="2700" dirty="0"/>
-          </a:p>
-        </p:txBody>
-      </p:sp>
-      <p:sp>
-        <p:nvSpPr>
-          <p:cNvPr id="10" name="Text 8"/>
-          <p:cNvSpPr/>
-          <p:nvPr/>
-        </p:nvSpPr>
-        <p:spPr>
-          <a:xfrm>
-            <a:off x="868680" y="1417320"/>
-            <a:ext cx="6675120" cy="4434840"/>
+            <a:endParaRPr lang="en-US" sz="3400" dirty="0"/>
+          </a:p>
+        </p:txBody>
+      </p:sp>
+      <p:sp>
+        <p:nvSpPr>
+          <p:cNvPr id="11" name="Text 9"/>
+          <p:cNvSpPr/>
+          <p:nvPr/>
+        </p:nvSpPr>
+        <p:spPr>
+          <a:xfrm>
+            <a:off x="868680" y="1508760"/>
+            <a:ext cx="6537960" cy="4160520"/>
           </a:xfrm>
           <a:prstGeom prst="rect">
             <a:avLst/>
@@ -3427,7 +3505,7 @@
           <a:lstStyle/>
           <a:p>
             <a:r>
-              <a:rPr lang="en-US" sz="1700" dirty="0">
+              <a:rPr lang="en-US" sz="2100" dirty="0">
                 <a:solidFill>
                   <a:srgbClr val="17364A"/>
                 </a:solidFill>
@@ -3435,13 +3513,13 @@
                 <a:ea typeface="Aptos" pitchFamily="34" charset="-122"/>
                 <a:cs typeface="Aptos" pitchFamily="34" charset="-120"/>
               </a:rPr>
-              <a:t>A public health agency is preparing to use AI in a workflow related to connecting AI projects to allowable costs,.</a:t>
-            </a:r>
-            <a:endParaRPr lang="en-US" sz="1700" dirty="0"/>
-          </a:p>
-          <a:p>
-            <a:r>
-              <a:rPr lang="en-US" sz="1700" dirty="0">
+              <a:t>A public health agency is preparing to use AI in a workflow related to connecting AI projects to.</a:t>
+            </a:r>
+            <a:endParaRPr lang="en-US" sz="2100" dirty="0"/>
+          </a:p>
+          <a:p>
+            <a:r>
+              <a:rPr lang="en-US" sz="2100" dirty="0">
                 <a:solidFill>
                   <a:srgbClr val="17364A"/>
                 </a:solidFill>
@@ -3449,13 +3527,13 @@
                 <a:ea typeface="Aptos" pitchFamily="34" charset="-122"/>
                 <a:cs typeface="Aptos" pitchFamily="34" charset="-120"/>
               </a:rPr>
-              <a:t>The project team initially treats the tool as a helpful efficiency aid, but governance reviewers recognize that the.</a:t>
-            </a:r>
-            <a:endParaRPr lang="en-US" sz="1700" dirty="0"/>
-          </a:p>
-          <a:p>
-            <a:r>
-              <a:rPr lang="en-US" sz="1700" dirty="0">
+              <a:t>The project team initially treats the tool as a helpful efficiency aid, but governance reviewers.</a:t>
+            </a:r>
+            <a:endParaRPr lang="en-US" sz="2100" dirty="0"/>
+          </a:p>
+          <a:p>
+            <a:r>
+              <a:rPr lang="en-US" sz="2100" dirty="0">
                 <a:solidFill>
                   <a:srgbClr val="17364A"/>
                 </a:solidFill>
@@ -3463,29 +3541,15 @@
                 <a:ea typeface="Aptos" pitchFamily="34" charset="-122"/>
                 <a:cs typeface="Aptos" pitchFamily="34" charset="-120"/>
               </a:rPr>
-              <a:t>The agency responds by creating a clear artifact that defines intended use, prohibited use, responsible roles, review.</a:t>
-            </a:r>
-            <a:endParaRPr lang="en-US" sz="1700" dirty="0"/>
-          </a:p>
-          <a:p>
-            <a:r>
-              <a:rPr lang="en-US" sz="1700" dirty="0">
-                <a:solidFill>
-                  <a:srgbClr val="17364A"/>
-                </a:solidFill>
-                <a:latin typeface="Aptos" pitchFamily="34" charset="0"/>
-                <a:ea typeface="Aptos" pitchFamily="34" charset="-122"/>
-                <a:cs typeface="Aptos" pitchFamily="34" charset="-120"/>
-              </a:rPr>
-              <a:t>This converts a broad AI idea into a manageable public health practice.</a:t>
-            </a:r>
-            <a:endParaRPr lang="en-US" sz="1700" dirty="0"/>
-          </a:p>
-        </p:txBody>
-      </p:sp>
-      <p:sp>
-        <p:nvSpPr>
-          <p:cNvPr id="11" name="Shape 9"/>
+              <a:t>The agency responds by creating a clear artifact that defines intended use, prohibited use, responsible.</a:t>
+            </a:r>
+            <a:endParaRPr lang="en-US" sz="2100" dirty="0"/>
+          </a:p>
+        </p:txBody>
+      </p:sp>
+      <p:sp>
+        <p:nvSpPr>
+          <p:cNvPr id="12" name="Shape 10"/>
           <p:cNvSpPr/>
           <p:nvPr/>
         </p:nvSpPr>
@@ -3512,14 +3576,14 @@
       </p:sp>
       <p:sp>
         <p:nvSpPr>
-          <p:cNvPr id="12" name="Text 10"/>
+          <p:cNvPr id="13" name="Text 11"/>
           <p:cNvSpPr/>
           <p:nvPr/>
         </p:nvSpPr>
         <p:spPr>
           <a:xfrm>
             <a:off x="8074152" y="1563624"/>
-            <a:ext cx="2825496" cy="201168"/>
+            <a:ext cx="2825496" cy="256032"/>
           </a:xfrm>
           <a:prstGeom prst="rect">
             <a:avLst/>
@@ -3535,7 +3599,7 @@
               <a:buNone/>
             </a:pPr>
             <a:r>
-              <a:rPr lang="en-US" sz="950" b="1" dirty="0">
+              <a:rPr lang="en-US" sz="1300" b="1" dirty="0">
                 <a:solidFill>
                   <a:srgbClr val="0068B7"/>
                 </a:solidFill>
@@ -3545,20 +3609,20 @@
               </a:rPr>
               <a:t>Key idea</a:t>
             </a:r>
-            <a:endParaRPr lang="en-US" sz="950" dirty="0"/>
-          </a:p>
-        </p:txBody>
-      </p:sp>
-      <p:sp>
-        <p:nvSpPr>
-          <p:cNvPr id="13" name="Text 11"/>
-          <p:cNvSpPr/>
-          <p:nvPr/>
-        </p:nvSpPr>
-        <p:spPr>
-          <a:xfrm>
-            <a:off x="8074152" y="1856232"/>
-            <a:ext cx="2825496" cy="1261872"/>
+            <a:endParaRPr lang="en-US" sz="1300" dirty="0"/>
+          </a:p>
+        </p:txBody>
+      </p:sp>
+      <p:sp>
+        <p:nvSpPr>
+          <p:cNvPr id="14" name="Text 12"/>
+          <p:cNvSpPr/>
+          <p:nvPr/>
+        </p:nvSpPr>
+        <p:spPr>
+          <a:xfrm>
+            <a:off x="8074152" y="1920240"/>
+            <a:ext cx="2825496" cy="1188720"/>
           </a:xfrm>
           <a:prstGeom prst="rect">
             <a:avLst/>
@@ -3576,7 +3640,7 @@
               <a:buNone/>
             </a:pPr>
             <a:r>
-              <a:rPr lang="en-US" sz="1250" dirty="0">
+              <a:rPr lang="en-US" sz="1550" dirty="0">
                 <a:solidFill>
                   <a:srgbClr val="17364A"/>
                 </a:solidFill>
@@ -3584,15 +3648,15 @@
                 <a:ea typeface="Aptos" pitchFamily="34" charset="-122"/>
                 <a:cs typeface="Aptos" pitchFamily="34" charset="-120"/>
               </a:rPr>
-              <a:t>A public health agency is preparing to use AI in a workflow related to connecting AI projects to allowable costs,.</a:t>
-            </a:r>
-            <a:endParaRPr lang="en-US" sz="1250" dirty="0"/>
-          </a:p>
-        </p:txBody>
-      </p:sp>
-      <p:sp>
-        <p:nvSpPr>
-          <p:cNvPr id="14" name="Shape 12"/>
+              <a:t>A public health agency is preparing to use AI in a workflow related to connecting AI projects to.</a:t>
+            </a:r>
+            <a:endParaRPr lang="en-US" sz="1550" dirty="0"/>
+          </a:p>
+        </p:txBody>
+      </p:sp>
+      <p:sp>
+        <p:nvSpPr>
+          <p:cNvPr id="15" name="Shape 13"/>
           <p:cNvSpPr/>
           <p:nvPr/>
         </p:nvSpPr>
@@ -3619,14 +3683,14 @@
       </p:sp>
       <p:sp>
         <p:nvSpPr>
-          <p:cNvPr id="15" name="Text 13"/>
+          <p:cNvPr id="16" name="Text 14"/>
           <p:cNvSpPr/>
           <p:nvPr/>
         </p:nvSpPr>
         <p:spPr>
           <a:xfrm>
             <a:off x="8074152" y="3666744"/>
-            <a:ext cx="2825496" cy="201168"/>
+            <a:ext cx="2825496" cy="256032"/>
           </a:xfrm>
           <a:prstGeom prst="rect">
             <a:avLst/>
@@ -3642,7 +3706,7 @@
               <a:buNone/>
             </a:pPr>
             <a:r>
-              <a:rPr lang="en-US" sz="950" b="1" dirty="0">
+              <a:rPr lang="en-US" sz="1300" b="1" dirty="0">
                 <a:solidFill>
                   <a:srgbClr val="0068B7"/>
                 </a:solidFill>
@@ -3652,20 +3716,20 @@
               </a:rPr>
               <a:t>Use this for</a:t>
             </a:r>
-            <a:endParaRPr lang="en-US" sz="950" dirty="0"/>
-          </a:p>
-        </p:txBody>
-      </p:sp>
-      <p:sp>
-        <p:nvSpPr>
-          <p:cNvPr id="16" name="Text 14"/>
-          <p:cNvSpPr/>
-          <p:nvPr/>
-        </p:nvSpPr>
-        <p:spPr>
-          <a:xfrm>
-            <a:off x="8074152" y="3959352"/>
-            <a:ext cx="2825496" cy="1170432"/>
+            <a:endParaRPr lang="en-US" sz="1300" dirty="0"/>
+          </a:p>
+        </p:txBody>
+      </p:sp>
+      <p:sp>
+        <p:nvSpPr>
+          <p:cNvPr id="17" name="Text 15"/>
+          <p:cNvSpPr/>
+          <p:nvPr/>
+        </p:nvSpPr>
+        <p:spPr>
+          <a:xfrm>
+            <a:off x="8074152" y="4023360"/>
+            <a:ext cx="2825496" cy="1097280"/>
           </a:xfrm>
           <a:prstGeom prst="rect">
             <a:avLst/>
@@ -3683,7 +3747,7 @@
               <a:buNone/>
             </a:pPr>
             <a:r>
-              <a:rPr lang="en-US" sz="1250" dirty="0">
+              <a:rPr lang="en-US" sz="1550" dirty="0">
                 <a:solidFill>
                   <a:srgbClr val="17364A"/>
                 </a:solidFill>
@@ -3693,7 +3757,7 @@
               </a:rPr>
               <a:t>Connect the concept to public health decisions, safeguards, documentation, or implementation work.</a:t>
             </a:r>
-            <a:endParaRPr lang="en-US" sz="1250" dirty="0"/>
+            <a:endParaRPr lang="en-US" sz="1550" dirty="0"/>
           </a:p>
         </p:txBody>
       </p:sp>
@@ -3890,7 +3954,7 @@
                 <a:ea typeface="Aptos" pitchFamily="34" charset="-122"/>
                 <a:cs typeface="Aptos" pitchFamily="34" charset="-120"/>
               </a:rPr>
-              <a:t>© Paula Soper</a:t>
+              <a:t>Â© Paula Soper</a:t>
             </a:r>
             <a:endParaRPr lang="en-US" sz="800" dirty="0"/>
           </a:p>
@@ -3898,7 +3962,46 @@
       </p:sp>
       <p:sp>
         <p:nvSpPr>
-          <p:cNvPr id="7" name="Shape 5"/>
+          <p:cNvPr id="7" name="Text 5"/>
+          <p:cNvSpPr/>
+          <p:nvPr/>
+        </p:nvSpPr>
+        <p:spPr>
+          <a:xfrm>
+            <a:off x="11137392" y="6510528"/>
+            <a:ext cx="411480" cy="201168"/>
+          </a:xfrm>
+          <a:prstGeom prst="rect">
+            <a:avLst/>
+          </a:prstGeom>
+          <a:noFill/>
+          <a:ln/>
+        </p:spPr>
+        <p:txBody>
+          <a:bodyPr wrap="square" lIns="0" tIns="0" rIns="0" bIns="0" rtlCol="0" anchor="ctr"/>
+          <a:lstStyle/>
+          <a:p>
+            <a:pPr algn="r" indent="0" marL="0">
+              <a:buNone/>
+            </a:pPr>
+            <a:r>
+              <a:rPr lang="en-US" sz="900" dirty="0">
+                <a:solidFill>
+                  <a:srgbClr val="5F7181"/>
+                </a:solidFill>
+                <a:latin typeface="Aptos" pitchFamily="34" charset="0"/>
+                <a:ea typeface="Aptos" pitchFamily="34" charset="-122"/>
+                <a:cs typeface="Aptos" pitchFamily="34" charset="-120"/>
+              </a:rPr>
+              <a:t>11</a:t>
+            </a:r>
+            <a:endParaRPr lang="en-US" sz="900" dirty="0"/>
+          </a:p>
+        </p:txBody>
+      </p:sp>
+      <p:sp>
+        <p:nvSpPr>
+          <p:cNvPr id="8" name="Shape 6"/>
           <p:cNvSpPr/>
           <p:nvPr/>
         </p:nvSpPr>
@@ -3923,7 +4026,7 @@
       </p:sp>
       <p:sp>
         <p:nvSpPr>
-          <p:cNvPr id="8" name="Text 6"/>
+          <p:cNvPr id="9" name="Text 7"/>
           <p:cNvSpPr/>
           <p:nvPr/>
         </p:nvSpPr>
@@ -3962,14 +4065,14 @@
       </p:sp>
       <p:sp>
         <p:nvSpPr>
-          <p:cNvPr id="9" name="Text 7"/>
+          <p:cNvPr id="10" name="Text 8"/>
           <p:cNvSpPr/>
           <p:nvPr/>
         </p:nvSpPr>
         <p:spPr>
           <a:xfrm>
             <a:off x="640080" y="621792"/>
-            <a:ext cx="10881360" cy="566928"/>
+            <a:ext cx="10881360" cy="713232"/>
           </a:xfrm>
           <a:prstGeom prst="rect">
             <a:avLst/>
@@ -3987,7 +4090,7 @@
               <a:buNone/>
             </a:pPr>
             <a:r>
-              <a:rPr lang="en-US" sz="2700" b="1" dirty="0">
+              <a:rPr lang="en-US" sz="3400" b="1" dirty="0">
                 <a:solidFill>
                   <a:srgbClr val="003A63"/>
                 </a:solidFill>
@@ -3997,20 +4100,20 @@
               </a:rPr>
               <a:t>Topic Deep Dive</a:t>
             </a:r>
-            <a:endParaRPr lang="en-US" sz="2700" dirty="0"/>
-          </a:p>
-        </p:txBody>
-      </p:sp>
-      <p:sp>
-        <p:nvSpPr>
-          <p:cNvPr id="10" name="Text 8"/>
-          <p:cNvSpPr/>
-          <p:nvPr/>
-        </p:nvSpPr>
-        <p:spPr>
-          <a:xfrm>
-            <a:off x="868680" y="1417320"/>
-            <a:ext cx="6675120" cy="4434840"/>
+            <a:endParaRPr lang="en-US" sz="3400" dirty="0"/>
+          </a:p>
+        </p:txBody>
+      </p:sp>
+      <p:sp>
+        <p:nvSpPr>
+          <p:cNvPr id="11" name="Text 9"/>
+          <p:cNvSpPr/>
+          <p:nvPr/>
+        </p:nvSpPr>
+        <p:spPr>
+          <a:xfrm>
+            <a:off x="868680" y="1508760"/>
+            <a:ext cx="6537960" cy="4160520"/>
           </a:xfrm>
           <a:prstGeom prst="rect">
             <a:avLst/>
@@ -4025,7 +4128,7 @@
           <a:lstStyle/>
           <a:p>
             <a:r>
-              <a:rPr lang="en-US" sz="1700" dirty="0">
+              <a:rPr lang="en-US" sz="2100" dirty="0">
                 <a:solidFill>
                   <a:srgbClr val="17364A"/>
                 </a:solidFill>
@@ -4035,11 +4138,11 @@
               </a:rPr>
               <a:t>The first step in this topic is to define the decision or workflow clearly.</a:t>
             </a:r>
-            <a:endParaRPr lang="en-US" sz="1700" dirty="0"/>
-          </a:p>
-          <a:p>
-            <a:r>
-              <a:rPr lang="en-US" sz="1700" dirty="0">
+            <a:endParaRPr lang="en-US" sz="2100" dirty="0"/>
+          </a:p>
+          <a:p>
+            <a:r>
+              <a:rPr lang="en-US" sz="2100" dirty="0">
                 <a:solidFill>
                   <a:srgbClr val="17364A"/>
                 </a:solidFill>
@@ -4047,13 +4150,13 @@
                 <a:ea typeface="Aptos" pitchFamily="34" charset="-122"/>
                 <a:cs typeface="Aptos" pitchFamily="34" charset="-120"/>
               </a:rPr>
-              <a:t>Staff should identify who is affected, what data are used, what AI output is produced, who reviews the output, and what.</a:t>
-            </a:r>
-            <a:endParaRPr lang="en-US" sz="1700" dirty="0"/>
-          </a:p>
-          <a:p>
-            <a:r>
-              <a:rPr lang="en-US" sz="1700" dirty="0">
+              <a:t>Staff should identify who is affected, what data are used, what AI output is produced, who reviews the.</a:t>
+            </a:r>
+            <a:endParaRPr lang="en-US" sz="2100" dirty="0"/>
+          </a:p>
+          <a:p>
+            <a:r>
+              <a:rPr lang="en-US" sz="2100" dirty="0">
                 <a:solidFill>
                   <a:srgbClr val="17364A"/>
                 </a:solidFill>
@@ -4063,27 +4166,13 @@
               </a:rPr>
               <a:t>This prevents the module from becoming abstract and anchors the work in public health practice.</a:t>
             </a:r>
-            <a:endParaRPr lang="en-US" sz="1700" dirty="0"/>
-          </a:p>
-          <a:p>
-            <a:r>
-              <a:rPr lang="en-US" sz="1700" dirty="0">
-                <a:solidFill>
-                  <a:srgbClr val="17364A"/>
-                </a:solidFill>
-                <a:latin typeface="Aptos" pitchFamily="34" charset="0"/>
-                <a:ea typeface="Aptos" pitchFamily="34" charset="-122"/>
-                <a:cs typeface="Aptos" pitchFamily="34" charset="-120"/>
-              </a:rPr>
-              <a:t>The second step is to assign responsibilities.</a:t>
-            </a:r>
-            <a:endParaRPr lang="en-US" sz="1700" dirty="0"/>
-          </a:p>
-        </p:txBody>
-      </p:sp>
-      <p:sp>
-        <p:nvSpPr>
-          <p:cNvPr id="11" name="Shape 9"/>
+            <a:endParaRPr lang="en-US" sz="2100" dirty="0"/>
+          </a:p>
+        </p:txBody>
+      </p:sp>
+      <p:sp>
+        <p:nvSpPr>
+          <p:cNvPr id="12" name="Shape 10"/>
           <p:cNvSpPr/>
           <p:nvPr/>
         </p:nvSpPr>
@@ -4110,14 +4199,14 @@
       </p:sp>
       <p:sp>
         <p:nvSpPr>
-          <p:cNvPr id="12" name="Text 10"/>
+          <p:cNvPr id="13" name="Text 11"/>
           <p:cNvSpPr/>
           <p:nvPr/>
         </p:nvSpPr>
         <p:spPr>
           <a:xfrm>
             <a:off x="8074152" y="1563624"/>
-            <a:ext cx="2825496" cy="201168"/>
+            <a:ext cx="2825496" cy="256032"/>
           </a:xfrm>
           <a:prstGeom prst="rect">
             <a:avLst/>
@@ -4133,7 +4222,7 @@
               <a:buNone/>
             </a:pPr>
             <a:r>
-              <a:rPr lang="en-US" sz="950" b="1" dirty="0">
+              <a:rPr lang="en-US" sz="1300" b="1" dirty="0">
                 <a:solidFill>
                   <a:srgbClr val="0068B7"/>
                 </a:solidFill>
@@ -4143,20 +4232,20 @@
               </a:rPr>
               <a:t>Key idea</a:t>
             </a:r>
-            <a:endParaRPr lang="en-US" sz="950" dirty="0"/>
-          </a:p>
-        </p:txBody>
-      </p:sp>
-      <p:sp>
-        <p:nvSpPr>
-          <p:cNvPr id="13" name="Text 11"/>
-          <p:cNvSpPr/>
-          <p:nvPr/>
-        </p:nvSpPr>
-        <p:spPr>
-          <a:xfrm>
-            <a:off x="8074152" y="1856232"/>
-            <a:ext cx="2825496" cy="1261872"/>
+            <a:endParaRPr lang="en-US" sz="1300" dirty="0"/>
+          </a:p>
+        </p:txBody>
+      </p:sp>
+      <p:sp>
+        <p:nvSpPr>
+          <p:cNvPr id="14" name="Text 12"/>
+          <p:cNvSpPr/>
+          <p:nvPr/>
+        </p:nvSpPr>
+        <p:spPr>
+          <a:xfrm>
+            <a:off x="8074152" y="1920240"/>
+            <a:ext cx="2825496" cy="1188720"/>
           </a:xfrm>
           <a:prstGeom prst="rect">
             <a:avLst/>
@@ -4174,7 +4263,7 @@
               <a:buNone/>
             </a:pPr>
             <a:r>
-              <a:rPr lang="en-US" sz="1250" dirty="0">
+              <a:rPr lang="en-US" sz="1550" dirty="0">
                 <a:solidFill>
                   <a:srgbClr val="17364A"/>
                 </a:solidFill>
@@ -4184,13 +4273,13 @@
               </a:rPr>
               <a:t>The first step in this topic is to define the decision or workflow clearly.</a:t>
             </a:r>
-            <a:endParaRPr lang="en-US" sz="1250" dirty="0"/>
-          </a:p>
-        </p:txBody>
-      </p:sp>
-      <p:sp>
-        <p:nvSpPr>
-          <p:cNvPr id="14" name="Shape 12"/>
+            <a:endParaRPr lang="en-US" sz="1550" dirty="0"/>
+          </a:p>
+        </p:txBody>
+      </p:sp>
+      <p:sp>
+        <p:nvSpPr>
+          <p:cNvPr id="15" name="Shape 13"/>
           <p:cNvSpPr/>
           <p:nvPr/>
         </p:nvSpPr>
@@ -4217,14 +4306,14 @@
       </p:sp>
       <p:sp>
         <p:nvSpPr>
-          <p:cNvPr id="15" name="Text 13"/>
+          <p:cNvPr id="16" name="Text 14"/>
           <p:cNvSpPr/>
           <p:nvPr/>
         </p:nvSpPr>
         <p:spPr>
           <a:xfrm>
             <a:off x="8074152" y="3666744"/>
-            <a:ext cx="2825496" cy="201168"/>
+            <a:ext cx="2825496" cy="256032"/>
           </a:xfrm>
           <a:prstGeom prst="rect">
             <a:avLst/>
@@ -4240,7 +4329,7 @@
               <a:buNone/>
             </a:pPr>
             <a:r>
-              <a:rPr lang="en-US" sz="950" b="1" dirty="0">
+              <a:rPr lang="en-US" sz="1300" b="1" dirty="0">
                 <a:solidFill>
                   <a:srgbClr val="0068B7"/>
                 </a:solidFill>
@@ -4250,20 +4339,20 @@
               </a:rPr>
               <a:t>Use this for</a:t>
             </a:r>
-            <a:endParaRPr lang="en-US" sz="950" dirty="0"/>
-          </a:p>
-        </p:txBody>
-      </p:sp>
-      <p:sp>
-        <p:nvSpPr>
-          <p:cNvPr id="16" name="Text 14"/>
-          <p:cNvSpPr/>
-          <p:nvPr/>
-        </p:nvSpPr>
-        <p:spPr>
-          <a:xfrm>
-            <a:off x="8074152" y="3959352"/>
-            <a:ext cx="2825496" cy="1170432"/>
+            <a:endParaRPr lang="en-US" sz="1300" dirty="0"/>
+          </a:p>
+        </p:txBody>
+      </p:sp>
+      <p:sp>
+        <p:nvSpPr>
+          <p:cNvPr id="17" name="Text 15"/>
+          <p:cNvSpPr/>
+          <p:nvPr/>
+        </p:nvSpPr>
+        <p:spPr>
+          <a:xfrm>
+            <a:off x="8074152" y="4023360"/>
+            <a:ext cx="2825496" cy="1097280"/>
           </a:xfrm>
           <a:prstGeom prst="rect">
             <a:avLst/>
@@ -4281,7 +4370,7 @@
               <a:buNone/>
             </a:pPr>
             <a:r>
-              <a:rPr lang="en-US" sz="1250" dirty="0">
+              <a:rPr lang="en-US" sz="1550" dirty="0">
                 <a:solidFill>
                   <a:srgbClr val="17364A"/>
                 </a:solidFill>
@@ -4291,7 +4380,7 @@
               </a:rPr>
               <a:t>Connect the concept to public health decisions, safeguards, documentation, or implementation work.</a:t>
             </a:r>
-            <a:endParaRPr lang="en-US" sz="1250" dirty="0"/>
+            <a:endParaRPr lang="en-US" sz="1550" dirty="0"/>
           </a:p>
         </p:txBody>
       </p:sp>
@@ -4488,7 +4577,7 @@
                 <a:ea typeface="Aptos" pitchFamily="34" charset="-122"/>
                 <a:cs typeface="Aptos" pitchFamily="34" charset="-120"/>
               </a:rPr>
-              <a:t>© Paula Soper</a:t>
+              <a:t>Â© Paula Soper</a:t>
             </a:r>
             <a:endParaRPr lang="en-US" sz="800" dirty="0"/>
           </a:p>
@@ -4496,7 +4585,46 @@
       </p:sp>
       <p:sp>
         <p:nvSpPr>
-          <p:cNvPr id="7" name="Shape 5"/>
+          <p:cNvPr id="7" name="Text 5"/>
+          <p:cNvSpPr/>
+          <p:nvPr/>
+        </p:nvSpPr>
+        <p:spPr>
+          <a:xfrm>
+            <a:off x="11137392" y="6510528"/>
+            <a:ext cx="411480" cy="201168"/>
+          </a:xfrm>
+          <a:prstGeom prst="rect">
+            <a:avLst/>
+          </a:prstGeom>
+          <a:noFill/>
+          <a:ln/>
+        </p:spPr>
+        <p:txBody>
+          <a:bodyPr wrap="square" lIns="0" tIns="0" rIns="0" bIns="0" rtlCol="0" anchor="ctr"/>
+          <a:lstStyle/>
+          <a:p>
+            <a:pPr algn="r" indent="0" marL="0">
+              <a:buNone/>
+            </a:pPr>
+            <a:r>
+              <a:rPr lang="en-US" sz="900" dirty="0">
+                <a:solidFill>
+                  <a:srgbClr val="5F7181"/>
+                </a:solidFill>
+                <a:latin typeface="Aptos" pitchFamily="34" charset="0"/>
+                <a:ea typeface="Aptos" pitchFamily="34" charset="-122"/>
+                <a:cs typeface="Aptos" pitchFamily="34" charset="-120"/>
+              </a:rPr>
+              <a:t>12</a:t>
+            </a:r>
+            <a:endParaRPr lang="en-US" sz="900" dirty="0"/>
+          </a:p>
+        </p:txBody>
+      </p:sp>
+      <p:sp>
+        <p:nvSpPr>
+          <p:cNvPr id="8" name="Shape 6"/>
           <p:cNvSpPr/>
           <p:nvPr/>
         </p:nvSpPr>
@@ -4521,7 +4649,7 @@
       </p:sp>
       <p:sp>
         <p:nvSpPr>
-          <p:cNvPr id="8" name="Text 6"/>
+          <p:cNvPr id="9" name="Text 7"/>
           <p:cNvSpPr/>
           <p:nvPr/>
         </p:nvSpPr>
@@ -4560,14 +4688,14 @@
       </p:sp>
       <p:sp>
         <p:nvSpPr>
-          <p:cNvPr id="9" name="Text 7"/>
+          <p:cNvPr id="10" name="Text 8"/>
           <p:cNvSpPr/>
           <p:nvPr/>
         </p:nvSpPr>
         <p:spPr>
           <a:xfrm>
             <a:off x="640080" y="621792"/>
-            <a:ext cx="10881360" cy="566928"/>
+            <a:ext cx="10881360" cy="713232"/>
           </a:xfrm>
           <a:prstGeom prst="rect">
             <a:avLst/>
@@ -4585,7 +4713,7 @@
               <a:buNone/>
             </a:pPr>
             <a:r>
-              <a:rPr lang="en-US" sz="2700" b="1" dirty="0">
+              <a:rPr lang="en-US" sz="3400" b="1" dirty="0">
                 <a:solidFill>
                   <a:srgbClr val="003A63"/>
                 </a:solidFill>
@@ -4595,20 +4723,20 @@
               </a:rPr>
               <a:t>Risks, Failure Modes, and Guardrails</a:t>
             </a:r>
-            <a:endParaRPr lang="en-US" sz="2700" dirty="0"/>
-          </a:p>
-        </p:txBody>
-      </p:sp>
-      <p:sp>
-        <p:nvSpPr>
-          <p:cNvPr id="10" name="Text 8"/>
-          <p:cNvSpPr/>
-          <p:nvPr/>
-        </p:nvSpPr>
-        <p:spPr>
-          <a:xfrm>
-            <a:off x="868680" y="1417320"/>
-            <a:ext cx="6675120" cy="4434840"/>
+            <a:endParaRPr lang="en-US" sz="3400" dirty="0"/>
+          </a:p>
+        </p:txBody>
+      </p:sp>
+      <p:sp>
+        <p:nvSpPr>
+          <p:cNvPr id="11" name="Text 9"/>
+          <p:cNvSpPr/>
+          <p:nvPr/>
+        </p:nvSpPr>
+        <p:spPr>
+          <a:xfrm>
+            <a:off x="868680" y="1508760"/>
+            <a:ext cx="6537960" cy="4160520"/>
           </a:xfrm>
           <a:prstGeom prst="rect">
             <a:avLst/>
@@ -4623,7 +4751,7 @@
           <a:lstStyle/>
           <a:p>
             <a:r>
-              <a:rPr lang="en-US" sz="1700" dirty="0">
+              <a:rPr lang="en-US" sz="2100" dirty="0">
                 <a:solidFill>
                   <a:srgbClr val="17364A"/>
                 </a:solidFill>
@@ -4633,11 +4761,11 @@
               </a:rPr>
               <a:t>A common failure mode is treating the topic as a one-time checklist.</a:t>
             </a:r>
-            <a:endParaRPr lang="en-US" sz="1700" dirty="0"/>
-          </a:p>
-          <a:p>
-            <a:r>
-              <a:rPr lang="en-US" sz="1700" dirty="0">
+            <a:endParaRPr lang="en-US" sz="2100" dirty="0"/>
+          </a:p>
+          <a:p>
+            <a:r>
+              <a:rPr lang="en-US" sz="2100" dirty="0">
                 <a:solidFill>
                   <a:srgbClr val="17364A"/>
                 </a:solidFill>
@@ -4647,11 +4775,11 @@
               </a:rPr>
               <a:t>AI risks can change when data sources, models, vendors, policies, users, or public expectations change.</a:t>
             </a:r>
-            <a:endParaRPr lang="en-US" sz="1700" dirty="0"/>
-          </a:p>
-          <a:p>
-            <a:r>
-              <a:rPr lang="en-US" sz="1700" dirty="0">
+            <a:endParaRPr lang="en-US" sz="2100" dirty="0"/>
+          </a:p>
+          <a:p>
+            <a:r>
+              <a:rPr lang="en-US" sz="2100" dirty="0">
                 <a:solidFill>
                   <a:srgbClr val="17364A"/>
                 </a:solidFill>
@@ -4661,27 +4789,13 @@
               </a:rPr>
               <a:t>A guardrail is to define review intervals and change triggers.</a:t>
             </a:r>
-            <a:endParaRPr lang="en-US" sz="1700" dirty="0"/>
-          </a:p>
-          <a:p>
-            <a:r>
-              <a:rPr lang="en-US" sz="1700" dirty="0">
-                <a:solidFill>
-                  <a:srgbClr val="17364A"/>
-                </a:solidFill>
-                <a:latin typeface="Aptos" pitchFamily="34" charset="0"/>
-                <a:ea typeface="Aptos" pitchFamily="34" charset="-122"/>
-                <a:cs typeface="Aptos" pitchFamily="34" charset="-120"/>
-              </a:rPr>
-              <a:t>Another failure mode is unclear ownership.</a:t>
-            </a:r>
-            <a:endParaRPr lang="en-US" sz="1700" dirty="0"/>
-          </a:p>
-        </p:txBody>
-      </p:sp>
-      <p:sp>
-        <p:nvSpPr>
-          <p:cNvPr id="11" name="Shape 9"/>
+            <a:endParaRPr lang="en-US" sz="2100" dirty="0"/>
+          </a:p>
+        </p:txBody>
+      </p:sp>
+      <p:sp>
+        <p:nvSpPr>
+          <p:cNvPr id="12" name="Shape 10"/>
           <p:cNvSpPr/>
           <p:nvPr/>
         </p:nvSpPr>
@@ -4708,14 +4822,14 @@
       </p:sp>
       <p:sp>
         <p:nvSpPr>
-          <p:cNvPr id="12" name="Text 10"/>
+          <p:cNvPr id="13" name="Text 11"/>
           <p:cNvSpPr/>
           <p:nvPr/>
         </p:nvSpPr>
         <p:spPr>
           <a:xfrm>
             <a:off x="8074152" y="1563624"/>
-            <a:ext cx="2825496" cy="201168"/>
+            <a:ext cx="2825496" cy="256032"/>
           </a:xfrm>
           <a:prstGeom prst="rect">
             <a:avLst/>
@@ -4731,7 +4845,7 @@
               <a:buNone/>
             </a:pPr>
             <a:r>
-              <a:rPr lang="en-US" sz="950" b="1" dirty="0">
+              <a:rPr lang="en-US" sz="1300" b="1" dirty="0">
                 <a:solidFill>
                   <a:srgbClr val="0068B7"/>
                 </a:solidFill>
@@ -4741,20 +4855,20 @@
               </a:rPr>
               <a:t>Key idea</a:t>
             </a:r>
-            <a:endParaRPr lang="en-US" sz="950" dirty="0"/>
-          </a:p>
-        </p:txBody>
-      </p:sp>
-      <p:sp>
-        <p:nvSpPr>
-          <p:cNvPr id="13" name="Text 11"/>
-          <p:cNvSpPr/>
-          <p:nvPr/>
-        </p:nvSpPr>
-        <p:spPr>
-          <a:xfrm>
-            <a:off x="8074152" y="1856232"/>
-            <a:ext cx="2825496" cy="1261872"/>
+            <a:endParaRPr lang="en-US" sz="1300" dirty="0"/>
+          </a:p>
+        </p:txBody>
+      </p:sp>
+      <p:sp>
+        <p:nvSpPr>
+          <p:cNvPr id="14" name="Text 12"/>
+          <p:cNvSpPr/>
+          <p:nvPr/>
+        </p:nvSpPr>
+        <p:spPr>
+          <a:xfrm>
+            <a:off x="8074152" y="1920240"/>
+            <a:ext cx="2825496" cy="1188720"/>
           </a:xfrm>
           <a:prstGeom prst="rect">
             <a:avLst/>
@@ -4772,7 +4886,7 @@
               <a:buNone/>
             </a:pPr>
             <a:r>
-              <a:rPr lang="en-US" sz="1250" dirty="0">
+              <a:rPr lang="en-US" sz="1550" dirty="0">
                 <a:solidFill>
                   <a:srgbClr val="17364A"/>
                 </a:solidFill>
@@ -4782,13 +4896,13 @@
               </a:rPr>
               <a:t>A common failure mode is treating the topic as a one-time checklist.</a:t>
             </a:r>
-            <a:endParaRPr lang="en-US" sz="1250" dirty="0"/>
-          </a:p>
-        </p:txBody>
-      </p:sp>
-      <p:sp>
-        <p:nvSpPr>
-          <p:cNvPr id="14" name="Shape 12"/>
+            <a:endParaRPr lang="en-US" sz="1550" dirty="0"/>
+          </a:p>
+        </p:txBody>
+      </p:sp>
+      <p:sp>
+        <p:nvSpPr>
+          <p:cNvPr id="15" name="Shape 13"/>
           <p:cNvSpPr/>
           <p:nvPr/>
         </p:nvSpPr>
@@ -4815,14 +4929,14 @@
       </p:sp>
       <p:sp>
         <p:nvSpPr>
-          <p:cNvPr id="15" name="Text 13"/>
+          <p:cNvPr id="16" name="Text 14"/>
           <p:cNvSpPr/>
           <p:nvPr/>
         </p:nvSpPr>
         <p:spPr>
           <a:xfrm>
             <a:off x="8074152" y="3666744"/>
-            <a:ext cx="2825496" cy="201168"/>
+            <a:ext cx="2825496" cy="256032"/>
           </a:xfrm>
           <a:prstGeom prst="rect">
             <a:avLst/>
@@ -4838,7 +4952,7 @@
               <a:buNone/>
             </a:pPr>
             <a:r>
-              <a:rPr lang="en-US" sz="950" b="1" dirty="0">
+              <a:rPr lang="en-US" sz="1300" b="1" dirty="0">
                 <a:solidFill>
                   <a:srgbClr val="0068B7"/>
                 </a:solidFill>
@@ -4848,20 +4962,20 @@
               </a:rPr>
               <a:t>Use this for</a:t>
             </a:r>
-            <a:endParaRPr lang="en-US" sz="950" dirty="0"/>
-          </a:p>
-        </p:txBody>
-      </p:sp>
-      <p:sp>
-        <p:nvSpPr>
-          <p:cNvPr id="16" name="Text 14"/>
-          <p:cNvSpPr/>
-          <p:nvPr/>
-        </p:nvSpPr>
-        <p:spPr>
-          <a:xfrm>
-            <a:off x="8074152" y="3959352"/>
-            <a:ext cx="2825496" cy="1170432"/>
+            <a:endParaRPr lang="en-US" sz="1300" dirty="0"/>
+          </a:p>
+        </p:txBody>
+      </p:sp>
+      <p:sp>
+        <p:nvSpPr>
+          <p:cNvPr id="17" name="Text 15"/>
+          <p:cNvSpPr/>
+          <p:nvPr/>
+        </p:nvSpPr>
+        <p:spPr>
+          <a:xfrm>
+            <a:off x="8074152" y="4023360"/>
+            <a:ext cx="2825496" cy="1097280"/>
           </a:xfrm>
           <a:prstGeom prst="rect">
             <a:avLst/>
@@ -4879,7 +4993,7 @@
               <a:buNone/>
             </a:pPr>
             <a:r>
-              <a:rPr lang="en-US" sz="1250" dirty="0">
+              <a:rPr lang="en-US" sz="1550" dirty="0">
                 <a:solidFill>
                   <a:srgbClr val="17364A"/>
                 </a:solidFill>
@@ -4889,7 +5003,7 @@
               </a:rPr>
               <a:t>Connect the concept to public health decisions, safeguards, documentation, or implementation work.</a:t>
             </a:r>
-            <a:endParaRPr lang="en-US" sz="1250" dirty="0"/>
+            <a:endParaRPr lang="en-US" sz="1550" dirty="0"/>
           </a:p>
         </p:txBody>
       </p:sp>
@@ -5086,7 +5200,7 @@
                 <a:ea typeface="Aptos" pitchFamily="34" charset="-122"/>
                 <a:cs typeface="Aptos" pitchFamily="34" charset="-120"/>
               </a:rPr>
-              <a:t>© Paula Soper</a:t>
+              <a:t>Â© Paula Soper</a:t>
             </a:r>
             <a:endParaRPr lang="en-US" sz="800" dirty="0"/>
           </a:p>
@@ -5094,7 +5208,46 @@
       </p:sp>
       <p:sp>
         <p:nvSpPr>
-          <p:cNvPr id="7" name="Shape 5"/>
+          <p:cNvPr id="7" name="Text 5"/>
+          <p:cNvSpPr/>
+          <p:nvPr/>
+        </p:nvSpPr>
+        <p:spPr>
+          <a:xfrm>
+            <a:off x="11137392" y="6510528"/>
+            <a:ext cx="411480" cy="201168"/>
+          </a:xfrm>
+          <a:prstGeom prst="rect">
+            <a:avLst/>
+          </a:prstGeom>
+          <a:noFill/>
+          <a:ln/>
+        </p:spPr>
+        <p:txBody>
+          <a:bodyPr wrap="square" lIns="0" tIns="0" rIns="0" bIns="0" rtlCol="0" anchor="ctr"/>
+          <a:lstStyle/>
+          <a:p>
+            <a:pPr algn="r" indent="0" marL="0">
+              <a:buNone/>
+            </a:pPr>
+            <a:r>
+              <a:rPr lang="en-US" sz="900" dirty="0">
+                <a:solidFill>
+                  <a:srgbClr val="5F7181"/>
+                </a:solidFill>
+                <a:latin typeface="Aptos" pitchFamily="34" charset="0"/>
+                <a:ea typeface="Aptos" pitchFamily="34" charset="-122"/>
+                <a:cs typeface="Aptos" pitchFamily="34" charset="-120"/>
+              </a:rPr>
+              <a:t>13</a:t>
+            </a:r>
+            <a:endParaRPr lang="en-US" sz="900" dirty="0"/>
+          </a:p>
+        </p:txBody>
+      </p:sp>
+      <p:sp>
+        <p:nvSpPr>
+          <p:cNvPr id="8" name="Shape 6"/>
           <p:cNvSpPr/>
           <p:nvPr/>
         </p:nvSpPr>
@@ -5119,7 +5272,7 @@
       </p:sp>
       <p:sp>
         <p:nvSpPr>
-          <p:cNvPr id="8" name="Text 6"/>
+          <p:cNvPr id="9" name="Text 7"/>
           <p:cNvSpPr/>
           <p:nvPr/>
         </p:nvSpPr>
@@ -5158,14 +5311,14 @@
       </p:sp>
       <p:sp>
         <p:nvSpPr>
-          <p:cNvPr id="9" name="Text 7"/>
+          <p:cNvPr id="10" name="Text 8"/>
           <p:cNvSpPr/>
           <p:nvPr/>
         </p:nvSpPr>
         <p:spPr>
           <a:xfrm>
             <a:off x="640080" y="621792"/>
-            <a:ext cx="10881360" cy="566928"/>
+            <a:ext cx="10881360" cy="713232"/>
           </a:xfrm>
           <a:prstGeom prst="rect">
             <a:avLst/>
@@ -5183,7 +5336,7 @@
               <a:buNone/>
             </a:pPr>
             <a:r>
-              <a:rPr lang="en-US" sz="2700" b="1" dirty="0">
+              <a:rPr lang="en-US" sz="3400" b="1" dirty="0">
                 <a:solidFill>
                   <a:srgbClr val="003A63"/>
                 </a:solidFill>
@@ -5193,20 +5346,20 @@
               </a:rPr>
               <a:t>Application to AI-Supported Workflows</a:t>
             </a:r>
-            <a:endParaRPr lang="en-US" sz="2700" dirty="0"/>
-          </a:p>
-        </p:txBody>
-      </p:sp>
-      <p:sp>
-        <p:nvSpPr>
-          <p:cNvPr id="10" name="Text 8"/>
-          <p:cNvSpPr/>
-          <p:nvPr/>
-        </p:nvSpPr>
-        <p:spPr>
-          <a:xfrm>
-            <a:off x="868680" y="1417320"/>
-            <a:ext cx="6675120" cy="4434840"/>
+            <a:endParaRPr lang="en-US" sz="3400" dirty="0"/>
+          </a:p>
+        </p:txBody>
+      </p:sp>
+      <p:sp>
+        <p:nvSpPr>
+          <p:cNvPr id="11" name="Text 9"/>
+          <p:cNvSpPr/>
+          <p:nvPr/>
+        </p:nvSpPr>
+        <p:spPr>
+          <a:xfrm>
+            <a:off x="868680" y="1508760"/>
+            <a:ext cx="6537960" cy="4160520"/>
           </a:xfrm>
           <a:prstGeom prst="rect">
             <a:avLst/>
@@ -5221,7 +5374,7 @@
           <a:lstStyle/>
           <a:p>
             <a:r>
-              <a:rPr lang="en-US" sz="1700" dirty="0">
+              <a:rPr lang="en-US" sz="2100" dirty="0">
                 <a:solidFill>
                   <a:srgbClr val="17364A"/>
                 </a:solidFill>
@@ -5229,13 +5382,13 @@
                 <a:ea typeface="Aptos" pitchFamily="34" charset="-122"/>
                 <a:cs typeface="Aptos" pitchFamily="34" charset="-120"/>
               </a:rPr>
-              <a:t>This topic applies across generative AI, predictive analytics, NLP, RAG, automation, and agentic workflows.</a:t>
-            </a:r>
-            <a:endParaRPr lang="en-US" sz="1700" dirty="0"/>
-          </a:p>
-          <a:p>
-            <a:r>
-              <a:rPr lang="en-US" sz="1700" dirty="0">
+              <a:t>This topic applies across generative AI, predictive analytics, NLP, RAG, automation, and agentic.</a:t>
+            </a:r>
+            <a:endParaRPr lang="en-US" sz="2100" dirty="0"/>
+          </a:p>
+          <a:p>
+            <a:r>
+              <a:rPr lang="en-US" sz="2100" dirty="0">
                 <a:solidFill>
                   <a:srgbClr val="17364A"/>
                 </a:solidFill>
@@ -5243,15 +5396,15 @@
                 <a:ea typeface="Aptos" pitchFamily="34" charset="-122"/>
                 <a:cs typeface="Aptos" pitchFamily="34" charset="-120"/>
               </a:rPr>
-              <a:t>The more sensitive the data, the more consequential the output, or the more automated the action, the stronger the.</a:t>
-            </a:r>
-            <a:endParaRPr lang="en-US" sz="1700" dirty="0"/>
-          </a:p>
-        </p:txBody>
-      </p:sp>
-      <p:sp>
-        <p:nvSpPr>
-          <p:cNvPr id="11" name="Shape 9"/>
+              <a:t>The more sensitive the data, the more consequential the output, or the more automated the action, the.</a:t>
+            </a:r>
+            <a:endParaRPr lang="en-US" sz="2100" dirty="0"/>
+          </a:p>
+        </p:txBody>
+      </p:sp>
+      <p:sp>
+        <p:nvSpPr>
+          <p:cNvPr id="12" name="Shape 10"/>
           <p:cNvSpPr/>
           <p:nvPr/>
         </p:nvSpPr>
@@ -5278,14 +5431,14 @@
       </p:sp>
       <p:sp>
         <p:nvSpPr>
-          <p:cNvPr id="12" name="Text 10"/>
+          <p:cNvPr id="13" name="Text 11"/>
           <p:cNvSpPr/>
           <p:nvPr/>
         </p:nvSpPr>
         <p:spPr>
           <a:xfrm>
             <a:off x="8074152" y="1563624"/>
-            <a:ext cx="2825496" cy="201168"/>
+            <a:ext cx="2825496" cy="256032"/>
           </a:xfrm>
           <a:prstGeom prst="rect">
             <a:avLst/>
@@ -5301,7 +5454,7 @@
               <a:buNone/>
             </a:pPr>
             <a:r>
-              <a:rPr lang="en-US" sz="950" b="1" dirty="0">
+              <a:rPr lang="en-US" sz="1300" b="1" dirty="0">
                 <a:solidFill>
                   <a:srgbClr val="0068B7"/>
                 </a:solidFill>
@@ -5311,20 +5464,20 @@
               </a:rPr>
               <a:t>Key idea</a:t>
             </a:r>
-            <a:endParaRPr lang="en-US" sz="950" dirty="0"/>
-          </a:p>
-        </p:txBody>
-      </p:sp>
-      <p:sp>
-        <p:nvSpPr>
-          <p:cNvPr id="13" name="Text 11"/>
-          <p:cNvSpPr/>
-          <p:nvPr/>
-        </p:nvSpPr>
-        <p:spPr>
-          <a:xfrm>
-            <a:off x="8074152" y="1856232"/>
-            <a:ext cx="2825496" cy="1261872"/>
+            <a:endParaRPr lang="en-US" sz="1300" dirty="0"/>
+          </a:p>
+        </p:txBody>
+      </p:sp>
+      <p:sp>
+        <p:nvSpPr>
+          <p:cNvPr id="14" name="Text 12"/>
+          <p:cNvSpPr/>
+          <p:nvPr/>
+        </p:nvSpPr>
+        <p:spPr>
+          <a:xfrm>
+            <a:off x="8074152" y="1920240"/>
+            <a:ext cx="2825496" cy="1188720"/>
           </a:xfrm>
           <a:prstGeom prst="rect">
             <a:avLst/>
@@ -5342,7 +5495,7 @@
               <a:buNone/>
             </a:pPr>
             <a:r>
-              <a:rPr lang="en-US" sz="1250" dirty="0">
+              <a:rPr lang="en-US" sz="1550" dirty="0">
                 <a:solidFill>
                   <a:srgbClr val="17364A"/>
                 </a:solidFill>
@@ -5350,15 +5503,15 @@
                 <a:ea typeface="Aptos" pitchFamily="34" charset="-122"/>
                 <a:cs typeface="Aptos" pitchFamily="34" charset="-120"/>
               </a:rPr>
-              <a:t>This topic applies across generative AI, predictive analytics, NLP, RAG, automation, and agentic workflows.</a:t>
-            </a:r>
-            <a:endParaRPr lang="en-US" sz="1250" dirty="0"/>
-          </a:p>
-        </p:txBody>
-      </p:sp>
-      <p:sp>
-        <p:nvSpPr>
-          <p:cNvPr id="14" name="Shape 12"/>
+              <a:t>This topic applies across generative AI, predictive analytics, NLP, RAG, automation, and agentic.</a:t>
+            </a:r>
+            <a:endParaRPr lang="en-US" sz="1550" dirty="0"/>
+          </a:p>
+        </p:txBody>
+      </p:sp>
+      <p:sp>
+        <p:nvSpPr>
+          <p:cNvPr id="15" name="Shape 13"/>
           <p:cNvSpPr/>
           <p:nvPr/>
         </p:nvSpPr>
@@ -5385,14 +5538,14 @@
       </p:sp>
       <p:sp>
         <p:nvSpPr>
-          <p:cNvPr id="15" name="Text 13"/>
+          <p:cNvPr id="16" name="Text 14"/>
           <p:cNvSpPr/>
           <p:nvPr/>
         </p:nvSpPr>
         <p:spPr>
           <a:xfrm>
             <a:off x="8074152" y="3666744"/>
-            <a:ext cx="2825496" cy="201168"/>
+            <a:ext cx="2825496" cy="256032"/>
           </a:xfrm>
           <a:prstGeom prst="rect">
             <a:avLst/>
@@ -5408,7 +5561,7 @@
               <a:buNone/>
             </a:pPr>
             <a:r>
-              <a:rPr lang="en-US" sz="950" b="1" dirty="0">
+              <a:rPr lang="en-US" sz="1300" b="1" dirty="0">
                 <a:solidFill>
                   <a:srgbClr val="0068B7"/>
                 </a:solidFill>
@@ -5418,20 +5571,20 @@
               </a:rPr>
               <a:t>Use this for</a:t>
             </a:r>
-            <a:endParaRPr lang="en-US" sz="950" dirty="0"/>
-          </a:p>
-        </p:txBody>
-      </p:sp>
-      <p:sp>
-        <p:nvSpPr>
-          <p:cNvPr id="16" name="Text 14"/>
-          <p:cNvSpPr/>
-          <p:nvPr/>
-        </p:nvSpPr>
-        <p:spPr>
-          <a:xfrm>
-            <a:off x="8074152" y="3959352"/>
-            <a:ext cx="2825496" cy="1170432"/>
+            <a:endParaRPr lang="en-US" sz="1300" dirty="0"/>
+          </a:p>
+        </p:txBody>
+      </p:sp>
+      <p:sp>
+        <p:nvSpPr>
+          <p:cNvPr id="17" name="Text 15"/>
+          <p:cNvSpPr/>
+          <p:nvPr/>
+        </p:nvSpPr>
+        <p:spPr>
+          <a:xfrm>
+            <a:off x="8074152" y="4023360"/>
+            <a:ext cx="2825496" cy="1097280"/>
           </a:xfrm>
           <a:prstGeom prst="rect">
             <a:avLst/>
@@ -5449,7 +5602,7 @@
               <a:buNone/>
             </a:pPr>
             <a:r>
-              <a:rPr lang="en-US" sz="1250" dirty="0">
+              <a:rPr lang="en-US" sz="1550" dirty="0">
                 <a:solidFill>
                   <a:srgbClr val="17364A"/>
                 </a:solidFill>
@@ -5459,7 +5612,7 @@
               </a:rPr>
               <a:t>Connect the concept to public health decisions, safeguards, documentation, or implementation work.</a:t>
             </a:r>
-            <a:endParaRPr lang="en-US" sz="1250" dirty="0"/>
+            <a:endParaRPr lang="en-US" sz="1550" dirty="0"/>
           </a:p>
         </p:txBody>
       </p:sp>
@@ -5656,7 +5809,7 @@
                 <a:ea typeface="Aptos" pitchFamily="34" charset="-122"/>
                 <a:cs typeface="Aptos" pitchFamily="34" charset="-120"/>
               </a:rPr>
-              <a:t>© Paula Soper</a:t>
+              <a:t>Â© Paula Soper</a:t>
             </a:r>
             <a:endParaRPr lang="en-US" sz="800" dirty="0"/>
           </a:p>
@@ -5664,7 +5817,46 @@
       </p:sp>
       <p:sp>
         <p:nvSpPr>
-          <p:cNvPr id="7" name="Shape 5"/>
+          <p:cNvPr id="7" name="Text 5"/>
+          <p:cNvSpPr/>
+          <p:nvPr/>
+        </p:nvSpPr>
+        <p:spPr>
+          <a:xfrm>
+            <a:off x="11137392" y="6510528"/>
+            <a:ext cx="411480" cy="201168"/>
+          </a:xfrm>
+          <a:prstGeom prst="rect">
+            <a:avLst/>
+          </a:prstGeom>
+          <a:noFill/>
+          <a:ln/>
+        </p:spPr>
+        <p:txBody>
+          <a:bodyPr wrap="square" lIns="0" tIns="0" rIns="0" bIns="0" rtlCol="0" anchor="ctr"/>
+          <a:lstStyle/>
+          <a:p>
+            <a:pPr algn="r" indent="0" marL="0">
+              <a:buNone/>
+            </a:pPr>
+            <a:r>
+              <a:rPr lang="en-US" sz="900" dirty="0">
+                <a:solidFill>
+                  <a:srgbClr val="5F7181"/>
+                </a:solidFill>
+                <a:latin typeface="Aptos" pitchFamily="34" charset="0"/>
+                <a:ea typeface="Aptos" pitchFamily="34" charset="-122"/>
+                <a:cs typeface="Aptos" pitchFamily="34" charset="-120"/>
+              </a:rPr>
+              <a:t>14</a:t>
+            </a:r>
+            <a:endParaRPr lang="en-US" sz="900" dirty="0"/>
+          </a:p>
+        </p:txBody>
+      </p:sp>
+      <p:sp>
+        <p:nvSpPr>
+          <p:cNvPr id="8" name="Shape 6"/>
           <p:cNvSpPr/>
           <p:nvPr/>
         </p:nvSpPr>
@@ -5689,7 +5881,7 @@
       </p:sp>
       <p:sp>
         <p:nvSpPr>
-          <p:cNvPr id="8" name="Text 6"/>
+          <p:cNvPr id="9" name="Text 7"/>
           <p:cNvSpPr/>
           <p:nvPr/>
         </p:nvSpPr>
@@ -5728,14 +5920,14 @@
       </p:sp>
       <p:sp>
         <p:nvSpPr>
-          <p:cNvPr id="9" name="Text 7"/>
+          <p:cNvPr id="10" name="Text 8"/>
           <p:cNvSpPr/>
           <p:nvPr/>
         </p:nvSpPr>
         <p:spPr>
           <a:xfrm>
             <a:off x="640080" y="621792"/>
-            <a:ext cx="10881360" cy="566928"/>
+            <a:ext cx="10881360" cy="713232"/>
           </a:xfrm>
           <a:prstGeom prst="rect">
             <a:avLst/>
@@ -5753,7 +5945,7 @@
               <a:buNone/>
             </a:pPr>
             <a:r>
-              <a:rPr lang="en-US" sz="2700" b="1" dirty="0">
+              <a:rPr lang="en-US" sz="3400" b="1" dirty="0">
                 <a:solidFill>
                   <a:srgbClr val="003A63"/>
                 </a:solidFill>
@@ -5763,20 +5955,20 @@
               </a:rPr>
               <a:t>Reflection Questions</a:t>
             </a:r>
-            <a:endParaRPr lang="en-US" sz="2700" dirty="0"/>
-          </a:p>
-        </p:txBody>
-      </p:sp>
-      <p:sp>
-        <p:nvSpPr>
-          <p:cNvPr id="10" name="Text 8"/>
-          <p:cNvSpPr/>
-          <p:nvPr/>
-        </p:nvSpPr>
-        <p:spPr>
-          <a:xfrm>
-            <a:off x="868680" y="1417320"/>
-            <a:ext cx="6675120" cy="4434840"/>
+            <a:endParaRPr lang="en-US" sz="3400" dirty="0"/>
+          </a:p>
+        </p:txBody>
+      </p:sp>
+      <p:sp>
+        <p:nvSpPr>
+          <p:cNvPr id="11" name="Text 9"/>
+          <p:cNvSpPr/>
+          <p:nvPr/>
+        </p:nvSpPr>
+        <p:spPr>
+          <a:xfrm>
+            <a:off x="868680" y="1508760"/>
+            <a:ext cx="6537960" cy="4160520"/>
           </a:xfrm>
           <a:prstGeom prst="rect">
             <a:avLst/>
@@ -5791,7 +5983,7 @@
           <a:lstStyle/>
           <a:p>
             <a:r>
-              <a:rPr lang="en-US" sz="1700" dirty="0">
+              <a:rPr lang="en-US" sz="2100" dirty="0">
                 <a:solidFill>
                   <a:srgbClr val="17364A"/>
                 </a:solidFill>
@@ -5801,11 +5993,11 @@
               </a:rPr>
               <a:t>What public health decision or workflow does this topic affect?</a:t>
             </a:r>
-            <a:endParaRPr lang="en-US" sz="1700" dirty="0"/>
-          </a:p>
-          <a:p>
-            <a:r>
-              <a:rPr lang="en-US" sz="1700" dirty="0">
+            <a:endParaRPr lang="en-US" sz="2100" dirty="0"/>
+          </a:p>
+          <a:p>
+            <a:r>
+              <a:rPr lang="en-US" sz="2100" dirty="0">
                 <a:solidFill>
                   <a:srgbClr val="17364A"/>
                 </a:solidFill>
@@ -5815,11 +6007,11 @@
               </a:rPr>
               <a:t>Who has authority to approve or pause the work?</a:t>
             </a:r>
-            <a:endParaRPr lang="en-US" sz="1700" dirty="0"/>
-          </a:p>
-          <a:p>
-            <a:r>
-              <a:rPr lang="en-US" sz="1700" dirty="0">
+            <a:endParaRPr lang="en-US" sz="2100" dirty="0"/>
+          </a:p>
+          <a:p>
+            <a:r>
+              <a:rPr lang="en-US" sz="2100" dirty="0">
                 <a:solidFill>
                   <a:srgbClr val="17364A"/>
                 </a:solidFill>
@@ -5829,13 +6021,13 @@
               </a:rPr>
               <a:t>What evidence would show that the workflow is responsible and effective?</a:t>
             </a:r>
-            <a:endParaRPr lang="en-US" sz="1700" dirty="0"/>
-          </a:p>
-        </p:txBody>
-      </p:sp>
-      <p:sp>
-        <p:nvSpPr>
-          <p:cNvPr id="11" name="Shape 9"/>
+            <a:endParaRPr lang="en-US" sz="2100" dirty="0"/>
+          </a:p>
+        </p:txBody>
+      </p:sp>
+      <p:sp>
+        <p:nvSpPr>
+          <p:cNvPr id="12" name="Shape 10"/>
           <p:cNvSpPr/>
           <p:nvPr/>
         </p:nvSpPr>
@@ -5862,14 +6054,14 @@
       </p:sp>
       <p:sp>
         <p:nvSpPr>
-          <p:cNvPr id="12" name="Text 10"/>
+          <p:cNvPr id="13" name="Text 11"/>
           <p:cNvSpPr/>
           <p:nvPr/>
         </p:nvSpPr>
         <p:spPr>
           <a:xfrm>
             <a:off x="8074152" y="1563624"/>
-            <a:ext cx="2825496" cy="201168"/>
+            <a:ext cx="2825496" cy="256032"/>
           </a:xfrm>
           <a:prstGeom prst="rect">
             <a:avLst/>
@@ -5885,7 +6077,7 @@
               <a:buNone/>
             </a:pPr>
             <a:r>
-              <a:rPr lang="en-US" sz="950" b="1" dirty="0">
+              <a:rPr lang="en-US" sz="1300" b="1" dirty="0">
                 <a:solidFill>
                   <a:srgbClr val="0068B7"/>
                 </a:solidFill>
@@ -5895,20 +6087,20 @@
               </a:rPr>
               <a:t>Key idea</a:t>
             </a:r>
-            <a:endParaRPr lang="en-US" sz="950" dirty="0"/>
-          </a:p>
-        </p:txBody>
-      </p:sp>
-      <p:sp>
-        <p:nvSpPr>
-          <p:cNvPr id="13" name="Text 11"/>
-          <p:cNvSpPr/>
-          <p:nvPr/>
-        </p:nvSpPr>
-        <p:spPr>
-          <a:xfrm>
-            <a:off x="8074152" y="1856232"/>
-            <a:ext cx="2825496" cy="1261872"/>
+            <a:endParaRPr lang="en-US" sz="1300" dirty="0"/>
+          </a:p>
+        </p:txBody>
+      </p:sp>
+      <p:sp>
+        <p:nvSpPr>
+          <p:cNvPr id="14" name="Text 12"/>
+          <p:cNvSpPr/>
+          <p:nvPr/>
+        </p:nvSpPr>
+        <p:spPr>
+          <a:xfrm>
+            <a:off x="8074152" y="1920240"/>
+            <a:ext cx="2825496" cy="1188720"/>
           </a:xfrm>
           <a:prstGeom prst="rect">
             <a:avLst/>
@@ -5926,7 +6118,7 @@
               <a:buNone/>
             </a:pPr>
             <a:r>
-              <a:rPr lang="en-US" sz="1250" dirty="0">
+              <a:rPr lang="en-US" sz="1550" dirty="0">
                 <a:solidFill>
                   <a:srgbClr val="17364A"/>
                 </a:solidFill>
@@ -5936,13 +6128,13 @@
               </a:rPr>
               <a:t>What public health decision or workflow does this topic affect?</a:t>
             </a:r>
-            <a:endParaRPr lang="en-US" sz="1250" dirty="0"/>
-          </a:p>
-        </p:txBody>
-      </p:sp>
-      <p:sp>
-        <p:nvSpPr>
-          <p:cNvPr id="14" name="Shape 12"/>
+            <a:endParaRPr lang="en-US" sz="1550" dirty="0"/>
+          </a:p>
+        </p:txBody>
+      </p:sp>
+      <p:sp>
+        <p:nvSpPr>
+          <p:cNvPr id="15" name="Shape 13"/>
           <p:cNvSpPr/>
           <p:nvPr/>
         </p:nvSpPr>
@@ -5969,14 +6161,14 @@
       </p:sp>
       <p:sp>
         <p:nvSpPr>
-          <p:cNvPr id="15" name="Text 13"/>
+          <p:cNvPr id="16" name="Text 14"/>
           <p:cNvSpPr/>
           <p:nvPr/>
         </p:nvSpPr>
         <p:spPr>
           <a:xfrm>
             <a:off x="8074152" y="3666744"/>
-            <a:ext cx="2825496" cy="201168"/>
+            <a:ext cx="2825496" cy="256032"/>
           </a:xfrm>
           <a:prstGeom prst="rect">
             <a:avLst/>
@@ -5992,7 +6184,7 @@
               <a:buNone/>
             </a:pPr>
             <a:r>
-              <a:rPr lang="en-US" sz="950" b="1" dirty="0">
+              <a:rPr lang="en-US" sz="1300" b="1" dirty="0">
                 <a:solidFill>
                   <a:srgbClr val="0068B7"/>
                 </a:solidFill>
@@ -6002,20 +6194,20 @@
               </a:rPr>
               <a:t>Use this for</a:t>
             </a:r>
-            <a:endParaRPr lang="en-US" sz="950" dirty="0"/>
-          </a:p>
-        </p:txBody>
-      </p:sp>
-      <p:sp>
-        <p:nvSpPr>
-          <p:cNvPr id="16" name="Text 14"/>
-          <p:cNvSpPr/>
-          <p:nvPr/>
-        </p:nvSpPr>
-        <p:spPr>
-          <a:xfrm>
-            <a:off x="8074152" y="3959352"/>
-            <a:ext cx="2825496" cy="1170432"/>
+            <a:endParaRPr lang="en-US" sz="1300" dirty="0"/>
+          </a:p>
+        </p:txBody>
+      </p:sp>
+      <p:sp>
+        <p:nvSpPr>
+          <p:cNvPr id="17" name="Text 15"/>
+          <p:cNvSpPr/>
+          <p:nvPr/>
+        </p:nvSpPr>
+        <p:spPr>
+          <a:xfrm>
+            <a:off x="8074152" y="4023360"/>
+            <a:ext cx="2825496" cy="1097280"/>
           </a:xfrm>
           <a:prstGeom prst="rect">
             <a:avLst/>
@@ -6033,7 +6225,7 @@
               <a:buNone/>
             </a:pPr>
             <a:r>
-              <a:rPr lang="en-US" sz="1250" dirty="0">
+              <a:rPr lang="en-US" sz="1550" dirty="0">
                 <a:solidFill>
                   <a:srgbClr val="17364A"/>
                 </a:solidFill>
@@ -6043,7 +6235,7 @@
               </a:rPr>
               <a:t>Connect the concept to public health decisions, safeguards, documentation, or implementation work.</a:t>
             </a:r>
-            <a:endParaRPr lang="en-US" sz="1250" dirty="0"/>
+            <a:endParaRPr lang="en-US" sz="1550" dirty="0"/>
           </a:p>
         </p:txBody>
       </p:sp>
@@ -6240,7 +6432,7 @@
                 <a:ea typeface="Aptos" pitchFamily="34" charset="-122"/>
                 <a:cs typeface="Aptos" pitchFamily="34" charset="-120"/>
               </a:rPr>
-              <a:t>© Paula Soper</a:t>
+              <a:t>Â© Paula Soper</a:t>
             </a:r>
             <a:endParaRPr lang="en-US" sz="800" dirty="0"/>
           </a:p>
@@ -6254,8 +6446,47 @@
         </p:nvSpPr>
         <p:spPr>
           <a:xfrm>
+            <a:off x="11137392" y="6510528"/>
+            <a:ext cx="411480" cy="201168"/>
+          </a:xfrm>
+          <a:prstGeom prst="rect">
+            <a:avLst/>
+          </a:prstGeom>
+          <a:noFill/>
+          <a:ln/>
+        </p:spPr>
+        <p:txBody>
+          <a:bodyPr wrap="square" lIns="0" tIns="0" rIns="0" bIns="0" rtlCol="0" anchor="ctr"/>
+          <a:lstStyle/>
+          <a:p>
+            <a:pPr algn="r" indent="0" marL="0">
+              <a:buNone/>
+            </a:pPr>
+            <a:r>
+              <a:rPr lang="en-US" sz="900" dirty="0">
+                <a:solidFill>
+                  <a:srgbClr val="5F7181"/>
+                </a:solidFill>
+                <a:latin typeface="Aptos" pitchFamily="34" charset="0"/>
+                <a:ea typeface="Aptos" pitchFamily="34" charset="-122"/>
+                <a:cs typeface="Aptos" pitchFamily="34" charset="-120"/>
+              </a:rPr>
+              <a:t>15</a:t>
+            </a:r>
+            <a:endParaRPr lang="en-US" sz="900" dirty="0"/>
+          </a:p>
+        </p:txBody>
+      </p:sp>
+      <p:sp>
+        <p:nvSpPr>
+          <p:cNvPr id="8" name="Text 6"/>
+          <p:cNvSpPr/>
+          <p:nvPr/>
+        </p:nvSpPr>
+        <p:spPr>
+          <a:xfrm>
             <a:off x="640080" y="658368"/>
-            <a:ext cx="10881360" cy="566928"/>
+            <a:ext cx="10881360" cy="713232"/>
           </a:xfrm>
           <a:prstGeom prst="rect">
             <a:avLst/>
@@ -6273,7 +6504,7 @@
               <a:buNone/>
             </a:pPr>
             <a:r>
-              <a:rPr lang="en-US" sz="2700" b="1" dirty="0">
+              <a:rPr lang="en-US" sz="3400" b="1" dirty="0">
                 <a:solidFill>
                   <a:srgbClr val="003A63"/>
                 </a:solidFill>
@@ -6283,20 +6514,20 @@
               </a:rPr>
               <a:t>Reflection Questions Continued</a:t>
             </a:r>
-            <a:endParaRPr lang="en-US" sz="2700" dirty="0"/>
-          </a:p>
-        </p:txBody>
-      </p:sp>
-      <p:sp>
-        <p:nvSpPr>
-          <p:cNvPr id="8" name="Text 6"/>
-          <p:cNvSpPr/>
-          <p:nvPr/>
-        </p:nvSpPr>
-        <p:spPr>
-          <a:xfrm>
-            <a:off x="868680" y="1417320"/>
-            <a:ext cx="6675120" cy="4434840"/>
+            <a:endParaRPr lang="en-US" sz="3400" dirty="0"/>
+          </a:p>
+        </p:txBody>
+      </p:sp>
+      <p:sp>
+        <p:nvSpPr>
+          <p:cNvPr id="9" name="Text 7"/>
+          <p:cNvSpPr/>
+          <p:nvPr/>
+        </p:nvSpPr>
+        <p:spPr>
+          <a:xfrm>
+            <a:off x="868680" y="1508760"/>
+            <a:ext cx="6537960" cy="4160520"/>
           </a:xfrm>
           <a:prstGeom prst="rect">
             <a:avLst/>
@@ -6311,7 +6542,7 @@
           <a:lstStyle/>
           <a:p>
             <a:r>
-              <a:rPr lang="en-US" sz="1700" dirty="0">
+              <a:rPr lang="en-US" sz="2100" dirty="0">
                 <a:solidFill>
                   <a:srgbClr val="17364A"/>
                 </a:solidFill>
@@ -6321,11 +6552,11 @@
               </a:rPr>
               <a:t>What equity, privacy, legal, security, or public trust risks require review?</a:t>
             </a:r>
-            <a:endParaRPr lang="en-US" sz="1700" dirty="0"/>
-          </a:p>
-          <a:p>
-            <a:r>
-              <a:rPr lang="en-US" sz="1700" dirty="0">
+            <a:endParaRPr lang="en-US" sz="2100" dirty="0"/>
+          </a:p>
+          <a:p>
+            <a:r>
+              <a:rPr lang="en-US" sz="2100" dirty="0">
                 <a:solidFill>
                   <a:srgbClr val="17364A"/>
                 </a:solidFill>
@@ -6335,13 +6566,13 @@
               </a:rPr>
               <a:t>How will the agency know when the workflow needs to be revised?</a:t>
             </a:r>
-            <a:endParaRPr lang="en-US" sz="1700" dirty="0"/>
-          </a:p>
-        </p:txBody>
-      </p:sp>
-      <p:sp>
-        <p:nvSpPr>
-          <p:cNvPr id="9" name="Shape 7"/>
+            <a:endParaRPr lang="en-US" sz="2100" dirty="0"/>
+          </a:p>
+        </p:txBody>
+      </p:sp>
+      <p:sp>
+        <p:nvSpPr>
+          <p:cNvPr id="10" name="Shape 8"/>
           <p:cNvSpPr/>
           <p:nvPr/>
         </p:nvSpPr>
@@ -6368,14 +6599,14 @@
       </p:sp>
       <p:sp>
         <p:nvSpPr>
-          <p:cNvPr id="10" name="Text 8"/>
+          <p:cNvPr id="11" name="Text 9"/>
           <p:cNvSpPr/>
           <p:nvPr/>
         </p:nvSpPr>
         <p:spPr>
           <a:xfrm>
             <a:off x="8074152" y="1563624"/>
-            <a:ext cx="2825496" cy="201168"/>
+            <a:ext cx="2825496" cy="256032"/>
           </a:xfrm>
           <a:prstGeom prst="rect">
             <a:avLst/>
@@ -6391,7 +6622,7 @@
               <a:buNone/>
             </a:pPr>
             <a:r>
-              <a:rPr lang="en-US" sz="950" b="1" dirty="0">
+              <a:rPr lang="en-US" sz="1300" b="1" dirty="0">
                 <a:solidFill>
                   <a:srgbClr val="0068B7"/>
                 </a:solidFill>
@@ -6401,20 +6632,20 @@
               </a:rPr>
               <a:t>Key idea</a:t>
             </a:r>
-            <a:endParaRPr lang="en-US" sz="950" dirty="0"/>
-          </a:p>
-        </p:txBody>
-      </p:sp>
-      <p:sp>
-        <p:nvSpPr>
-          <p:cNvPr id="11" name="Text 9"/>
-          <p:cNvSpPr/>
-          <p:nvPr/>
-        </p:nvSpPr>
-        <p:spPr>
-          <a:xfrm>
-            <a:off x="8074152" y="1856232"/>
-            <a:ext cx="2825496" cy="1261872"/>
+            <a:endParaRPr lang="en-US" sz="1300" dirty="0"/>
+          </a:p>
+        </p:txBody>
+      </p:sp>
+      <p:sp>
+        <p:nvSpPr>
+          <p:cNvPr id="12" name="Text 10"/>
+          <p:cNvSpPr/>
+          <p:nvPr/>
+        </p:nvSpPr>
+        <p:spPr>
+          <a:xfrm>
+            <a:off x="8074152" y="1920240"/>
+            <a:ext cx="2825496" cy="1188720"/>
           </a:xfrm>
           <a:prstGeom prst="rect">
             <a:avLst/>
@@ -6432,7 +6663,7 @@
               <a:buNone/>
             </a:pPr>
             <a:r>
-              <a:rPr lang="en-US" sz="1250" dirty="0">
+              <a:rPr lang="en-US" sz="1550" dirty="0">
                 <a:solidFill>
                   <a:srgbClr val="17364A"/>
                 </a:solidFill>
@@ -6442,13 +6673,13 @@
               </a:rPr>
               <a:t>What equity, privacy, legal, security, or public trust risks require review?</a:t>
             </a:r>
-            <a:endParaRPr lang="en-US" sz="1250" dirty="0"/>
-          </a:p>
-        </p:txBody>
-      </p:sp>
-      <p:sp>
-        <p:nvSpPr>
-          <p:cNvPr id="12" name="Shape 10"/>
+            <a:endParaRPr lang="en-US" sz="1550" dirty="0"/>
+          </a:p>
+        </p:txBody>
+      </p:sp>
+      <p:sp>
+        <p:nvSpPr>
+          <p:cNvPr id="13" name="Shape 11"/>
           <p:cNvSpPr/>
           <p:nvPr/>
         </p:nvSpPr>
@@ -6475,14 +6706,14 @@
       </p:sp>
       <p:sp>
         <p:nvSpPr>
-          <p:cNvPr id="13" name="Text 11"/>
+          <p:cNvPr id="14" name="Text 12"/>
           <p:cNvSpPr/>
           <p:nvPr/>
         </p:nvSpPr>
         <p:spPr>
           <a:xfrm>
             <a:off x="8074152" y="3666744"/>
-            <a:ext cx="2825496" cy="201168"/>
+            <a:ext cx="2825496" cy="256032"/>
           </a:xfrm>
           <a:prstGeom prst="rect">
             <a:avLst/>
@@ -6498,7 +6729,7 @@
               <a:buNone/>
             </a:pPr>
             <a:r>
-              <a:rPr lang="en-US" sz="950" b="1" dirty="0">
+              <a:rPr lang="en-US" sz="1300" b="1" dirty="0">
                 <a:solidFill>
                   <a:srgbClr val="0068B7"/>
                 </a:solidFill>
@@ -6508,20 +6739,20 @@
               </a:rPr>
               <a:t>Use this for</a:t>
             </a:r>
-            <a:endParaRPr lang="en-US" sz="950" dirty="0"/>
-          </a:p>
-        </p:txBody>
-      </p:sp>
-      <p:sp>
-        <p:nvSpPr>
-          <p:cNvPr id="14" name="Text 12"/>
-          <p:cNvSpPr/>
-          <p:nvPr/>
-        </p:nvSpPr>
-        <p:spPr>
-          <a:xfrm>
-            <a:off x="8074152" y="3959352"/>
-            <a:ext cx="2825496" cy="1170432"/>
+            <a:endParaRPr lang="en-US" sz="1300" dirty="0"/>
+          </a:p>
+        </p:txBody>
+      </p:sp>
+      <p:sp>
+        <p:nvSpPr>
+          <p:cNvPr id="15" name="Text 13"/>
+          <p:cNvSpPr/>
+          <p:nvPr/>
+        </p:nvSpPr>
+        <p:spPr>
+          <a:xfrm>
+            <a:off x="8074152" y="4023360"/>
+            <a:ext cx="2825496" cy="1097280"/>
           </a:xfrm>
           <a:prstGeom prst="rect">
             <a:avLst/>
@@ -6539,7 +6770,7 @@
               <a:buNone/>
             </a:pPr>
             <a:r>
-              <a:rPr lang="en-US" sz="1250" dirty="0">
+              <a:rPr lang="en-US" sz="1550" dirty="0">
                 <a:solidFill>
                   <a:srgbClr val="17364A"/>
                 </a:solidFill>
@@ -6549,7 +6780,7 @@
               </a:rPr>
               <a:t>Connect the concept to public health decisions, safeguards, documentation, or implementation work.</a:t>
             </a:r>
-            <a:endParaRPr lang="en-US" sz="1250" dirty="0"/>
+            <a:endParaRPr lang="en-US" sz="1550" dirty="0"/>
           </a:p>
         </p:txBody>
       </p:sp>
@@ -6746,7 +6977,7 @@
                 <a:ea typeface="Aptos" pitchFamily="34" charset="-122"/>
                 <a:cs typeface="Aptos" pitchFamily="34" charset="-120"/>
               </a:rPr>
-              <a:t>© Paula Soper</a:t>
+              <a:t>Â© Paula Soper</a:t>
             </a:r>
             <a:endParaRPr lang="en-US" sz="800" dirty="0"/>
           </a:p>
@@ -6754,7 +6985,46 @@
       </p:sp>
       <p:sp>
         <p:nvSpPr>
-          <p:cNvPr id="7" name="Shape 5"/>
+          <p:cNvPr id="7" name="Text 5"/>
+          <p:cNvSpPr/>
+          <p:nvPr/>
+        </p:nvSpPr>
+        <p:spPr>
+          <a:xfrm>
+            <a:off x="11137392" y="6510528"/>
+            <a:ext cx="411480" cy="201168"/>
+          </a:xfrm>
+          <a:prstGeom prst="rect">
+            <a:avLst/>
+          </a:prstGeom>
+          <a:noFill/>
+          <a:ln/>
+        </p:spPr>
+        <p:txBody>
+          <a:bodyPr wrap="square" lIns="0" tIns="0" rIns="0" bIns="0" rtlCol="0" anchor="ctr"/>
+          <a:lstStyle/>
+          <a:p>
+            <a:pPr algn="r" indent="0" marL="0">
+              <a:buNone/>
+            </a:pPr>
+            <a:r>
+              <a:rPr lang="en-US" sz="900" dirty="0">
+                <a:solidFill>
+                  <a:srgbClr val="5F7181"/>
+                </a:solidFill>
+                <a:latin typeface="Aptos" pitchFamily="34" charset="0"/>
+                <a:ea typeface="Aptos" pitchFamily="34" charset="-122"/>
+                <a:cs typeface="Aptos" pitchFamily="34" charset="-120"/>
+              </a:rPr>
+              <a:t>16</a:t>
+            </a:r>
+            <a:endParaRPr lang="en-US" sz="900" dirty="0"/>
+          </a:p>
+        </p:txBody>
+      </p:sp>
+      <p:sp>
+        <p:nvSpPr>
+          <p:cNvPr id="8" name="Shape 6"/>
           <p:cNvSpPr/>
           <p:nvPr/>
         </p:nvSpPr>
@@ -6779,7 +7049,7 @@
       </p:sp>
       <p:sp>
         <p:nvSpPr>
-          <p:cNvPr id="8" name="Text 6"/>
+          <p:cNvPr id="9" name="Text 7"/>
           <p:cNvSpPr/>
           <p:nvPr/>
         </p:nvSpPr>
@@ -6818,14 +7088,14 @@
       </p:sp>
       <p:sp>
         <p:nvSpPr>
-          <p:cNvPr id="9" name="Text 7"/>
+          <p:cNvPr id="10" name="Text 8"/>
           <p:cNvSpPr/>
           <p:nvPr/>
         </p:nvSpPr>
         <p:spPr>
           <a:xfrm>
             <a:off x="640080" y="621792"/>
-            <a:ext cx="10881360" cy="566928"/>
+            <a:ext cx="10881360" cy="713232"/>
           </a:xfrm>
           <a:prstGeom prst="rect">
             <a:avLst/>
@@ -6843,7 +7113,7 @@
               <a:buNone/>
             </a:pPr>
             <a:r>
-              <a:rPr lang="en-US" sz="2700" b="1" dirty="0">
+              <a:rPr lang="en-US" sz="3400" b="1" dirty="0">
                 <a:solidFill>
                   <a:srgbClr val="003A63"/>
                 </a:solidFill>
@@ -6853,20 +7123,20 @@
               </a:rPr>
               <a:t>Practical Exercise</a:t>
             </a:r>
-            <a:endParaRPr lang="en-US" sz="2700" dirty="0"/>
-          </a:p>
-        </p:txBody>
-      </p:sp>
-      <p:sp>
-        <p:nvSpPr>
-          <p:cNvPr id="10" name="Text 8"/>
-          <p:cNvSpPr/>
-          <p:nvPr/>
-        </p:nvSpPr>
-        <p:spPr>
-          <a:xfrm>
-            <a:off x="868680" y="1417320"/>
-            <a:ext cx="6675120" cy="4434840"/>
+            <a:endParaRPr lang="en-US" sz="3400" dirty="0"/>
+          </a:p>
+        </p:txBody>
+      </p:sp>
+      <p:sp>
+        <p:nvSpPr>
+          <p:cNvPr id="11" name="Text 9"/>
+          <p:cNvSpPr/>
+          <p:nvPr/>
+        </p:nvSpPr>
+        <p:spPr>
+          <a:xfrm>
+            <a:off x="868680" y="1508760"/>
+            <a:ext cx="6537960" cy="4160520"/>
           </a:xfrm>
           <a:prstGeom prst="rect">
             <a:avLst/>
@@ -6881,7 +7151,7 @@
           <a:lstStyle/>
           <a:p>
             <a:r>
-              <a:rPr lang="en-US" sz="1700" dirty="0">
+              <a:rPr lang="en-US" sz="2100" dirty="0">
                 <a:solidFill>
                   <a:srgbClr val="17364A"/>
                 </a:solidFill>
@@ -6889,13 +7159,13 @@
                 <a:ea typeface="Aptos" pitchFamily="34" charset="-122"/>
                 <a:cs typeface="Aptos" pitchFamily="34" charset="-120"/>
               </a:rPr>
-              <a:t>Create a practical grant and funding management for ai projects artifact for one AI-supported public health use case.</a:t>
-            </a:r>
-            <a:endParaRPr lang="en-US" sz="1700" dirty="0"/>
-          </a:p>
-          <a:p>
-            <a:r>
-              <a:rPr lang="en-US" sz="1700" dirty="0">
+              <a:t>Create a practical grant and funding management for ai projects artifact for one AI-supported public.</a:t>
+            </a:r>
+            <a:endParaRPr lang="en-US" sz="2100" dirty="0"/>
+          </a:p>
+          <a:p>
+            <a:r>
+              <a:rPr lang="en-US" sz="2100" dirty="0">
                 <a:solidFill>
                   <a:srgbClr val="17364A"/>
                 </a:solidFill>
@@ -6903,15 +7173,15 @@
                 <a:ea typeface="Aptos" pitchFamily="34" charset="-122"/>
                 <a:cs typeface="Aptos" pitchFamily="34" charset="-120"/>
               </a:rPr>
-              <a:t>The artifact should define the use case, affected roles, review criteria, safeguards, documentation expectations,.</a:t>
-            </a:r>
-            <a:endParaRPr lang="en-US" sz="1700" dirty="0"/>
-          </a:p>
-        </p:txBody>
-      </p:sp>
-      <p:sp>
-        <p:nvSpPr>
-          <p:cNvPr id="11" name="Shape 9"/>
+              <a:t>The artifact should define the use case, affected roles, review criteria, safeguards, documentation.</a:t>
+            </a:r>
+            <a:endParaRPr lang="en-US" sz="2100" dirty="0"/>
+          </a:p>
+        </p:txBody>
+      </p:sp>
+      <p:sp>
+        <p:nvSpPr>
+          <p:cNvPr id="12" name="Shape 10"/>
           <p:cNvSpPr/>
           <p:nvPr/>
         </p:nvSpPr>
@@ -6938,14 +7208,14 @@
       </p:sp>
       <p:sp>
         <p:nvSpPr>
-          <p:cNvPr id="12" name="Text 10"/>
+          <p:cNvPr id="13" name="Text 11"/>
           <p:cNvSpPr/>
           <p:nvPr/>
         </p:nvSpPr>
         <p:spPr>
           <a:xfrm>
             <a:off x="8074152" y="1563624"/>
-            <a:ext cx="2825496" cy="201168"/>
+            <a:ext cx="2825496" cy="256032"/>
           </a:xfrm>
           <a:prstGeom prst="rect">
             <a:avLst/>
@@ -6961,7 +7231,7 @@
               <a:buNone/>
             </a:pPr>
             <a:r>
-              <a:rPr lang="en-US" sz="950" b="1" dirty="0">
+              <a:rPr lang="en-US" sz="1300" b="1" dirty="0">
                 <a:solidFill>
                   <a:srgbClr val="0068B7"/>
                 </a:solidFill>
@@ -6971,20 +7241,20 @@
               </a:rPr>
               <a:t>Key idea</a:t>
             </a:r>
-            <a:endParaRPr lang="en-US" sz="950" dirty="0"/>
-          </a:p>
-        </p:txBody>
-      </p:sp>
-      <p:sp>
-        <p:nvSpPr>
-          <p:cNvPr id="13" name="Text 11"/>
-          <p:cNvSpPr/>
-          <p:nvPr/>
-        </p:nvSpPr>
-        <p:spPr>
-          <a:xfrm>
-            <a:off x="8074152" y="1856232"/>
-            <a:ext cx="2825496" cy="1261872"/>
+            <a:endParaRPr lang="en-US" sz="1300" dirty="0"/>
+          </a:p>
+        </p:txBody>
+      </p:sp>
+      <p:sp>
+        <p:nvSpPr>
+          <p:cNvPr id="14" name="Text 12"/>
+          <p:cNvSpPr/>
+          <p:nvPr/>
+        </p:nvSpPr>
+        <p:spPr>
+          <a:xfrm>
+            <a:off x="8074152" y="1920240"/>
+            <a:ext cx="2825496" cy="1188720"/>
           </a:xfrm>
           <a:prstGeom prst="rect">
             <a:avLst/>
@@ -7002,7 +7272,7 @@
               <a:buNone/>
             </a:pPr>
             <a:r>
-              <a:rPr lang="en-US" sz="1250" dirty="0">
+              <a:rPr lang="en-US" sz="1550" dirty="0">
                 <a:solidFill>
                   <a:srgbClr val="17364A"/>
                 </a:solidFill>
@@ -7010,15 +7280,15 @@
                 <a:ea typeface="Aptos" pitchFamily="34" charset="-122"/>
                 <a:cs typeface="Aptos" pitchFamily="34" charset="-120"/>
               </a:rPr>
-              <a:t>Create a practical grant and funding management for ai projects artifact for one AI-supported public health use case.</a:t>
-            </a:r>
-            <a:endParaRPr lang="en-US" sz="1250" dirty="0"/>
-          </a:p>
-        </p:txBody>
-      </p:sp>
-      <p:sp>
-        <p:nvSpPr>
-          <p:cNvPr id="14" name="Shape 12"/>
+              <a:t>Create a practical grant and funding management for ai projects artifact for one AI-supported public.</a:t>
+            </a:r>
+            <a:endParaRPr lang="en-US" sz="1550" dirty="0"/>
+          </a:p>
+        </p:txBody>
+      </p:sp>
+      <p:sp>
+        <p:nvSpPr>
+          <p:cNvPr id="15" name="Shape 13"/>
           <p:cNvSpPr/>
           <p:nvPr/>
         </p:nvSpPr>
@@ -7045,14 +7315,14 @@
       </p:sp>
       <p:sp>
         <p:nvSpPr>
-          <p:cNvPr id="15" name="Text 13"/>
+          <p:cNvPr id="16" name="Text 14"/>
           <p:cNvSpPr/>
           <p:nvPr/>
         </p:nvSpPr>
         <p:spPr>
           <a:xfrm>
             <a:off x="8074152" y="3666744"/>
-            <a:ext cx="2825496" cy="201168"/>
+            <a:ext cx="2825496" cy="256032"/>
           </a:xfrm>
           <a:prstGeom prst="rect">
             <a:avLst/>
@@ -7068,7 +7338,7 @@
               <a:buNone/>
             </a:pPr>
             <a:r>
-              <a:rPr lang="en-US" sz="950" b="1" dirty="0">
+              <a:rPr lang="en-US" sz="1300" b="1" dirty="0">
                 <a:solidFill>
                   <a:srgbClr val="0068B7"/>
                 </a:solidFill>
@@ -7078,20 +7348,20 @@
               </a:rPr>
               <a:t>Use this for</a:t>
             </a:r>
-            <a:endParaRPr lang="en-US" sz="950" dirty="0"/>
-          </a:p>
-        </p:txBody>
-      </p:sp>
-      <p:sp>
-        <p:nvSpPr>
-          <p:cNvPr id="16" name="Text 14"/>
-          <p:cNvSpPr/>
-          <p:nvPr/>
-        </p:nvSpPr>
-        <p:spPr>
-          <a:xfrm>
-            <a:off x="8074152" y="3959352"/>
-            <a:ext cx="2825496" cy="1170432"/>
+            <a:endParaRPr lang="en-US" sz="1300" dirty="0"/>
+          </a:p>
+        </p:txBody>
+      </p:sp>
+      <p:sp>
+        <p:nvSpPr>
+          <p:cNvPr id="17" name="Text 15"/>
+          <p:cNvSpPr/>
+          <p:nvPr/>
+        </p:nvSpPr>
+        <p:spPr>
+          <a:xfrm>
+            <a:off x="8074152" y="4023360"/>
+            <a:ext cx="2825496" cy="1097280"/>
           </a:xfrm>
           <a:prstGeom prst="rect">
             <a:avLst/>
@@ -7109,7 +7379,7 @@
               <a:buNone/>
             </a:pPr>
             <a:r>
-              <a:rPr lang="en-US" sz="1250" dirty="0">
+              <a:rPr lang="en-US" sz="1550" dirty="0">
                 <a:solidFill>
                   <a:srgbClr val="17364A"/>
                 </a:solidFill>
@@ -7119,7 +7389,7 @@
               </a:rPr>
               <a:t>Connect the concept to public health decisions, safeguards, documentation, or implementation work.</a:t>
             </a:r>
-            <a:endParaRPr lang="en-US" sz="1250" dirty="0"/>
+            <a:endParaRPr lang="en-US" sz="1550" dirty="0"/>
           </a:p>
         </p:txBody>
       </p:sp>
@@ -7316,7 +7586,7 @@
                 <a:ea typeface="Aptos" pitchFamily="34" charset="-122"/>
                 <a:cs typeface="Aptos" pitchFamily="34" charset="-120"/>
               </a:rPr>
-              <a:t>© Paula Soper</a:t>
+              <a:t>Â© Paula Soper</a:t>
             </a:r>
             <a:endParaRPr lang="en-US" sz="800" dirty="0"/>
           </a:p>
@@ -7324,7 +7594,46 @@
       </p:sp>
       <p:sp>
         <p:nvSpPr>
-          <p:cNvPr id="7" name="Shape 5"/>
+          <p:cNvPr id="7" name="Text 5"/>
+          <p:cNvSpPr/>
+          <p:nvPr/>
+        </p:nvSpPr>
+        <p:spPr>
+          <a:xfrm>
+            <a:off x="11137392" y="6510528"/>
+            <a:ext cx="411480" cy="201168"/>
+          </a:xfrm>
+          <a:prstGeom prst="rect">
+            <a:avLst/>
+          </a:prstGeom>
+          <a:noFill/>
+          <a:ln/>
+        </p:spPr>
+        <p:txBody>
+          <a:bodyPr wrap="square" lIns="0" tIns="0" rIns="0" bIns="0" rtlCol="0" anchor="ctr"/>
+          <a:lstStyle/>
+          <a:p>
+            <a:pPr algn="r" indent="0" marL="0">
+              <a:buNone/>
+            </a:pPr>
+            <a:r>
+              <a:rPr lang="en-US" sz="900" dirty="0">
+                <a:solidFill>
+                  <a:srgbClr val="5F7181"/>
+                </a:solidFill>
+                <a:latin typeface="Aptos" pitchFamily="34" charset="0"/>
+                <a:ea typeface="Aptos" pitchFamily="34" charset="-122"/>
+                <a:cs typeface="Aptos" pitchFamily="34" charset="-120"/>
+              </a:rPr>
+              <a:t>17</a:t>
+            </a:r>
+            <a:endParaRPr lang="en-US" sz="900" dirty="0"/>
+          </a:p>
+        </p:txBody>
+      </p:sp>
+      <p:sp>
+        <p:nvSpPr>
+          <p:cNvPr id="8" name="Shape 6"/>
           <p:cNvSpPr/>
           <p:nvPr/>
         </p:nvSpPr>
@@ -7349,7 +7658,7 @@
       </p:sp>
       <p:sp>
         <p:nvSpPr>
-          <p:cNvPr id="8" name="Text 6"/>
+          <p:cNvPr id="9" name="Text 7"/>
           <p:cNvSpPr/>
           <p:nvPr/>
         </p:nvSpPr>
@@ -7388,14 +7697,14 @@
       </p:sp>
       <p:sp>
         <p:nvSpPr>
-          <p:cNvPr id="9" name="Text 7"/>
+          <p:cNvPr id="10" name="Text 8"/>
           <p:cNvSpPr/>
           <p:nvPr/>
         </p:nvSpPr>
         <p:spPr>
           <a:xfrm>
             <a:off x="640080" y="621792"/>
-            <a:ext cx="10881360" cy="566928"/>
+            <a:ext cx="10881360" cy="713232"/>
           </a:xfrm>
           <a:prstGeom prst="rect">
             <a:avLst/>
@@ -7413,7 +7722,7 @@
               <a:buNone/>
             </a:pPr>
             <a:r>
-              <a:rPr lang="en-US" sz="2700" b="1" dirty="0">
+              <a:rPr lang="en-US" sz="3400" b="1" dirty="0">
                 <a:solidFill>
                   <a:srgbClr val="003A63"/>
                 </a:solidFill>
@@ -7423,20 +7732,20 @@
               </a:rPr>
               <a:t>Expected Artifact or Evidence</a:t>
             </a:r>
-            <a:endParaRPr lang="en-US" sz="2700" dirty="0"/>
-          </a:p>
-        </p:txBody>
-      </p:sp>
-      <p:sp>
-        <p:nvSpPr>
-          <p:cNvPr id="10" name="Text 8"/>
-          <p:cNvSpPr/>
-          <p:nvPr/>
-        </p:nvSpPr>
-        <p:spPr>
-          <a:xfrm>
-            <a:off x="868680" y="1417320"/>
-            <a:ext cx="6675120" cy="4434840"/>
+            <a:endParaRPr lang="en-US" sz="3400" dirty="0"/>
+          </a:p>
+        </p:txBody>
+      </p:sp>
+      <p:sp>
+        <p:nvSpPr>
+          <p:cNvPr id="11" name="Text 9"/>
+          <p:cNvSpPr/>
+          <p:nvPr/>
+        </p:nvSpPr>
+        <p:spPr>
+          <a:xfrm>
+            <a:off x="868680" y="1508760"/>
+            <a:ext cx="6537960" cy="4160520"/>
           </a:xfrm>
           <a:prstGeom prst="rect">
             <a:avLst/>
@@ -7451,7 +7760,7 @@
           <a:lstStyle/>
           <a:p>
             <a:r>
-              <a:rPr lang="en-US" sz="1700" dirty="0">
+              <a:rPr lang="en-US" sz="2100" dirty="0">
                 <a:solidFill>
                   <a:srgbClr val="17364A"/>
                 </a:solidFill>
@@ -7461,11 +7770,11 @@
               </a:rPr>
               <a:t>Grant and Funding Management for AI Projects artifact</a:t>
             </a:r>
-            <a:endParaRPr lang="en-US" sz="1700" dirty="0"/>
-          </a:p>
-          <a:p>
-            <a:r>
-              <a:rPr lang="en-US" sz="1700" dirty="0">
+            <a:endParaRPr lang="en-US" sz="2100" dirty="0"/>
+          </a:p>
+          <a:p>
+            <a:r>
+              <a:rPr lang="en-US" sz="2100" dirty="0">
                 <a:solidFill>
                   <a:srgbClr val="17364A"/>
                 </a:solidFill>
@@ -7475,11 +7784,11 @@
               </a:rPr>
               <a:t>Role and responsibility table</a:t>
             </a:r>
-            <a:endParaRPr lang="en-US" sz="1700" dirty="0"/>
-          </a:p>
-          <a:p>
-            <a:r>
-              <a:rPr lang="en-US" sz="1700" dirty="0">
+            <a:endParaRPr lang="en-US" sz="2100" dirty="0"/>
+          </a:p>
+          <a:p>
+            <a:r>
+              <a:rPr lang="en-US" sz="2100" dirty="0">
                 <a:solidFill>
                   <a:srgbClr val="17364A"/>
                 </a:solidFill>
@@ -7489,13 +7798,13 @@
               </a:rPr>
               <a:t>Risk and safeguard summary</a:t>
             </a:r>
-            <a:endParaRPr lang="en-US" sz="1700" dirty="0"/>
-          </a:p>
-        </p:txBody>
-      </p:sp>
-      <p:sp>
-        <p:nvSpPr>
-          <p:cNvPr id="11" name="Shape 9"/>
+            <a:endParaRPr lang="en-US" sz="2100" dirty="0"/>
+          </a:p>
+        </p:txBody>
+      </p:sp>
+      <p:sp>
+        <p:nvSpPr>
+          <p:cNvPr id="12" name="Shape 10"/>
           <p:cNvSpPr/>
           <p:nvPr/>
         </p:nvSpPr>
@@ -7522,14 +7831,14 @@
       </p:sp>
       <p:sp>
         <p:nvSpPr>
-          <p:cNvPr id="12" name="Text 10"/>
+          <p:cNvPr id="13" name="Text 11"/>
           <p:cNvSpPr/>
           <p:nvPr/>
         </p:nvSpPr>
         <p:spPr>
           <a:xfrm>
             <a:off x="8074152" y="1563624"/>
-            <a:ext cx="2825496" cy="201168"/>
+            <a:ext cx="2825496" cy="256032"/>
           </a:xfrm>
           <a:prstGeom prst="rect">
             <a:avLst/>
@@ -7545,7 +7854,7 @@
               <a:buNone/>
             </a:pPr>
             <a:r>
-              <a:rPr lang="en-US" sz="950" b="1" dirty="0">
+              <a:rPr lang="en-US" sz="1300" b="1" dirty="0">
                 <a:solidFill>
                   <a:srgbClr val="0068B7"/>
                 </a:solidFill>
@@ -7555,20 +7864,20 @@
               </a:rPr>
               <a:t>Key idea</a:t>
             </a:r>
-            <a:endParaRPr lang="en-US" sz="950" dirty="0"/>
-          </a:p>
-        </p:txBody>
-      </p:sp>
-      <p:sp>
-        <p:nvSpPr>
-          <p:cNvPr id="13" name="Text 11"/>
-          <p:cNvSpPr/>
-          <p:nvPr/>
-        </p:nvSpPr>
-        <p:spPr>
-          <a:xfrm>
-            <a:off x="8074152" y="1856232"/>
-            <a:ext cx="2825496" cy="1261872"/>
+            <a:endParaRPr lang="en-US" sz="1300" dirty="0"/>
+          </a:p>
+        </p:txBody>
+      </p:sp>
+      <p:sp>
+        <p:nvSpPr>
+          <p:cNvPr id="14" name="Text 12"/>
+          <p:cNvSpPr/>
+          <p:nvPr/>
+        </p:nvSpPr>
+        <p:spPr>
+          <a:xfrm>
+            <a:off x="8074152" y="1920240"/>
+            <a:ext cx="2825496" cy="1188720"/>
           </a:xfrm>
           <a:prstGeom prst="rect">
             <a:avLst/>
@@ -7586,7 +7895,7 @@
               <a:buNone/>
             </a:pPr>
             <a:r>
-              <a:rPr lang="en-US" sz="1250" dirty="0">
+              <a:rPr lang="en-US" sz="1550" dirty="0">
                 <a:solidFill>
                   <a:srgbClr val="17364A"/>
                 </a:solidFill>
@@ -7596,13 +7905,13 @@
               </a:rPr>
               <a:t>Grant and Funding Management for AI Projects artifact</a:t>
             </a:r>
-            <a:endParaRPr lang="en-US" sz="1250" dirty="0"/>
-          </a:p>
-        </p:txBody>
-      </p:sp>
-      <p:sp>
-        <p:nvSpPr>
-          <p:cNvPr id="14" name="Shape 12"/>
+            <a:endParaRPr lang="en-US" sz="1550" dirty="0"/>
+          </a:p>
+        </p:txBody>
+      </p:sp>
+      <p:sp>
+        <p:nvSpPr>
+          <p:cNvPr id="15" name="Shape 13"/>
           <p:cNvSpPr/>
           <p:nvPr/>
         </p:nvSpPr>
@@ -7629,14 +7938,14 @@
       </p:sp>
       <p:sp>
         <p:nvSpPr>
-          <p:cNvPr id="15" name="Text 13"/>
+          <p:cNvPr id="16" name="Text 14"/>
           <p:cNvSpPr/>
           <p:nvPr/>
         </p:nvSpPr>
         <p:spPr>
           <a:xfrm>
             <a:off x="8074152" y="3666744"/>
-            <a:ext cx="2825496" cy="201168"/>
+            <a:ext cx="2825496" cy="256032"/>
           </a:xfrm>
           <a:prstGeom prst="rect">
             <a:avLst/>
@@ -7652,7 +7961,7 @@
               <a:buNone/>
             </a:pPr>
             <a:r>
-              <a:rPr lang="en-US" sz="950" b="1" dirty="0">
+              <a:rPr lang="en-US" sz="1300" b="1" dirty="0">
                 <a:solidFill>
                   <a:srgbClr val="0068B7"/>
                 </a:solidFill>
@@ -7662,20 +7971,20 @@
               </a:rPr>
               <a:t>Use this for</a:t>
             </a:r>
-            <a:endParaRPr lang="en-US" sz="950" dirty="0"/>
-          </a:p>
-        </p:txBody>
-      </p:sp>
-      <p:sp>
-        <p:nvSpPr>
-          <p:cNvPr id="16" name="Text 14"/>
-          <p:cNvSpPr/>
-          <p:nvPr/>
-        </p:nvSpPr>
-        <p:spPr>
-          <a:xfrm>
-            <a:off x="8074152" y="3959352"/>
-            <a:ext cx="2825496" cy="1170432"/>
+            <a:endParaRPr lang="en-US" sz="1300" dirty="0"/>
+          </a:p>
+        </p:txBody>
+      </p:sp>
+      <p:sp>
+        <p:nvSpPr>
+          <p:cNvPr id="17" name="Text 15"/>
+          <p:cNvSpPr/>
+          <p:nvPr/>
+        </p:nvSpPr>
+        <p:spPr>
+          <a:xfrm>
+            <a:off x="8074152" y="4023360"/>
+            <a:ext cx="2825496" cy="1097280"/>
           </a:xfrm>
           <a:prstGeom prst="rect">
             <a:avLst/>
@@ -7693,7 +8002,7 @@
               <a:buNone/>
             </a:pPr>
             <a:r>
-              <a:rPr lang="en-US" sz="1250" dirty="0">
+              <a:rPr lang="en-US" sz="1550" dirty="0">
                 <a:solidFill>
                   <a:srgbClr val="17364A"/>
                 </a:solidFill>
@@ -7703,7 +8012,7 @@
               </a:rPr>
               <a:t>Connect the concept to public health decisions, safeguards, documentation, or implementation work.</a:t>
             </a:r>
-            <a:endParaRPr lang="en-US" sz="1250" dirty="0"/>
+            <a:endParaRPr lang="en-US" sz="1550" dirty="0"/>
           </a:p>
         </p:txBody>
       </p:sp>
@@ -7900,7 +8209,7 @@
                 <a:ea typeface="Aptos" pitchFamily="34" charset="-122"/>
                 <a:cs typeface="Aptos" pitchFamily="34" charset="-120"/>
               </a:rPr>
-              <a:t>© Paula Soper</a:t>
+              <a:t>Â© Paula Soper</a:t>
             </a:r>
             <a:endParaRPr lang="en-US" sz="800" dirty="0"/>
           </a:p>
@@ -7914,8 +8223,47 @@
         </p:nvSpPr>
         <p:spPr>
           <a:xfrm>
+            <a:off x="11137392" y="6510528"/>
+            <a:ext cx="411480" cy="201168"/>
+          </a:xfrm>
+          <a:prstGeom prst="rect">
+            <a:avLst/>
+          </a:prstGeom>
+          <a:noFill/>
+          <a:ln/>
+        </p:spPr>
+        <p:txBody>
+          <a:bodyPr wrap="square" lIns="0" tIns="0" rIns="0" bIns="0" rtlCol="0" anchor="ctr"/>
+          <a:lstStyle/>
+          <a:p>
+            <a:pPr algn="r" indent="0" marL="0">
+              <a:buNone/>
+            </a:pPr>
+            <a:r>
+              <a:rPr lang="en-US" sz="900" dirty="0">
+                <a:solidFill>
+                  <a:srgbClr val="5F7181"/>
+                </a:solidFill>
+                <a:latin typeface="Aptos" pitchFamily="34" charset="0"/>
+                <a:ea typeface="Aptos" pitchFamily="34" charset="-122"/>
+                <a:cs typeface="Aptos" pitchFamily="34" charset="-120"/>
+              </a:rPr>
+              <a:t>18</a:t>
+            </a:r>
+            <a:endParaRPr lang="en-US" sz="900" dirty="0"/>
+          </a:p>
+        </p:txBody>
+      </p:sp>
+      <p:sp>
+        <p:nvSpPr>
+          <p:cNvPr id="8" name="Text 6"/>
+          <p:cNvSpPr/>
+          <p:nvPr/>
+        </p:nvSpPr>
+        <p:spPr>
+          <a:xfrm>
             <a:off x="640080" y="658368"/>
-            <a:ext cx="10881360" cy="566928"/>
+            <a:ext cx="10881360" cy="713232"/>
           </a:xfrm>
           <a:prstGeom prst="rect">
             <a:avLst/>
@@ -7933,7 +8281,7 @@
               <a:buNone/>
             </a:pPr>
             <a:r>
-              <a:rPr lang="en-US" sz="2700" b="1" dirty="0">
+              <a:rPr lang="en-US" sz="3400" b="1" dirty="0">
                 <a:solidFill>
                   <a:srgbClr val="003A63"/>
                 </a:solidFill>
@@ -7943,20 +8291,20 @@
               </a:rPr>
               <a:t>Expected Artifact or Evidence Continued</a:t>
             </a:r>
-            <a:endParaRPr lang="en-US" sz="2700" dirty="0"/>
-          </a:p>
-        </p:txBody>
-      </p:sp>
-      <p:sp>
-        <p:nvSpPr>
-          <p:cNvPr id="8" name="Text 6"/>
-          <p:cNvSpPr/>
-          <p:nvPr/>
-        </p:nvSpPr>
-        <p:spPr>
-          <a:xfrm>
-            <a:off x="868680" y="1417320"/>
-            <a:ext cx="6675120" cy="4434840"/>
+            <a:endParaRPr lang="en-US" sz="3400" dirty="0"/>
+          </a:p>
+        </p:txBody>
+      </p:sp>
+      <p:sp>
+        <p:nvSpPr>
+          <p:cNvPr id="9" name="Text 7"/>
+          <p:cNvSpPr/>
+          <p:nvPr/>
+        </p:nvSpPr>
+        <p:spPr>
+          <a:xfrm>
+            <a:off x="868680" y="1508760"/>
+            <a:ext cx="6537960" cy="4160520"/>
           </a:xfrm>
           <a:prstGeom prst="rect">
             <a:avLst/>
@@ -7971,7 +8319,7 @@
           <a:lstStyle/>
           <a:p>
             <a:r>
-              <a:rPr lang="en-US" sz="1700" dirty="0">
+              <a:rPr lang="en-US" sz="2100" dirty="0">
                 <a:solidFill>
                   <a:srgbClr val="17364A"/>
                 </a:solidFill>
@@ -7981,11 +8329,11 @@
               </a:rPr>
               <a:t>Escalation and monitoring plan</a:t>
             </a:r>
-            <a:endParaRPr lang="en-US" sz="1700" dirty="0"/>
-          </a:p>
-          <a:p>
-            <a:r>
-              <a:rPr lang="en-US" sz="1700" dirty="0">
+            <a:endParaRPr lang="en-US" sz="2100" dirty="0"/>
+          </a:p>
+          <a:p>
+            <a:r>
+              <a:rPr lang="en-US" sz="2100" dirty="0">
                 <a:solidFill>
                   <a:srgbClr val="17364A"/>
                 </a:solidFill>
@@ -7995,13 +8343,13 @@
               </a:rPr>
               <a:t>Approval or review note</a:t>
             </a:r>
-            <a:endParaRPr lang="en-US" sz="1700" dirty="0"/>
-          </a:p>
-        </p:txBody>
-      </p:sp>
-      <p:sp>
-        <p:nvSpPr>
-          <p:cNvPr id="9" name="Shape 7"/>
+            <a:endParaRPr lang="en-US" sz="2100" dirty="0"/>
+          </a:p>
+        </p:txBody>
+      </p:sp>
+      <p:sp>
+        <p:nvSpPr>
+          <p:cNvPr id="10" name="Shape 8"/>
           <p:cNvSpPr/>
           <p:nvPr/>
         </p:nvSpPr>
@@ -8028,14 +8376,14 @@
       </p:sp>
       <p:sp>
         <p:nvSpPr>
-          <p:cNvPr id="10" name="Text 8"/>
+          <p:cNvPr id="11" name="Text 9"/>
           <p:cNvSpPr/>
           <p:nvPr/>
         </p:nvSpPr>
         <p:spPr>
           <a:xfrm>
             <a:off x="8074152" y="1563624"/>
-            <a:ext cx="2825496" cy="201168"/>
+            <a:ext cx="2825496" cy="256032"/>
           </a:xfrm>
           <a:prstGeom prst="rect">
             <a:avLst/>
@@ -8051,7 +8399,7 @@
               <a:buNone/>
             </a:pPr>
             <a:r>
-              <a:rPr lang="en-US" sz="950" b="1" dirty="0">
+              <a:rPr lang="en-US" sz="1300" b="1" dirty="0">
                 <a:solidFill>
                   <a:srgbClr val="0068B7"/>
                 </a:solidFill>
@@ -8061,20 +8409,20 @@
               </a:rPr>
               <a:t>Key idea</a:t>
             </a:r>
-            <a:endParaRPr lang="en-US" sz="950" dirty="0"/>
-          </a:p>
-        </p:txBody>
-      </p:sp>
-      <p:sp>
-        <p:nvSpPr>
-          <p:cNvPr id="11" name="Text 9"/>
-          <p:cNvSpPr/>
-          <p:nvPr/>
-        </p:nvSpPr>
-        <p:spPr>
-          <a:xfrm>
-            <a:off x="8074152" y="1856232"/>
-            <a:ext cx="2825496" cy="1261872"/>
+            <a:endParaRPr lang="en-US" sz="1300" dirty="0"/>
+          </a:p>
+        </p:txBody>
+      </p:sp>
+      <p:sp>
+        <p:nvSpPr>
+          <p:cNvPr id="12" name="Text 10"/>
+          <p:cNvSpPr/>
+          <p:nvPr/>
+        </p:nvSpPr>
+        <p:spPr>
+          <a:xfrm>
+            <a:off x="8074152" y="1920240"/>
+            <a:ext cx="2825496" cy="1188720"/>
           </a:xfrm>
           <a:prstGeom prst="rect">
             <a:avLst/>
@@ -8092,7 +8440,7 @@
               <a:buNone/>
             </a:pPr>
             <a:r>
-              <a:rPr lang="en-US" sz="1250" dirty="0">
+              <a:rPr lang="en-US" sz="1550" dirty="0">
                 <a:solidFill>
                   <a:srgbClr val="17364A"/>
                 </a:solidFill>
@@ -8102,13 +8450,13 @@
               </a:rPr>
               <a:t>Escalation and monitoring plan</a:t>
             </a:r>
-            <a:endParaRPr lang="en-US" sz="1250" dirty="0"/>
-          </a:p>
-        </p:txBody>
-      </p:sp>
-      <p:sp>
-        <p:nvSpPr>
-          <p:cNvPr id="12" name="Shape 10"/>
+            <a:endParaRPr lang="en-US" sz="1550" dirty="0"/>
+          </a:p>
+        </p:txBody>
+      </p:sp>
+      <p:sp>
+        <p:nvSpPr>
+          <p:cNvPr id="13" name="Shape 11"/>
           <p:cNvSpPr/>
           <p:nvPr/>
         </p:nvSpPr>
@@ -8135,14 +8483,14 @@
       </p:sp>
       <p:sp>
         <p:nvSpPr>
-          <p:cNvPr id="13" name="Text 11"/>
+          <p:cNvPr id="14" name="Text 12"/>
           <p:cNvSpPr/>
           <p:nvPr/>
         </p:nvSpPr>
         <p:spPr>
           <a:xfrm>
             <a:off x="8074152" y="3666744"/>
-            <a:ext cx="2825496" cy="201168"/>
+            <a:ext cx="2825496" cy="256032"/>
           </a:xfrm>
           <a:prstGeom prst="rect">
             <a:avLst/>
@@ -8158,7 +8506,7 @@
               <a:buNone/>
             </a:pPr>
             <a:r>
-              <a:rPr lang="en-US" sz="950" b="1" dirty="0">
+              <a:rPr lang="en-US" sz="1300" b="1" dirty="0">
                 <a:solidFill>
                   <a:srgbClr val="0068B7"/>
                 </a:solidFill>
@@ -8168,20 +8516,20 @@
               </a:rPr>
               <a:t>Use this for</a:t>
             </a:r>
-            <a:endParaRPr lang="en-US" sz="950" dirty="0"/>
-          </a:p>
-        </p:txBody>
-      </p:sp>
-      <p:sp>
-        <p:nvSpPr>
-          <p:cNvPr id="14" name="Text 12"/>
-          <p:cNvSpPr/>
-          <p:nvPr/>
-        </p:nvSpPr>
-        <p:spPr>
-          <a:xfrm>
-            <a:off x="8074152" y="3959352"/>
-            <a:ext cx="2825496" cy="1170432"/>
+            <a:endParaRPr lang="en-US" sz="1300" dirty="0"/>
+          </a:p>
+        </p:txBody>
+      </p:sp>
+      <p:sp>
+        <p:nvSpPr>
+          <p:cNvPr id="15" name="Text 13"/>
+          <p:cNvSpPr/>
+          <p:nvPr/>
+        </p:nvSpPr>
+        <p:spPr>
+          <a:xfrm>
+            <a:off x="8074152" y="4023360"/>
+            <a:ext cx="2825496" cy="1097280"/>
           </a:xfrm>
           <a:prstGeom prst="rect">
             <a:avLst/>
@@ -8199,7 +8547,7 @@
               <a:buNone/>
             </a:pPr>
             <a:r>
-              <a:rPr lang="en-US" sz="1250" dirty="0">
+              <a:rPr lang="en-US" sz="1550" dirty="0">
                 <a:solidFill>
                   <a:srgbClr val="17364A"/>
                 </a:solidFill>
@@ -8209,7 +8557,7 @@
               </a:rPr>
               <a:t>Connect the concept to public health decisions, safeguards, documentation, or implementation work.</a:t>
             </a:r>
-            <a:endParaRPr lang="en-US" sz="1250" dirty="0"/>
+            <a:endParaRPr lang="en-US" sz="1550" dirty="0"/>
           </a:p>
         </p:txBody>
       </p:sp>
@@ -8406,7 +8754,7 @@
                 <a:ea typeface="Aptos" pitchFamily="34" charset="-122"/>
                 <a:cs typeface="Aptos" pitchFamily="34" charset="-120"/>
               </a:rPr>
-              <a:t>© Paula Soper</a:t>
+              <a:t>Â© Paula Soper</a:t>
             </a:r>
             <a:endParaRPr lang="en-US" sz="800" dirty="0"/>
           </a:p>
@@ -8414,7 +8762,46 @@
       </p:sp>
       <p:sp>
         <p:nvSpPr>
-          <p:cNvPr id="7" name="Shape 5"/>
+          <p:cNvPr id="7" name="Text 5"/>
+          <p:cNvSpPr/>
+          <p:nvPr/>
+        </p:nvSpPr>
+        <p:spPr>
+          <a:xfrm>
+            <a:off x="11137392" y="6510528"/>
+            <a:ext cx="411480" cy="201168"/>
+          </a:xfrm>
+          <a:prstGeom prst="rect">
+            <a:avLst/>
+          </a:prstGeom>
+          <a:noFill/>
+          <a:ln/>
+        </p:spPr>
+        <p:txBody>
+          <a:bodyPr wrap="square" lIns="0" tIns="0" rIns="0" bIns="0" rtlCol="0" anchor="ctr"/>
+          <a:lstStyle/>
+          <a:p>
+            <a:pPr algn="r" indent="0" marL="0">
+              <a:buNone/>
+            </a:pPr>
+            <a:r>
+              <a:rPr lang="en-US" sz="900" dirty="0">
+                <a:solidFill>
+                  <a:srgbClr val="5F7181"/>
+                </a:solidFill>
+                <a:latin typeface="Aptos" pitchFamily="34" charset="0"/>
+                <a:ea typeface="Aptos" pitchFamily="34" charset="-122"/>
+                <a:cs typeface="Aptos" pitchFamily="34" charset="-120"/>
+              </a:rPr>
+              <a:t>19</a:t>
+            </a:r>
+            <a:endParaRPr lang="en-US" sz="900" dirty="0"/>
+          </a:p>
+        </p:txBody>
+      </p:sp>
+      <p:sp>
+        <p:nvSpPr>
+          <p:cNvPr id="8" name="Shape 6"/>
           <p:cNvSpPr/>
           <p:nvPr/>
         </p:nvSpPr>
@@ -8439,7 +8826,7 @@
       </p:sp>
       <p:sp>
         <p:nvSpPr>
-          <p:cNvPr id="8" name="Text 6"/>
+          <p:cNvPr id="9" name="Text 7"/>
           <p:cNvSpPr/>
           <p:nvPr/>
         </p:nvSpPr>
@@ -8478,14 +8865,14 @@
       </p:sp>
       <p:sp>
         <p:nvSpPr>
-          <p:cNvPr id="9" name="Text 7"/>
+          <p:cNvPr id="10" name="Text 8"/>
           <p:cNvSpPr/>
           <p:nvPr/>
         </p:nvSpPr>
         <p:spPr>
           <a:xfrm>
             <a:off x="640080" y="621792"/>
-            <a:ext cx="10881360" cy="566928"/>
+            <a:ext cx="10881360" cy="713232"/>
           </a:xfrm>
           <a:prstGeom prst="rect">
             <a:avLst/>
@@ -8503,7 +8890,7 @@
               <a:buNone/>
             </a:pPr>
             <a:r>
-              <a:rPr lang="en-US" sz="2700" b="1" dirty="0">
+              <a:rPr lang="en-US" sz="3400" b="1" dirty="0">
                 <a:solidFill>
                   <a:srgbClr val="003A63"/>
                 </a:solidFill>
@@ -8513,20 +8900,20 @@
               </a:rPr>
               <a:t>Expected Assignment</a:t>
             </a:r>
-            <a:endParaRPr lang="en-US" sz="2700" dirty="0"/>
-          </a:p>
-        </p:txBody>
-      </p:sp>
-      <p:sp>
-        <p:nvSpPr>
-          <p:cNvPr id="10" name="Text 8"/>
-          <p:cNvSpPr/>
-          <p:nvPr/>
-        </p:nvSpPr>
-        <p:spPr>
-          <a:xfrm>
-            <a:off x="868680" y="1417320"/>
-            <a:ext cx="6675120" cy="4434840"/>
+            <a:endParaRPr lang="en-US" sz="3400" dirty="0"/>
+          </a:p>
+        </p:txBody>
+      </p:sp>
+      <p:sp>
+        <p:nvSpPr>
+          <p:cNvPr id="11" name="Text 9"/>
+          <p:cNvSpPr/>
+          <p:nvPr/>
+        </p:nvSpPr>
+        <p:spPr>
+          <a:xfrm>
+            <a:off x="868680" y="1508760"/>
+            <a:ext cx="6537960" cy="4160520"/>
           </a:xfrm>
           <a:prstGeom prst="rect">
             <a:avLst/>
@@ -8541,7 +8928,7 @@
           <a:lstStyle/>
           <a:p>
             <a:r>
-              <a:rPr lang="en-US" sz="1700" dirty="0">
+              <a:rPr lang="en-US" sz="2100" dirty="0">
                 <a:solidFill>
                   <a:srgbClr val="17364A"/>
                 </a:solidFill>
@@ -8551,11 +8938,11 @@
               </a:rPr>
               <a:t>Grant and Funding Management for AI Projects artifact</a:t>
             </a:r>
-            <a:endParaRPr lang="en-US" sz="1700" dirty="0"/>
-          </a:p>
-          <a:p>
-            <a:r>
-              <a:rPr lang="en-US" sz="1700" dirty="0">
+            <a:endParaRPr lang="en-US" sz="2100" dirty="0"/>
+          </a:p>
+          <a:p>
+            <a:r>
+              <a:rPr lang="en-US" sz="2100" dirty="0">
                 <a:solidFill>
                   <a:srgbClr val="17364A"/>
                 </a:solidFill>
@@ -8565,11 +8952,11 @@
               </a:rPr>
               <a:t>Role and responsibility table</a:t>
             </a:r>
-            <a:endParaRPr lang="en-US" sz="1700" dirty="0"/>
-          </a:p>
-          <a:p>
-            <a:r>
-              <a:rPr lang="en-US" sz="1700" dirty="0">
+            <a:endParaRPr lang="en-US" sz="2100" dirty="0"/>
+          </a:p>
+          <a:p>
+            <a:r>
+              <a:rPr lang="en-US" sz="2100" dirty="0">
                 <a:solidFill>
                   <a:srgbClr val="17364A"/>
                 </a:solidFill>
@@ -8579,27 +8966,13 @@
               </a:rPr>
               <a:t>Risk and safeguard summary</a:t>
             </a:r>
-            <a:endParaRPr lang="en-US" sz="1700" dirty="0"/>
-          </a:p>
-          <a:p>
-            <a:r>
-              <a:rPr lang="en-US" sz="1700" dirty="0">
-                <a:solidFill>
-                  <a:srgbClr val="17364A"/>
-                </a:solidFill>
-                <a:latin typeface="Aptos" pitchFamily="34" charset="0"/>
-                <a:ea typeface="Aptos" pitchFamily="34" charset="-122"/>
-                <a:cs typeface="Aptos" pitchFamily="34" charset="-120"/>
-              </a:rPr>
-              <a:t>Escalation and monitoring plan</a:t>
-            </a:r>
-            <a:endParaRPr lang="en-US" sz="1700" dirty="0"/>
-          </a:p>
-        </p:txBody>
-      </p:sp>
-      <p:sp>
-        <p:nvSpPr>
-          <p:cNvPr id="11" name="Shape 9"/>
+            <a:endParaRPr lang="en-US" sz="2100" dirty="0"/>
+          </a:p>
+        </p:txBody>
+      </p:sp>
+      <p:sp>
+        <p:nvSpPr>
+          <p:cNvPr id="12" name="Shape 10"/>
           <p:cNvSpPr/>
           <p:nvPr/>
         </p:nvSpPr>
@@ -8626,14 +8999,14 @@
       </p:sp>
       <p:sp>
         <p:nvSpPr>
-          <p:cNvPr id="12" name="Text 10"/>
+          <p:cNvPr id="13" name="Text 11"/>
           <p:cNvSpPr/>
           <p:nvPr/>
         </p:nvSpPr>
         <p:spPr>
           <a:xfrm>
             <a:off x="8074152" y="1563624"/>
-            <a:ext cx="2825496" cy="201168"/>
+            <a:ext cx="2825496" cy="256032"/>
           </a:xfrm>
           <a:prstGeom prst="rect">
             <a:avLst/>
@@ -8649,7 +9022,7 @@
               <a:buNone/>
             </a:pPr>
             <a:r>
-              <a:rPr lang="en-US" sz="950" b="1" dirty="0">
+              <a:rPr lang="en-US" sz="1300" b="1" dirty="0">
                 <a:solidFill>
                   <a:srgbClr val="0068B7"/>
                 </a:solidFill>
@@ -8659,20 +9032,20 @@
               </a:rPr>
               <a:t>Key idea</a:t>
             </a:r>
-            <a:endParaRPr lang="en-US" sz="950" dirty="0"/>
-          </a:p>
-        </p:txBody>
-      </p:sp>
-      <p:sp>
-        <p:nvSpPr>
-          <p:cNvPr id="13" name="Text 11"/>
-          <p:cNvSpPr/>
-          <p:nvPr/>
-        </p:nvSpPr>
-        <p:spPr>
-          <a:xfrm>
-            <a:off x="8074152" y="1856232"/>
-            <a:ext cx="2825496" cy="1261872"/>
+            <a:endParaRPr lang="en-US" sz="1300" dirty="0"/>
+          </a:p>
+        </p:txBody>
+      </p:sp>
+      <p:sp>
+        <p:nvSpPr>
+          <p:cNvPr id="14" name="Text 12"/>
+          <p:cNvSpPr/>
+          <p:nvPr/>
+        </p:nvSpPr>
+        <p:spPr>
+          <a:xfrm>
+            <a:off x="8074152" y="1920240"/>
+            <a:ext cx="2825496" cy="1188720"/>
           </a:xfrm>
           <a:prstGeom prst="rect">
             <a:avLst/>
@@ -8690,7 +9063,7 @@
               <a:buNone/>
             </a:pPr>
             <a:r>
-              <a:rPr lang="en-US" sz="1250" dirty="0">
+              <a:rPr lang="en-US" sz="1550" dirty="0">
                 <a:solidFill>
                   <a:srgbClr val="17364A"/>
                 </a:solidFill>
@@ -8700,13 +9073,13 @@
               </a:rPr>
               <a:t>Grant and Funding Management for AI Projects artifact</a:t>
             </a:r>
-            <a:endParaRPr lang="en-US" sz="1250" dirty="0"/>
-          </a:p>
-        </p:txBody>
-      </p:sp>
-      <p:sp>
-        <p:nvSpPr>
-          <p:cNvPr id="14" name="Shape 12"/>
+            <a:endParaRPr lang="en-US" sz="1550" dirty="0"/>
+          </a:p>
+        </p:txBody>
+      </p:sp>
+      <p:sp>
+        <p:nvSpPr>
+          <p:cNvPr id="15" name="Shape 13"/>
           <p:cNvSpPr/>
           <p:nvPr/>
         </p:nvSpPr>
@@ -8733,14 +9106,14 @@
       </p:sp>
       <p:sp>
         <p:nvSpPr>
-          <p:cNvPr id="15" name="Text 13"/>
+          <p:cNvPr id="16" name="Text 14"/>
           <p:cNvSpPr/>
           <p:nvPr/>
         </p:nvSpPr>
         <p:spPr>
           <a:xfrm>
             <a:off x="8074152" y="3666744"/>
-            <a:ext cx="2825496" cy="201168"/>
+            <a:ext cx="2825496" cy="256032"/>
           </a:xfrm>
           <a:prstGeom prst="rect">
             <a:avLst/>
@@ -8756,7 +9129,7 @@
               <a:buNone/>
             </a:pPr>
             <a:r>
-              <a:rPr lang="en-US" sz="950" b="1" dirty="0">
+              <a:rPr lang="en-US" sz="1300" b="1" dirty="0">
                 <a:solidFill>
                   <a:srgbClr val="0068B7"/>
                 </a:solidFill>
@@ -8766,20 +9139,20 @@
               </a:rPr>
               <a:t>Use this for</a:t>
             </a:r>
-            <a:endParaRPr lang="en-US" sz="950" dirty="0"/>
-          </a:p>
-        </p:txBody>
-      </p:sp>
-      <p:sp>
-        <p:nvSpPr>
-          <p:cNvPr id="16" name="Text 14"/>
-          <p:cNvSpPr/>
-          <p:nvPr/>
-        </p:nvSpPr>
-        <p:spPr>
-          <a:xfrm>
-            <a:off x="8074152" y="3959352"/>
-            <a:ext cx="2825496" cy="1170432"/>
+            <a:endParaRPr lang="en-US" sz="1300" dirty="0"/>
+          </a:p>
+        </p:txBody>
+      </p:sp>
+      <p:sp>
+        <p:nvSpPr>
+          <p:cNvPr id="17" name="Text 15"/>
+          <p:cNvSpPr/>
+          <p:nvPr/>
+        </p:nvSpPr>
+        <p:spPr>
+          <a:xfrm>
+            <a:off x="8074152" y="4023360"/>
+            <a:ext cx="2825496" cy="1097280"/>
           </a:xfrm>
           <a:prstGeom prst="rect">
             <a:avLst/>
@@ -8797,7 +9170,7 @@
               <a:buNone/>
             </a:pPr>
             <a:r>
-              <a:rPr lang="en-US" sz="1250" dirty="0">
+              <a:rPr lang="en-US" sz="1550" dirty="0">
                 <a:solidFill>
                   <a:srgbClr val="17364A"/>
                 </a:solidFill>
@@ -8807,7 +9180,7 @@
               </a:rPr>
               <a:t>Connect the concept to public health decisions, safeguards, documentation, or implementation work.</a:t>
             </a:r>
-            <a:endParaRPr lang="en-US" sz="1250" dirty="0"/>
+            <a:endParaRPr lang="en-US" sz="1550" dirty="0"/>
           </a:p>
         </p:txBody>
       </p:sp>
@@ -9004,7 +9377,7 @@
                 <a:ea typeface="Aptos" pitchFamily="34" charset="-122"/>
                 <a:cs typeface="Aptos" pitchFamily="34" charset="-120"/>
               </a:rPr>
-              <a:t>© Paula Soper</a:t>
+              <a:t>Â© Paula Soper</a:t>
             </a:r>
             <a:endParaRPr lang="en-US" sz="800" dirty="0"/>
           </a:p>
@@ -9018,8 +9391,47 @@
         </p:nvSpPr>
         <p:spPr>
           <a:xfrm>
+            <a:off x="11137392" y="6510528"/>
+            <a:ext cx="411480" cy="201168"/>
+          </a:xfrm>
+          <a:prstGeom prst="rect">
+            <a:avLst/>
+          </a:prstGeom>
+          <a:noFill/>
+          <a:ln/>
+        </p:spPr>
+        <p:txBody>
+          <a:bodyPr wrap="square" lIns="0" tIns="0" rIns="0" bIns="0" rtlCol="0" anchor="ctr"/>
+          <a:lstStyle/>
+          <a:p>
+            <a:pPr algn="r" indent="0" marL="0">
+              <a:buNone/>
+            </a:pPr>
+            <a:r>
+              <a:rPr lang="en-US" sz="900" dirty="0">
+                <a:solidFill>
+                  <a:srgbClr val="5F7181"/>
+                </a:solidFill>
+                <a:latin typeface="Aptos" pitchFamily="34" charset="0"/>
+                <a:ea typeface="Aptos" pitchFamily="34" charset="-122"/>
+                <a:cs typeface="Aptos" pitchFamily="34" charset="-120"/>
+              </a:rPr>
+              <a:t>2</a:t>
+            </a:r>
+            <a:endParaRPr lang="en-US" sz="900" dirty="0"/>
+          </a:p>
+        </p:txBody>
+      </p:sp>
+      <p:sp>
+        <p:nvSpPr>
+          <p:cNvPr id="8" name="Text 6"/>
+          <p:cNvSpPr/>
+          <p:nvPr/>
+        </p:nvSpPr>
+        <p:spPr>
+          <a:xfrm>
             <a:off x="640080" y="658368"/>
-            <a:ext cx="10881360" cy="566928"/>
+            <a:ext cx="10881360" cy="713232"/>
           </a:xfrm>
           <a:prstGeom prst="rect">
             <a:avLst/>
@@ -9037,7 +9449,7 @@
               <a:buNone/>
             </a:pPr>
             <a:r>
-              <a:rPr lang="en-US" sz="2700" b="1" dirty="0">
+              <a:rPr lang="en-US" sz="3400" b="1" dirty="0">
                 <a:solidFill>
                   <a:srgbClr val="003A63"/>
                 </a:solidFill>
@@ -9047,20 +9459,20 @@
               </a:rPr>
               <a:t>What this module helps you do</a:t>
             </a:r>
-            <a:endParaRPr lang="en-US" sz="2700" dirty="0"/>
-          </a:p>
-        </p:txBody>
-      </p:sp>
-      <p:sp>
-        <p:nvSpPr>
-          <p:cNvPr id="8" name="Text 6"/>
-          <p:cNvSpPr/>
-          <p:nvPr/>
-        </p:nvSpPr>
-        <p:spPr>
-          <a:xfrm>
-            <a:off x="868680" y="1417320"/>
-            <a:ext cx="6675120" cy="3291840"/>
+            <a:endParaRPr lang="en-US" sz="3400" dirty="0"/>
+          </a:p>
+        </p:txBody>
+      </p:sp>
+      <p:sp>
+        <p:nvSpPr>
+          <p:cNvPr id="9" name="Text 7"/>
+          <p:cNvSpPr/>
+          <p:nvPr/>
+        </p:nvSpPr>
+        <p:spPr>
+          <a:xfrm>
+            <a:off x="868680" y="1508760"/>
+            <a:ext cx="6446520" cy="2926080"/>
           </a:xfrm>
           <a:prstGeom prst="rect">
             <a:avLst/>
@@ -9075,7 +9487,7 @@
           <a:lstStyle/>
           <a:p>
             <a:r>
-              <a:rPr lang="en-US" sz="1700" dirty="0">
+              <a:rPr lang="en-US" sz="2100" dirty="0">
                 <a:solidFill>
                   <a:srgbClr val="17364A"/>
                 </a:solidFill>
@@ -9083,13 +9495,13 @@
                 <a:ea typeface="Aptos" pitchFamily="34" charset="-122"/>
                 <a:cs typeface="Aptos" pitchFamily="34" charset="-120"/>
               </a:rPr>
-              <a:t>This module focuses on connecting AI projects to allowable costs, deliverables, reporting, performance measures, and sustainability.</a:t>
-            </a:r>
-            <a:endParaRPr lang="en-US" sz="1700" dirty="0"/>
-          </a:p>
-          <a:p>
-            <a:r>
-              <a:rPr lang="en-US" sz="1700" dirty="0">
+              <a:t>This module focuses on connecting AI projects to allowable costs, deliverables, reporting, performance measures,.</a:t>
+            </a:r>
+            <a:endParaRPr lang="en-US" sz="2100" dirty="0"/>
+          </a:p>
+          <a:p>
+            <a:r>
+              <a:rPr lang="en-US" sz="2100" dirty="0">
                 <a:solidFill>
                   <a:srgbClr val="17364A"/>
                 </a:solidFill>
@@ -9097,13 +9509,13 @@
                 <a:ea typeface="Aptos" pitchFamily="34" charset="-122"/>
                 <a:cs typeface="Aptos" pitchFamily="34" charset="-120"/>
               </a:rPr>
-              <a:t>It is designed for public health staff who must translate responsible AI principles into repeatable decisions, documents, workflows, and oversight.</a:t>
-            </a:r>
-            <a:endParaRPr lang="en-US" sz="1700" dirty="0"/>
-          </a:p>
-          <a:p>
-            <a:r>
-              <a:rPr lang="en-US" sz="1700" dirty="0">
+              <a:t>It is designed for public health staff who must translate responsible AI principles into repeatable decisions,.</a:t>
+            </a:r>
+            <a:endParaRPr lang="en-US" sz="2100" dirty="0"/>
+          </a:p>
+          <a:p>
+            <a:r>
+              <a:rPr lang="en-US" sz="2100" dirty="0">
                 <a:solidFill>
                   <a:srgbClr val="17364A"/>
                 </a:solidFill>
@@ -9111,29 +9523,15 @@
                 <a:ea typeface="Aptos" pitchFamily="34" charset="-122"/>
                 <a:cs typeface="Aptos" pitchFamily="34" charset="-120"/>
               </a:rPr>
-              <a:t>The module helps learners move beyond general awareness by producing a practical artifact that can be used in governance review, implementation.</a:t>
-            </a:r>
-            <a:endParaRPr lang="en-US" sz="1700" dirty="0"/>
-          </a:p>
-          <a:p>
-            <a:r>
-              <a:rPr lang="en-US" sz="1700" dirty="0">
-                <a:solidFill>
-                  <a:srgbClr val="17364A"/>
-                </a:solidFill>
-                <a:latin typeface="Aptos" pitchFamily="34" charset="0"/>
-                <a:ea typeface="Aptos" pitchFamily="34" charset="-122"/>
-                <a:cs typeface="Aptos" pitchFamily="34" charset="-120"/>
-              </a:rPr>
-              <a:t>It emphasizes paragraph-based reasoning, defined responsibilities, and documentation that can withstand public health, legal, privacy, equity, and.</a:t>
-            </a:r>
-            <a:endParaRPr lang="en-US" sz="1700" dirty="0"/>
-          </a:p>
-        </p:txBody>
-      </p:sp>
-      <p:sp>
-        <p:nvSpPr>
-          <p:cNvPr id="9" name="Shape 7"/>
+              <a:t>The module helps learners move beyond general awareness by producing a practical artifact that can be used in.</a:t>
+            </a:r>
+            <a:endParaRPr lang="en-US" sz="2100" dirty="0"/>
+          </a:p>
+        </p:txBody>
+      </p:sp>
+      <p:sp>
+        <p:nvSpPr>
+          <p:cNvPr id="10" name="Shape 8"/>
           <p:cNvSpPr/>
           <p:nvPr/>
         </p:nvSpPr>
@@ -9160,14 +9558,14 @@
       </p:sp>
       <p:sp>
         <p:nvSpPr>
-          <p:cNvPr id="10" name="Text 8"/>
+          <p:cNvPr id="11" name="Text 9"/>
           <p:cNvSpPr/>
           <p:nvPr/>
         </p:nvSpPr>
         <p:spPr>
           <a:xfrm>
             <a:off x="8074152" y="1563624"/>
-            <a:ext cx="2825496" cy="201168"/>
+            <a:ext cx="2825496" cy="256032"/>
           </a:xfrm>
           <a:prstGeom prst="rect">
             <a:avLst/>
@@ -9183,7 +9581,7 @@
               <a:buNone/>
             </a:pPr>
             <a:r>
-              <a:rPr lang="en-US" sz="950" b="1" dirty="0">
+              <a:rPr lang="en-US" sz="1300" b="1" dirty="0">
                 <a:solidFill>
                   <a:srgbClr val="0068B7"/>
                 </a:solidFill>
@@ -9193,20 +9591,20 @@
               </a:rPr>
               <a:t>Module details</a:t>
             </a:r>
-            <a:endParaRPr lang="en-US" sz="950" dirty="0"/>
-          </a:p>
-        </p:txBody>
-      </p:sp>
-      <p:sp>
-        <p:nvSpPr>
-          <p:cNvPr id="11" name="Text 9"/>
-          <p:cNvSpPr/>
-          <p:nvPr/>
-        </p:nvSpPr>
-        <p:spPr>
-          <a:xfrm>
-            <a:off x="8074152" y="1856232"/>
-            <a:ext cx="2825496" cy="1353312"/>
+            <a:endParaRPr lang="en-US" sz="1300" dirty="0"/>
+          </a:p>
+        </p:txBody>
+      </p:sp>
+      <p:sp>
+        <p:nvSpPr>
+          <p:cNvPr id="12" name="Text 10"/>
+          <p:cNvSpPr/>
+          <p:nvPr/>
+        </p:nvSpPr>
+        <p:spPr>
+          <a:xfrm>
+            <a:off x="8074152" y="1920240"/>
+            <a:ext cx="2825496" cy="1280160"/>
           </a:xfrm>
           <a:prstGeom prst="rect">
             <a:avLst/>
@@ -9224,7 +9622,7 @@
               <a:buNone/>
             </a:pPr>
             <a:r>
-              <a:rPr lang="en-US" sz="1250" dirty="0">
+              <a:rPr lang="en-US" sz="1550" dirty="0">
                 <a:solidFill>
                   <a:srgbClr val="17364A"/>
                 </a:solidFill>
@@ -9234,14 +9632,14 @@
               </a:rPr>
               <a:t>Level: intermediate/practitioner</a:t>
             </a:r>
-            <a:endParaRPr lang="en-US" sz="1250" dirty="0"/>
+            <a:endParaRPr lang="en-US" sz="1550" dirty="0"/>
           </a:p>
           <a:p>
             <a:pPr indent="0" marL="0">
               <a:buNone/>
             </a:pPr>
             <a:r>
-              <a:rPr lang="en-US" sz="1250" dirty="0">
+              <a:rPr lang="en-US" sz="1550" dirty="0">
                 <a:solidFill>
                   <a:srgbClr val="17364A"/>
                 </a:solidFill>
@@ -9251,14 +9649,14 @@
               </a:rPr>
               <a:t>Primary track: Program Management Role-Based Track</a:t>
             </a:r>
-            <a:endParaRPr lang="en-US" sz="1250" dirty="0"/>
+            <a:endParaRPr lang="en-US" sz="1550" dirty="0"/>
           </a:p>
           <a:p>
             <a:pPr indent="0" marL="0">
               <a:buNone/>
             </a:pPr>
             <a:r>
-              <a:rPr lang="en-US" sz="1250" dirty="0">
+              <a:rPr lang="en-US" sz="1550" dirty="0">
                 <a:solidFill>
                   <a:srgbClr val="17364A"/>
                 </a:solidFill>
@@ -9268,32 +9666,32 @@
               </a:rPr>
               <a:t>Appears in tracks: program-management, public-health-executive-leadership, policy, governance-security</a:t>
             </a:r>
-            <a:endParaRPr lang="en-US" sz="1250" dirty="0"/>
-          </a:p>
-        </p:txBody>
-      </p:sp>
-      <p:sp>
-        <p:nvSpPr>
-          <p:cNvPr id="12" name="Shape 10"/>
-          <p:cNvSpPr/>
-          <p:nvPr/>
-        </p:nvSpPr>
-        <p:spPr>
-          <a:xfrm>
-            <a:off x="7909560" y="3611880"/>
-            <a:ext cx="3154680" cy="1783080"/>
+            <a:endParaRPr lang="en-US" sz="1550" dirty="0"/>
+          </a:p>
+        </p:txBody>
+      </p:sp>
+      <p:sp>
+        <p:nvSpPr>
+          <p:cNvPr id="13" name="Shape 11"/>
+          <p:cNvSpPr/>
+          <p:nvPr/>
+        </p:nvSpPr>
+        <p:spPr>
+          <a:xfrm>
+            <a:off x="7635240" y="3730752"/>
+            <a:ext cx="1033272" cy="749808"/>
           </a:xfrm>
           <a:prstGeom prst="roundRect">
             <a:avLst>
-              <a:gd name="adj" fmla="val 6154"/>
+              <a:gd name="adj" fmla="val 14634"/>
             </a:avLst>
           </a:prstGeom>
           <a:solidFill>
-            <a:srgbClr val="EEF8ED"/>
+            <a:srgbClr val="0068B7"/>
           </a:solidFill>
           <a:ln w="12700">
             <a:solidFill>
-              <a:srgbClr val="B9D7E6"/>
+              <a:srgbClr val="0068B7"/>
             </a:solidFill>
             <a:prstDash val="solid"/>
           </a:ln>
@@ -9301,81 +9699,256 @@
       </p:sp>
       <p:sp>
         <p:nvSpPr>
-          <p:cNvPr id="13" name="Text 11"/>
-          <p:cNvSpPr/>
-          <p:nvPr/>
-        </p:nvSpPr>
-        <p:spPr>
-          <a:xfrm>
-            <a:off x="8074152" y="3758184"/>
-            <a:ext cx="2825496" cy="201168"/>
-          </a:xfrm>
-          <a:prstGeom prst="rect">
-            <a:avLst/>
-          </a:prstGeom>
-          <a:noFill/>
-          <a:ln/>
-        </p:spPr>
-        <p:txBody>
-          <a:bodyPr wrap="square" lIns="0" tIns="0" rIns="0" bIns="0" rtlCol="0" anchor="ctr"/>
-          <a:lstStyle/>
-          <a:p>
-            <a:pPr indent="0" marL="0">
-              <a:buNone/>
-            </a:pPr>
-            <a:r>
-              <a:rPr lang="en-US" sz="950" b="1" dirty="0">
-                <a:solidFill>
-                  <a:srgbClr val="0068B7"/>
-                </a:solidFill>
-                <a:latin typeface="Aptos" pitchFamily="34" charset="0"/>
-                <a:ea typeface="Aptos" pitchFamily="34" charset="-122"/>
-                <a:cs typeface="Aptos" pitchFamily="34" charset="-120"/>
-              </a:rPr>
-              <a:t>Learning approach</a:t>
-            </a:r>
-            <a:endParaRPr lang="en-US" sz="950" dirty="0"/>
-          </a:p>
-        </p:txBody>
-      </p:sp>
-      <p:sp>
-        <p:nvSpPr>
           <p:cNvPr id="14" name="Text 12"/>
           <p:cNvSpPr/>
           <p:nvPr/>
         </p:nvSpPr>
         <p:spPr>
           <a:xfrm>
-            <a:off x="8074152" y="4050792"/>
-            <a:ext cx="2825496" cy="1216152"/>
-          </a:xfrm>
-          <a:prstGeom prst="rect">
-            <a:avLst/>
-          </a:prstGeom>
-          <a:noFill/>
-          <a:ln/>
-        </p:spPr>
-        <p:txBody>
-          <a:bodyPr wrap="square" lIns="0" tIns="0" rIns="0" bIns="0" rtlCol="0" anchor="t">
+            <a:off x="7708392" y="3922776"/>
+            <a:ext cx="886968" cy="310896"/>
+          </a:xfrm>
+          <a:prstGeom prst="rect">
+            <a:avLst/>
+          </a:prstGeom>
+          <a:noFill/>
+          <a:ln/>
+        </p:spPr>
+        <p:txBody>
+          <a:bodyPr wrap="square" lIns="0" tIns="0" rIns="0" bIns="0" rtlCol="0" anchor="ctr">
             <a:normAutofit/>
           </a:bodyPr>
           <a:lstStyle/>
           <a:p>
-            <a:pPr indent="0" marL="0">
-              <a:buNone/>
-            </a:pPr>
-            <a:r>
-              <a:rPr lang="en-US" sz="1250" dirty="0">
-                <a:solidFill>
-                  <a:srgbClr val="17364A"/>
-                </a:solidFill>
-                <a:latin typeface="Aptos" pitchFamily="34" charset="0"/>
-                <a:ea typeface="Aptos" pitchFamily="34" charset="-122"/>
-                <a:cs typeface="Aptos" pitchFamily="34" charset="-120"/>
-              </a:rPr>
-              <a:t>Review the core ideas, complete the practical exercise, check your understanding, and use the related plays and tools to apply the lesson.</a:t>
-            </a:r>
-            <a:endParaRPr lang="en-US" sz="1250" dirty="0"/>
+            <a:pPr algn="ctr" indent="0" marL="0">
+              <a:buNone/>
+            </a:pPr>
+            <a:r>
+              <a:rPr lang="en-US" sz="1500" b="1" dirty="0">
+                <a:solidFill>
+                  <a:srgbClr val="FFFFFF"/>
+                </a:solidFill>
+                <a:latin typeface="Aptos" pitchFamily="34" charset="0"/>
+                <a:ea typeface="Aptos" pitchFamily="34" charset="-122"/>
+                <a:cs typeface="Aptos" pitchFamily="34" charset="-120"/>
+              </a:rPr>
+              <a:t>Learn</a:t>
+            </a:r>
+            <a:endParaRPr lang="en-US" sz="1500" dirty="0"/>
+          </a:p>
+        </p:txBody>
+      </p:sp>
+      <p:sp>
+        <p:nvSpPr>
+          <p:cNvPr id="15" name="Text 13"/>
+          <p:cNvSpPr/>
+          <p:nvPr/>
+        </p:nvSpPr>
+        <p:spPr>
+          <a:xfrm>
+            <a:off x="8695944" y="3941064"/>
+            <a:ext cx="201168" cy="256032"/>
+          </a:xfrm>
+          <a:prstGeom prst="rect">
+            <a:avLst/>
+          </a:prstGeom>
+          <a:noFill/>
+          <a:ln/>
+        </p:spPr>
+        <p:txBody>
+          <a:bodyPr wrap="square" lIns="0" tIns="0" rIns="0" bIns="0" rtlCol="0" anchor="ctr"/>
+          <a:lstStyle/>
+          <a:p>
+            <a:pPr algn="ctr" indent="0" marL="0">
+              <a:buNone/>
+            </a:pPr>
+            <a:r>
+              <a:rPr lang="en-US" sz="1800" b="1" dirty="0">
+                <a:solidFill>
+                  <a:srgbClr val="0068B7"/>
+                </a:solidFill>
+                <a:latin typeface="Aptos" pitchFamily="34" charset="0"/>
+                <a:ea typeface="Aptos" pitchFamily="34" charset="-122"/>
+                <a:cs typeface="Aptos" pitchFamily="34" charset="-120"/>
+              </a:rPr>
+              <a:t>â†’</a:t>
+            </a:r>
+            <a:endParaRPr lang="en-US" sz="1800" dirty="0"/>
+          </a:p>
+        </p:txBody>
+      </p:sp>
+      <p:sp>
+        <p:nvSpPr>
+          <p:cNvPr id="16" name="Shape 14"/>
+          <p:cNvSpPr/>
+          <p:nvPr/>
+        </p:nvSpPr>
+        <p:spPr>
+          <a:xfrm>
+            <a:off x="8924544" y="3730752"/>
+            <a:ext cx="1033272" cy="749808"/>
+          </a:xfrm>
+          <a:prstGeom prst="roundRect">
+            <a:avLst>
+              <a:gd name="adj" fmla="val 14634"/>
+            </a:avLst>
+          </a:prstGeom>
+          <a:solidFill>
+            <a:srgbClr val="2F8A28"/>
+          </a:solidFill>
+          <a:ln w="12700">
+            <a:solidFill>
+              <a:srgbClr val="2F8A28"/>
+            </a:solidFill>
+            <a:prstDash val="solid"/>
+          </a:ln>
+        </p:spPr>
+      </p:sp>
+      <p:sp>
+        <p:nvSpPr>
+          <p:cNvPr id="17" name="Text 15"/>
+          <p:cNvSpPr/>
+          <p:nvPr/>
+        </p:nvSpPr>
+        <p:spPr>
+          <a:xfrm>
+            <a:off x="8997696" y="3922776"/>
+            <a:ext cx="886968" cy="310896"/>
+          </a:xfrm>
+          <a:prstGeom prst="rect">
+            <a:avLst/>
+          </a:prstGeom>
+          <a:noFill/>
+          <a:ln/>
+        </p:spPr>
+        <p:txBody>
+          <a:bodyPr wrap="square" lIns="0" tIns="0" rIns="0" bIns="0" rtlCol="0" anchor="ctr">
+            <a:normAutofit/>
+          </a:bodyPr>
+          <a:lstStyle/>
+          <a:p>
+            <a:pPr algn="ctr" indent="0" marL="0">
+              <a:buNone/>
+            </a:pPr>
+            <a:r>
+              <a:rPr lang="en-US" sz="1500" b="1" dirty="0">
+                <a:solidFill>
+                  <a:srgbClr val="FFFFFF"/>
+                </a:solidFill>
+                <a:latin typeface="Aptos" pitchFamily="34" charset="0"/>
+                <a:ea typeface="Aptos" pitchFamily="34" charset="-122"/>
+                <a:cs typeface="Aptos" pitchFamily="34" charset="-120"/>
+              </a:rPr>
+              <a:t>Apply</a:t>
+            </a:r>
+            <a:endParaRPr lang="en-US" sz="1500" dirty="0"/>
+          </a:p>
+        </p:txBody>
+      </p:sp>
+      <p:sp>
+        <p:nvSpPr>
+          <p:cNvPr id="18" name="Text 16"/>
+          <p:cNvSpPr/>
+          <p:nvPr/>
+        </p:nvSpPr>
+        <p:spPr>
+          <a:xfrm>
+            <a:off x="9985248" y="3941064"/>
+            <a:ext cx="201168" cy="256032"/>
+          </a:xfrm>
+          <a:prstGeom prst="rect">
+            <a:avLst/>
+          </a:prstGeom>
+          <a:noFill/>
+          <a:ln/>
+        </p:spPr>
+        <p:txBody>
+          <a:bodyPr wrap="square" lIns="0" tIns="0" rIns="0" bIns="0" rtlCol="0" anchor="ctr"/>
+          <a:lstStyle/>
+          <a:p>
+            <a:pPr algn="ctr" indent="0" marL="0">
+              <a:buNone/>
+            </a:pPr>
+            <a:r>
+              <a:rPr lang="en-US" sz="1800" b="1" dirty="0">
+                <a:solidFill>
+                  <a:srgbClr val="0068B7"/>
+                </a:solidFill>
+                <a:latin typeface="Aptos" pitchFamily="34" charset="0"/>
+                <a:ea typeface="Aptos" pitchFamily="34" charset="-122"/>
+                <a:cs typeface="Aptos" pitchFamily="34" charset="-120"/>
+              </a:rPr>
+              <a:t>â†’</a:t>
+            </a:r>
+            <a:endParaRPr lang="en-US" sz="1800" dirty="0"/>
+          </a:p>
+        </p:txBody>
+      </p:sp>
+      <p:sp>
+        <p:nvSpPr>
+          <p:cNvPr id="19" name="Shape 17"/>
+          <p:cNvSpPr/>
+          <p:nvPr/>
+        </p:nvSpPr>
+        <p:spPr>
+          <a:xfrm>
+            <a:off x="10213848" y="3730752"/>
+            <a:ext cx="1033272" cy="749808"/>
+          </a:xfrm>
+          <a:prstGeom prst="roundRect">
+            <a:avLst>
+              <a:gd name="adj" fmla="val 14634"/>
+            </a:avLst>
+          </a:prstGeom>
+          <a:solidFill>
+            <a:srgbClr val="6A4CA3"/>
+          </a:solidFill>
+          <a:ln w="12700">
+            <a:solidFill>
+              <a:srgbClr val="6A4CA3"/>
+            </a:solidFill>
+            <a:prstDash val="solid"/>
+          </a:ln>
+        </p:spPr>
+      </p:sp>
+      <p:sp>
+        <p:nvSpPr>
+          <p:cNvPr id="20" name="Text 18"/>
+          <p:cNvSpPr/>
+          <p:nvPr/>
+        </p:nvSpPr>
+        <p:spPr>
+          <a:xfrm>
+            <a:off x="10287000" y="3922776"/>
+            <a:ext cx="886968" cy="310896"/>
+          </a:xfrm>
+          <a:prstGeom prst="rect">
+            <a:avLst/>
+          </a:prstGeom>
+          <a:noFill/>
+          <a:ln/>
+        </p:spPr>
+        <p:txBody>
+          <a:bodyPr wrap="square" lIns="0" tIns="0" rIns="0" bIns="0" rtlCol="0" anchor="ctr">
+            <a:normAutofit/>
+          </a:bodyPr>
+          <a:lstStyle/>
+          <a:p>
+            <a:pPr algn="ctr" indent="0" marL="0">
+              <a:buNone/>
+            </a:pPr>
+            <a:r>
+              <a:rPr lang="en-US" sz="1500" b="1" dirty="0">
+                <a:solidFill>
+                  <a:srgbClr val="FFFFFF"/>
+                </a:solidFill>
+                <a:latin typeface="Aptos" pitchFamily="34" charset="0"/>
+                <a:ea typeface="Aptos" pitchFamily="34" charset="-122"/>
+                <a:cs typeface="Aptos" pitchFamily="34" charset="-120"/>
+              </a:rPr>
+              <a:t>Document</a:t>
+            </a:r>
+            <a:endParaRPr lang="en-US" sz="1500" dirty="0"/>
           </a:p>
         </p:txBody>
       </p:sp>
@@ -9572,7 +10145,7 @@
                 <a:ea typeface="Aptos" pitchFamily="34" charset="-122"/>
                 <a:cs typeface="Aptos" pitchFamily="34" charset="-120"/>
               </a:rPr>
-              <a:t>© Paula Soper</a:t>
+              <a:t>Â© Paula Soper</a:t>
             </a:r>
             <a:endParaRPr lang="en-US" sz="800" dirty="0"/>
           </a:p>
@@ -9580,7 +10153,46 @@
       </p:sp>
       <p:sp>
         <p:nvSpPr>
-          <p:cNvPr id="7" name="Shape 5"/>
+          <p:cNvPr id="7" name="Text 5"/>
+          <p:cNvSpPr/>
+          <p:nvPr/>
+        </p:nvSpPr>
+        <p:spPr>
+          <a:xfrm>
+            <a:off x="11137392" y="6510528"/>
+            <a:ext cx="411480" cy="201168"/>
+          </a:xfrm>
+          <a:prstGeom prst="rect">
+            <a:avLst/>
+          </a:prstGeom>
+          <a:noFill/>
+          <a:ln/>
+        </p:spPr>
+        <p:txBody>
+          <a:bodyPr wrap="square" lIns="0" tIns="0" rIns="0" bIns="0" rtlCol="0" anchor="ctr"/>
+          <a:lstStyle/>
+          <a:p>
+            <a:pPr algn="r" indent="0" marL="0">
+              <a:buNone/>
+            </a:pPr>
+            <a:r>
+              <a:rPr lang="en-US" sz="900" dirty="0">
+                <a:solidFill>
+                  <a:srgbClr val="5F7181"/>
+                </a:solidFill>
+                <a:latin typeface="Aptos" pitchFamily="34" charset="0"/>
+                <a:ea typeface="Aptos" pitchFamily="34" charset="-122"/>
+                <a:cs typeface="Aptos" pitchFamily="34" charset="-120"/>
+              </a:rPr>
+              <a:t>20</a:t>
+            </a:r>
+            <a:endParaRPr lang="en-US" sz="900" dirty="0"/>
+          </a:p>
+        </p:txBody>
+      </p:sp>
+      <p:sp>
+        <p:nvSpPr>
+          <p:cNvPr id="8" name="Shape 6"/>
           <p:cNvSpPr/>
           <p:nvPr/>
         </p:nvSpPr>
@@ -9605,7 +10217,7 @@
       </p:sp>
       <p:sp>
         <p:nvSpPr>
-          <p:cNvPr id="8" name="Text 6"/>
+          <p:cNvPr id="9" name="Text 7"/>
           <p:cNvSpPr/>
           <p:nvPr/>
         </p:nvSpPr>
@@ -9644,14 +10256,14 @@
       </p:sp>
       <p:sp>
         <p:nvSpPr>
-          <p:cNvPr id="9" name="Text 7"/>
+          <p:cNvPr id="10" name="Text 8"/>
           <p:cNvSpPr/>
           <p:nvPr/>
         </p:nvSpPr>
         <p:spPr>
           <a:xfrm>
             <a:off x="640080" y="621792"/>
-            <a:ext cx="10881360" cy="566928"/>
+            <a:ext cx="10881360" cy="713232"/>
           </a:xfrm>
           <a:prstGeom prst="rect">
             <a:avLst/>
@@ -9669,7 +10281,7 @@
               <a:buNone/>
             </a:pPr>
             <a:r>
-              <a:rPr lang="en-US" sz="2700" b="1" dirty="0">
+              <a:rPr lang="en-US" sz="3400" b="1" dirty="0">
                 <a:solidFill>
                   <a:srgbClr val="003A63"/>
                 </a:solidFill>
@@ -9679,20 +10291,20 @@
               </a:rPr>
               <a:t>Knowledge Check</a:t>
             </a:r>
-            <a:endParaRPr lang="en-US" sz="2700" dirty="0"/>
-          </a:p>
-        </p:txBody>
-      </p:sp>
-      <p:sp>
-        <p:nvSpPr>
-          <p:cNvPr id="10" name="Text 8"/>
-          <p:cNvSpPr/>
-          <p:nvPr/>
-        </p:nvSpPr>
-        <p:spPr>
-          <a:xfrm>
-            <a:off x="868680" y="1417320"/>
-            <a:ext cx="6675120" cy="4434840"/>
+            <a:endParaRPr lang="en-US" sz="3400" dirty="0"/>
+          </a:p>
+        </p:txBody>
+      </p:sp>
+      <p:sp>
+        <p:nvSpPr>
+          <p:cNvPr id="11" name="Text 9"/>
+          <p:cNvSpPr/>
+          <p:nvPr/>
+        </p:nvSpPr>
+        <p:spPr>
+          <a:xfrm>
+            <a:off x="868680" y="1508760"/>
+            <a:ext cx="6537960" cy="4160520"/>
           </a:xfrm>
           <a:prstGeom prst="rect">
             <a:avLst/>
@@ -9707,7 +10319,7 @@
           <a:lstStyle/>
           <a:p>
             <a:r>
-              <a:rPr lang="en-US" sz="1700" dirty="0">
+              <a:rPr lang="en-US" sz="2100" dirty="0">
                 <a:solidFill>
                   <a:srgbClr val="17364A"/>
                 </a:solidFill>
@@ -9715,13 +10327,13 @@
                 <a:ea typeface="Aptos" pitchFamily="34" charset="-122"/>
                 <a:cs typeface="Aptos" pitchFamily="34" charset="-120"/>
               </a:rPr>
-              <a:t>1. What is the strongest evidence that grant and funding management for ai projects has been applied responsibly?</a:t>
-            </a:r>
-            <a:endParaRPr lang="en-US" sz="1700" dirty="0"/>
-          </a:p>
-          <a:p>
-            <a:r>
-              <a:rPr lang="en-US" sz="1700" dirty="0">
+              <a:t>1. What is the strongest evidence that grant and funding management for ai projects has been applied.</a:t>
+            </a:r>
+            <a:endParaRPr lang="en-US" sz="2100" dirty="0"/>
+          </a:p>
+          <a:p>
+            <a:r>
+              <a:rPr lang="en-US" sz="2100" dirty="0">
                 <a:solidFill>
                   <a:srgbClr val="17364A"/>
                 </a:solidFill>
@@ -9731,11 +10343,11 @@
               </a:rPr>
               <a:t>2. What is the best reason to assign an accountability owner?</a:t>
             </a:r>
-            <a:endParaRPr lang="en-US" sz="1700" dirty="0"/>
-          </a:p>
-          <a:p>
-            <a:r>
-              <a:rPr lang="en-US" sz="1700" dirty="0">
+            <a:endParaRPr lang="en-US" sz="2100" dirty="0"/>
+          </a:p>
+          <a:p>
+            <a:r>
+              <a:rPr lang="en-US" sz="2100" dirty="0">
                 <a:solidFill>
                   <a:srgbClr val="17364A"/>
                 </a:solidFill>
@@ -9745,27 +10357,13 @@
               </a:rPr>
               <a:t>3. When should an AI-supported workflow be escalated for review?</a:t>
             </a:r>
-            <a:endParaRPr lang="en-US" sz="1700" dirty="0"/>
-          </a:p>
-          <a:p>
-            <a:r>
-              <a:rPr lang="en-US" sz="1700" dirty="0">
-                <a:solidFill>
-                  <a:srgbClr val="17364A"/>
-                </a:solidFill>
-                <a:latin typeface="Aptos" pitchFamily="34" charset="0"/>
-                <a:ea typeface="Aptos" pitchFamily="34" charset="-122"/>
-                <a:cs typeface="Aptos" pitchFamily="34" charset="-120"/>
-              </a:rPr>
-              <a:t>4. Which practice best supports public accountability?</a:t>
-            </a:r>
-            <a:endParaRPr lang="en-US" sz="1700" dirty="0"/>
-          </a:p>
-        </p:txBody>
-      </p:sp>
-      <p:sp>
-        <p:nvSpPr>
-          <p:cNvPr id="11" name="Shape 9"/>
+            <a:endParaRPr lang="en-US" sz="2100" dirty="0"/>
+          </a:p>
+        </p:txBody>
+      </p:sp>
+      <p:sp>
+        <p:nvSpPr>
+          <p:cNvPr id="12" name="Shape 10"/>
           <p:cNvSpPr/>
           <p:nvPr/>
         </p:nvSpPr>
@@ -9792,14 +10390,14 @@
       </p:sp>
       <p:sp>
         <p:nvSpPr>
-          <p:cNvPr id="12" name="Text 10"/>
+          <p:cNvPr id="13" name="Text 11"/>
           <p:cNvSpPr/>
           <p:nvPr/>
         </p:nvSpPr>
         <p:spPr>
           <a:xfrm>
             <a:off x="8074152" y="1563624"/>
-            <a:ext cx="2825496" cy="201168"/>
+            <a:ext cx="2825496" cy="256032"/>
           </a:xfrm>
           <a:prstGeom prst="rect">
             <a:avLst/>
@@ -9815,7 +10413,7 @@
               <a:buNone/>
             </a:pPr>
             <a:r>
-              <a:rPr lang="en-US" sz="950" b="1" dirty="0">
+              <a:rPr lang="en-US" sz="1300" b="1" dirty="0">
                 <a:solidFill>
                   <a:srgbClr val="0068B7"/>
                 </a:solidFill>
@@ -9825,20 +10423,20 @@
               </a:rPr>
               <a:t>Key idea</a:t>
             </a:r>
-            <a:endParaRPr lang="en-US" sz="950" dirty="0"/>
-          </a:p>
-        </p:txBody>
-      </p:sp>
-      <p:sp>
-        <p:nvSpPr>
-          <p:cNvPr id="13" name="Text 11"/>
-          <p:cNvSpPr/>
-          <p:nvPr/>
-        </p:nvSpPr>
-        <p:spPr>
-          <a:xfrm>
-            <a:off x="8074152" y="1856232"/>
-            <a:ext cx="2825496" cy="1261872"/>
+            <a:endParaRPr lang="en-US" sz="1300" dirty="0"/>
+          </a:p>
+        </p:txBody>
+      </p:sp>
+      <p:sp>
+        <p:nvSpPr>
+          <p:cNvPr id="14" name="Text 12"/>
+          <p:cNvSpPr/>
+          <p:nvPr/>
+        </p:nvSpPr>
+        <p:spPr>
+          <a:xfrm>
+            <a:off x="8074152" y="1920240"/>
+            <a:ext cx="2825496" cy="1188720"/>
           </a:xfrm>
           <a:prstGeom prst="rect">
             <a:avLst/>
@@ -9856,7 +10454,7 @@
               <a:buNone/>
             </a:pPr>
             <a:r>
-              <a:rPr lang="en-US" sz="1250" dirty="0">
+              <a:rPr lang="en-US" sz="1550" dirty="0">
                 <a:solidFill>
                   <a:srgbClr val="17364A"/>
                 </a:solidFill>
@@ -9864,15 +10462,15 @@
                 <a:ea typeface="Aptos" pitchFamily="34" charset="-122"/>
                 <a:cs typeface="Aptos" pitchFamily="34" charset="-120"/>
               </a:rPr>
-              <a:t>1. What is the strongest evidence that grant and funding management for ai projects has been applied responsibly?</a:t>
-            </a:r>
-            <a:endParaRPr lang="en-US" sz="1250" dirty="0"/>
-          </a:p>
-        </p:txBody>
-      </p:sp>
-      <p:sp>
-        <p:nvSpPr>
-          <p:cNvPr id="14" name="Shape 12"/>
+              <a:t>1. What is the strongest evidence that grant and funding management for ai projects has been applied.</a:t>
+            </a:r>
+            <a:endParaRPr lang="en-US" sz="1550" dirty="0"/>
+          </a:p>
+        </p:txBody>
+      </p:sp>
+      <p:sp>
+        <p:nvSpPr>
+          <p:cNvPr id="15" name="Shape 13"/>
           <p:cNvSpPr/>
           <p:nvPr/>
         </p:nvSpPr>
@@ -9899,14 +10497,14 @@
       </p:sp>
       <p:sp>
         <p:nvSpPr>
-          <p:cNvPr id="15" name="Text 13"/>
+          <p:cNvPr id="16" name="Text 14"/>
           <p:cNvSpPr/>
           <p:nvPr/>
         </p:nvSpPr>
         <p:spPr>
           <a:xfrm>
             <a:off x="8074152" y="3666744"/>
-            <a:ext cx="2825496" cy="201168"/>
+            <a:ext cx="2825496" cy="256032"/>
           </a:xfrm>
           <a:prstGeom prst="rect">
             <a:avLst/>
@@ -9922,7 +10520,7 @@
               <a:buNone/>
             </a:pPr>
             <a:r>
-              <a:rPr lang="en-US" sz="950" b="1" dirty="0">
+              <a:rPr lang="en-US" sz="1300" b="1" dirty="0">
                 <a:solidFill>
                   <a:srgbClr val="0068B7"/>
                 </a:solidFill>
@@ -9932,20 +10530,20 @@
               </a:rPr>
               <a:t>Use this for</a:t>
             </a:r>
-            <a:endParaRPr lang="en-US" sz="950" dirty="0"/>
-          </a:p>
-        </p:txBody>
-      </p:sp>
-      <p:sp>
-        <p:nvSpPr>
-          <p:cNvPr id="16" name="Text 14"/>
-          <p:cNvSpPr/>
-          <p:nvPr/>
-        </p:nvSpPr>
-        <p:spPr>
-          <a:xfrm>
-            <a:off x="8074152" y="3959352"/>
-            <a:ext cx="2825496" cy="1170432"/>
+            <a:endParaRPr lang="en-US" sz="1300" dirty="0"/>
+          </a:p>
+        </p:txBody>
+      </p:sp>
+      <p:sp>
+        <p:nvSpPr>
+          <p:cNvPr id="17" name="Text 15"/>
+          <p:cNvSpPr/>
+          <p:nvPr/>
+        </p:nvSpPr>
+        <p:spPr>
+          <a:xfrm>
+            <a:off x="8074152" y="4023360"/>
+            <a:ext cx="2825496" cy="1097280"/>
           </a:xfrm>
           <a:prstGeom prst="rect">
             <a:avLst/>
@@ -9963,7 +10561,7 @@
               <a:buNone/>
             </a:pPr>
             <a:r>
-              <a:rPr lang="en-US" sz="1250" dirty="0">
+              <a:rPr lang="en-US" sz="1550" dirty="0">
                 <a:solidFill>
                   <a:srgbClr val="17364A"/>
                 </a:solidFill>
@@ -9973,7 +10571,7 @@
               </a:rPr>
               <a:t>Connect the concept to public health decisions, safeguards, documentation, or implementation work.</a:t>
             </a:r>
-            <a:endParaRPr lang="en-US" sz="1250" dirty="0"/>
+            <a:endParaRPr lang="en-US" sz="1550" dirty="0"/>
           </a:p>
         </p:txBody>
       </p:sp>
@@ -10170,7 +10768,7 @@
                 <a:ea typeface="Aptos" pitchFamily="34" charset="-122"/>
                 <a:cs typeface="Aptos" pitchFamily="34" charset="-120"/>
               </a:rPr>
-              <a:t>© Paula Soper</a:t>
+              <a:t>Â© Paula Soper</a:t>
             </a:r>
             <a:endParaRPr lang="en-US" sz="800" dirty="0"/>
           </a:p>
@@ -10178,7 +10776,46 @@
       </p:sp>
       <p:sp>
         <p:nvSpPr>
-          <p:cNvPr id="7" name="Shape 5"/>
+          <p:cNvPr id="7" name="Text 5"/>
+          <p:cNvSpPr/>
+          <p:nvPr/>
+        </p:nvSpPr>
+        <p:spPr>
+          <a:xfrm>
+            <a:off x="11137392" y="6510528"/>
+            <a:ext cx="411480" cy="201168"/>
+          </a:xfrm>
+          <a:prstGeom prst="rect">
+            <a:avLst/>
+          </a:prstGeom>
+          <a:noFill/>
+          <a:ln/>
+        </p:spPr>
+        <p:txBody>
+          <a:bodyPr wrap="square" lIns="0" tIns="0" rIns="0" bIns="0" rtlCol="0" anchor="ctr"/>
+          <a:lstStyle/>
+          <a:p>
+            <a:pPr algn="r" indent="0" marL="0">
+              <a:buNone/>
+            </a:pPr>
+            <a:r>
+              <a:rPr lang="en-US" sz="900" dirty="0">
+                <a:solidFill>
+                  <a:srgbClr val="5F7181"/>
+                </a:solidFill>
+                <a:latin typeface="Aptos" pitchFamily="34" charset="0"/>
+                <a:ea typeface="Aptos" pitchFamily="34" charset="-122"/>
+                <a:cs typeface="Aptos" pitchFamily="34" charset="-120"/>
+              </a:rPr>
+              <a:t>21</a:t>
+            </a:r>
+            <a:endParaRPr lang="en-US" sz="900" dirty="0"/>
+          </a:p>
+        </p:txBody>
+      </p:sp>
+      <p:sp>
+        <p:nvSpPr>
+          <p:cNvPr id="8" name="Shape 6"/>
           <p:cNvSpPr/>
           <p:nvPr/>
         </p:nvSpPr>
@@ -10203,7 +10840,7 @@
       </p:sp>
       <p:sp>
         <p:nvSpPr>
-          <p:cNvPr id="8" name="Text 6"/>
+          <p:cNvPr id="9" name="Text 7"/>
           <p:cNvSpPr/>
           <p:nvPr/>
         </p:nvSpPr>
@@ -10242,14 +10879,14 @@
       </p:sp>
       <p:sp>
         <p:nvSpPr>
-          <p:cNvPr id="9" name="Text 7"/>
+          <p:cNvPr id="10" name="Text 8"/>
           <p:cNvSpPr/>
           <p:nvPr/>
         </p:nvSpPr>
         <p:spPr>
           <a:xfrm>
             <a:off x="640080" y="621792"/>
-            <a:ext cx="10881360" cy="566928"/>
+            <a:ext cx="10881360" cy="713232"/>
           </a:xfrm>
           <a:prstGeom prst="rect">
             <a:avLst/>
@@ -10267,7 +10904,7 @@
               <a:buNone/>
             </a:pPr>
             <a:r>
-              <a:rPr lang="en-US" sz="2700" b="1" dirty="0">
+              <a:rPr lang="en-US" sz="3400" b="1" dirty="0">
                 <a:solidFill>
                   <a:srgbClr val="003A63"/>
                 </a:solidFill>
@@ -10277,20 +10914,20 @@
               </a:rPr>
               <a:t>References and Resources</a:t>
             </a:r>
-            <a:endParaRPr lang="en-US" sz="2700" dirty="0"/>
-          </a:p>
-        </p:txBody>
-      </p:sp>
-      <p:sp>
-        <p:nvSpPr>
-          <p:cNvPr id="10" name="Text 8"/>
-          <p:cNvSpPr/>
-          <p:nvPr/>
-        </p:nvSpPr>
-        <p:spPr>
-          <a:xfrm>
-            <a:off x="868680" y="1417320"/>
-            <a:ext cx="6675120" cy="4434840"/>
+            <a:endParaRPr lang="en-US" sz="3400" dirty="0"/>
+          </a:p>
+        </p:txBody>
+      </p:sp>
+      <p:sp>
+        <p:nvSpPr>
+          <p:cNvPr id="11" name="Text 9"/>
+          <p:cNvSpPr/>
+          <p:nvPr/>
+        </p:nvSpPr>
+        <p:spPr>
+          <a:xfrm>
+            <a:off x="868680" y="1508760"/>
+            <a:ext cx="6537960" cy="4160520"/>
           </a:xfrm>
           <a:prstGeom prst="rect">
             <a:avLst/>
@@ -10305,7 +10942,7 @@
           <a:lstStyle/>
           <a:p>
             <a:r>
-              <a:rPr lang="en-US" sz="1700" dirty="0">
+              <a:rPr lang="en-US" sz="2100" dirty="0">
                 <a:solidFill>
                   <a:srgbClr val="17364A"/>
                 </a:solidFill>
@@ -10315,11 +10952,11 @@
               </a:rPr>
               <a:t>CDC Public Health Data Strategy and Data Modernization resources:.</a:t>
             </a:r>
-            <a:endParaRPr lang="en-US" sz="1700" dirty="0"/>
-          </a:p>
-          <a:p>
-            <a:r>
-              <a:rPr lang="en-US" sz="1700" dirty="0">
+            <a:endParaRPr lang="en-US" sz="2100" dirty="0"/>
+          </a:p>
+          <a:p>
+            <a:r>
+              <a:rPr lang="en-US" sz="2100" dirty="0">
                 <a:solidFill>
                   <a:srgbClr val="17364A"/>
                 </a:solidFill>
@@ -10329,11 +10966,11 @@
               </a:rPr>
               <a:t>NIST Artificial Intelligence Risk Management Framework and NIST Generative AI Profile:.</a:t>
             </a:r>
-            <a:endParaRPr lang="en-US" sz="1700" dirty="0"/>
-          </a:p>
-          <a:p>
-            <a:r>
-              <a:rPr lang="en-US" sz="1700" dirty="0">
+            <a:endParaRPr lang="en-US" sz="2100" dirty="0"/>
+          </a:p>
+          <a:p>
+            <a:r>
+              <a:rPr lang="en-US" sz="2100" dirty="0">
                 <a:solidFill>
                   <a:srgbClr val="17364A"/>
                 </a:solidFill>
@@ -10341,29 +10978,15 @@
                 <a:ea typeface="Aptos" pitchFamily="34" charset="-122"/>
                 <a:cs typeface="Aptos" pitchFamily="34" charset="-120"/>
               </a:rPr>
-              <a:t>WHO Ethics and Governance of Artificial Intelligence for Health guidance: https://www.who.int/publications/i/item/9789240029200</a:t>
-            </a:r>
-            <a:endParaRPr lang="en-US" sz="1700" dirty="0"/>
-          </a:p>
-          <a:p>
-            <a:r>
-              <a:rPr lang="en-US" sz="1700" dirty="0">
-                <a:solidFill>
-                  <a:srgbClr val="17364A"/>
-                </a:solidFill>
-                <a:latin typeface="Aptos" pitchFamily="34" charset="0"/>
-                <a:ea typeface="Aptos" pitchFamily="34" charset="-122"/>
-                <a:cs typeface="Aptos" pitchFamily="34" charset="-120"/>
-              </a:rPr>
-              <a:t>OWASP Top 10 for Large Language Model Applications: https://owasp.org/www-project-top-10-for-large-language-model-applications/</a:t>
-            </a:r>
-            <a:endParaRPr lang="en-US" sz="1700" dirty="0"/>
-          </a:p>
-        </p:txBody>
-      </p:sp>
-      <p:sp>
-        <p:nvSpPr>
-          <p:cNvPr id="11" name="Shape 9"/>
+              <a:t>WHO Ethics and Governance of Artificial Intelligence for Health guidance:.</a:t>
+            </a:r>
+            <a:endParaRPr lang="en-US" sz="2100" dirty="0"/>
+          </a:p>
+        </p:txBody>
+      </p:sp>
+      <p:sp>
+        <p:nvSpPr>
+          <p:cNvPr id="12" name="Shape 10"/>
           <p:cNvSpPr/>
           <p:nvPr/>
         </p:nvSpPr>
@@ -10390,14 +11013,14 @@
       </p:sp>
       <p:sp>
         <p:nvSpPr>
-          <p:cNvPr id="12" name="Text 10"/>
+          <p:cNvPr id="13" name="Text 11"/>
           <p:cNvSpPr/>
           <p:nvPr/>
         </p:nvSpPr>
         <p:spPr>
           <a:xfrm>
             <a:off x="8074152" y="1563624"/>
-            <a:ext cx="2825496" cy="201168"/>
+            <a:ext cx="2825496" cy="256032"/>
           </a:xfrm>
           <a:prstGeom prst="rect">
             <a:avLst/>
@@ -10413,7 +11036,7 @@
               <a:buNone/>
             </a:pPr>
             <a:r>
-              <a:rPr lang="en-US" sz="950" b="1" dirty="0">
+              <a:rPr lang="en-US" sz="1300" b="1" dirty="0">
                 <a:solidFill>
                   <a:srgbClr val="0068B7"/>
                 </a:solidFill>
@@ -10423,20 +11046,20 @@
               </a:rPr>
               <a:t>Key idea</a:t>
             </a:r>
-            <a:endParaRPr lang="en-US" sz="950" dirty="0"/>
-          </a:p>
-        </p:txBody>
-      </p:sp>
-      <p:sp>
-        <p:nvSpPr>
-          <p:cNvPr id="13" name="Text 11"/>
-          <p:cNvSpPr/>
-          <p:nvPr/>
-        </p:nvSpPr>
-        <p:spPr>
-          <a:xfrm>
-            <a:off x="8074152" y="1856232"/>
-            <a:ext cx="2825496" cy="1261872"/>
+            <a:endParaRPr lang="en-US" sz="1300" dirty="0"/>
+          </a:p>
+        </p:txBody>
+      </p:sp>
+      <p:sp>
+        <p:nvSpPr>
+          <p:cNvPr id="14" name="Text 12"/>
+          <p:cNvSpPr/>
+          <p:nvPr/>
+        </p:nvSpPr>
+        <p:spPr>
+          <a:xfrm>
+            <a:off x="8074152" y="1920240"/>
+            <a:ext cx="2825496" cy="1188720"/>
           </a:xfrm>
           <a:prstGeom prst="rect">
             <a:avLst/>
@@ -10454,7 +11077,7 @@
               <a:buNone/>
             </a:pPr>
             <a:r>
-              <a:rPr lang="en-US" sz="1250" dirty="0">
+              <a:rPr lang="en-US" sz="1550" dirty="0">
                 <a:solidFill>
                   <a:srgbClr val="17364A"/>
                 </a:solidFill>
@@ -10464,13 +11087,13 @@
               </a:rPr>
               <a:t>CDC Public Health Data Strategy and Data Modernization resources:.</a:t>
             </a:r>
-            <a:endParaRPr lang="en-US" sz="1250" dirty="0"/>
-          </a:p>
-        </p:txBody>
-      </p:sp>
-      <p:sp>
-        <p:nvSpPr>
-          <p:cNvPr id="14" name="Shape 12"/>
+            <a:endParaRPr lang="en-US" sz="1550" dirty="0"/>
+          </a:p>
+        </p:txBody>
+      </p:sp>
+      <p:sp>
+        <p:nvSpPr>
+          <p:cNvPr id="15" name="Shape 13"/>
           <p:cNvSpPr/>
           <p:nvPr/>
         </p:nvSpPr>
@@ -10497,14 +11120,14 @@
       </p:sp>
       <p:sp>
         <p:nvSpPr>
-          <p:cNvPr id="15" name="Text 13"/>
+          <p:cNvPr id="16" name="Text 14"/>
           <p:cNvSpPr/>
           <p:nvPr/>
         </p:nvSpPr>
         <p:spPr>
           <a:xfrm>
             <a:off x="8074152" y="3666744"/>
-            <a:ext cx="2825496" cy="201168"/>
+            <a:ext cx="2825496" cy="256032"/>
           </a:xfrm>
           <a:prstGeom prst="rect">
             <a:avLst/>
@@ -10520,7 +11143,7 @@
               <a:buNone/>
             </a:pPr>
             <a:r>
-              <a:rPr lang="en-US" sz="950" b="1" dirty="0">
+              <a:rPr lang="en-US" sz="1300" b="1" dirty="0">
                 <a:solidFill>
                   <a:srgbClr val="0068B7"/>
                 </a:solidFill>
@@ -10530,20 +11153,20 @@
               </a:rPr>
               <a:t>Use this for</a:t>
             </a:r>
-            <a:endParaRPr lang="en-US" sz="950" dirty="0"/>
-          </a:p>
-        </p:txBody>
-      </p:sp>
-      <p:sp>
-        <p:nvSpPr>
-          <p:cNvPr id="16" name="Text 14"/>
-          <p:cNvSpPr/>
-          <p:nvPr/>
-        </p:nvSpPr>
-        <p:spPr>
-          <a:xfrm>
-            <a:off x="8074152" y="3959352"/>
-            <a:ext cx="2825496" cy="1170432"/>
+            <a:endParaRPr lang="en-US" sz="1300" dirty="0"/>
+          </a:p>
+        </p:txBody>
+      </p:sp>
+      <p:sp>
+        <p:nvSpPr>
+          <p:cNvPr id="17" name="Text 15"/>
+          <p:cNvSpPr/>
+          <p:nvPr/>
+        </p:nvSpPr>
+        <p:spPr>
+          <a:xfrm>
+            <a:off x="8074152" y="4023360"/>
+            <a:ext cx="2825496" cy="1097280"/>
           </a:xfrm>
           <a:prstGeom prst="rect">
             <a:avLst/>
@@ -10561,7 +11184,7 @@
               <a:buNone/>
             </a:pPr>
             <a:r>
-              <a:rPr lang="en-US" sz="1250" dirty="0">
+              <a:rPr lang="en-US" sz="1550" dirty="0">
                 <a:solidFill>
                   <a:srgbClr val="17364A"/>
                 </a:solidFill>
@@ -10571,7 +11194,7 @@
               </a:rPr>
               <a:t>Connect the concept to public health decisions, safeguards, documentation, or implementation work.</a:t>
             </a:r>
-            <a:endParaRPr lang="en-US" sz="1250" dirty="0"/>
+            <a:endParaRPr lang="en-US" sz="1550" dirty="0"/>
           </a:p>
         </p:txBody>
       </p:sp>
@@ -10768,7 +11391,7 @@
                 <a:ea typeface="Aptos" pitchFamily="34" charset="-122"/>
                 <a:cs typeface="Aptos" pitchFamily="34" charset="-120"/>
               </a:rPr>
-              <a:t>© Paula Soper</a:t>
+              <a:t>Â© Paula Soper</a:t>
             </a:r>
             <a:endParaRPr lang="en-US" sz="800" dirty="0"/>
           </a:p>
@@ -10782,8 +11405,47 @@
         </p:nvSpPr>
         <p:spPr>
           <a:xfrm>
+            <a:off x="11137392" y="6510528"/>
+            <a:ext cx="411480" cy="201168"/>
+          </a:xfrm>
+          <a:prstGeom prst="rect">
+            <a:avLst/>
+          </a:prstGeom>
+          <a:noFill/>
+          <a:ln/>
+        </p:spPr>
+        <p:txBody>
+          <a:bodyPr wrap="square" lIns="0" tIns="0" rIns="0" bIns="0" rtlCol="0" anchor="ctr"/>
+          <a:lstStyle/>
+          <a:p>
+            <a:pPr algn="r" indent="0" marL="0">
+              <a:buNone/>
+            </a:pPr>
+            <a:r>
+              <a:rPr lang="en-US" sz="900" dirty="0">
+                <a:solidFill>
+                  <a:srgbClr val="5F7181"/>
+                </a:solidFill>
+                <a:latin typeface="Aptos" pitchFamily="34" charset="0"/>
+                <a:ea typeface="Aptos" pitchFamily="34" charset="-122"/>
+                <a:cs typeface="Aptos" pitchFamily="34" charset="-120"/>
+              </a:rPr>
+              <a:t>22</a:t>
+            </a:r>
+            <a:endParaRPr lang="en-US" sz="900" dirty="0"/>
+          </a:p>
+        </p:txBody>
+      </p:sp>
+      <p:sp>
+        <p:nvSpPr>
+          <p:cNvPr id="8" name="Text 6"/>
+          <p:cNvSpPr/>
+          <p:nvPr/>
+        </p:nvSpPr>
+        <p:spPr>
+          <a:xfrm>
             <a:off x="640080" y="658368"/>
-            <a:ext cx="10881360" cy="566928"/>
+            <a:ext cx="10881360" cy="713232"/>
           </a:xfrm>
           <a:prstGeom prst="rect">
             <a:avLst/>
@@ -10801,7 +11463,7 @@
               <a:buNone/>
             </a:pPr>
             <a:r>
-              <a:rPr lang="en-US" sz="2700" b="1" dirty="0">
+              <a:rPr lang="en-US" sz="3400" b="1" dirty="0">
                 <a:solidFill>
                   <a:srgbClr val="003A63"/>
                 </a:solidFill>
@@ -10811,20 +11473,20 @@
               </a:rPr>
               <a:t>References and Resources Continued</a:t>
             </a:r>
-            <a:endParaRPr lang="en-US" sz="2700" dirty="0"/>
-          </a:p>
-        </p:txBody>
-      </p:sp>
-      <p:sp>
-        <p:nvSpPr>
-          <p:cNvPr id="8" name="Text 6"/>
-          <p:cNvSpPr/>
-          <p:nvPr/>
-        </p:nvSpPr>
-        <p:spPr>
-          <a:xfrm>
-            <a:off x="868680" y="1417320"/>
-            <a:ext cx="6675120" cy="4434840"/>
+            <a:endParaRPr lang="en-US" sz="3400" dirty="0"/>
+          </a:p>
+        </p:txBody>
+      </p:sp>
+      <p:sp>
+        <p:nvSpPr>
+          <p:cNvPr id="9" name="Text 7"/>
+          <p:cNvSpPr/>
+          <p:nvPr/>
+        </p:nvSpPr>
+        <p:spPr>
+          <a:xfrm>
+            <a:off x="868680" y="1508760"/>
+            <a:ext cx="6537960" cy="4160520"/>
           </a:xfrm>
           <a:prstGeom prst="rect">
             <a:avLst/>
@@ -10839,7 +11501,7 @@
           <a:lstStyle/>
           <a:p>
             <a:r>
-              <a:rPr lang="en-US" sz="1700" dirty="0">
+              <a:rPr lang="en-US" sz="2100" dirty="0">
                 <a:solidFill>
                   <a:srgbClr val="17364A"/>
                 </a:solidFill>
@@ -10847,13 +11509,13 @@
                 <a:ea typeface="Aptos" pitchFamily="34" charset="-122"/>
                 <a:cs typeface="Aptos" pitchFamily="34" charset="-120"/>
               </a:rPr>
-              <a:t>Agency policies for privacy, public records, cybersecurity, procurement, civil rights, accessibility, language access, and.</a:t>
-            </a:r>
-            <a:endParaRPr lang="en-US" sz="1700" dirty="0"/>
-          </a:p>
-          <a:p>
-            <a:r>
-              <a:rPr lang="en-US" sz="1700" dirty="0">
+              <a:t>Agency policies for privacy, public records, cybersecurity, procurement, civil rights, accessibility,.</a:t>
+            </a:r>
+            <a:endParaRPr lang="en-US" sz="2100" dirty="0"/>
+          </a:p>
+          <a:p>
+            <a:r>
+              <a:rPr lang="en-US" sz="2100" dirty="0">
                 <a:solidFill>
                   <a:srgbClr val="17364A"/>
                 </a:solidFill>
@@ -10863,11 +11525,11 @@
               </a:rPr>
               <a:t>Appendix. Common Source Base Used Across Modules</a:t>
             </a:r>
-            <a:endParaRPr lang="en-US" sz="1700" dirty="0"/>
-          </a:p>
-          <a:p>
-            <a:r>
-              <a:rPr lang="en-US" sz="1700" dirty="0">
+            <a:endParaRPr lang="en-US" sz="2100" dirty="0"/>
+          </a:p>
+          <a:p>
+            <a:r>
+              <a:rPr lang="en-US" sz="2100" dirty="0">
                 <a:solidFill>
                   <a:srgbClr val="17364A"/>
                 </a:solidFill>
@@ -10877,27 +11539,13 @@
               </a:rPr>
               <a:t>CDC Public Health Data Strategy and CDC Data Modernization resources.:.</a:t>
             </a:r>
-            <a:endParaRPr lang="en-US" sz="1700" dirty="0"/>
-          </a:p>
-          <a:p>
-            <a:r>
-              <a:rPr lang="en-US" sz="1700" dirty="0">
-                <a:solidFill>
-                  <a:srgbClr val="17364A"/>
-                </a:solidFill>
-                <a:latin typeface="Aptos" pitchFamily="34" charset="0"/>
-                <a:ea typeface="Aptos" pitchFamily="34" charset="-122"/>
-                <a:cs typeface="Aptos" pitchFamily="34" charset="-120"/>
-              </a:rPr>
-              <a:t>CDC electronic case reporting, electronic laboratory reporting, surveillance, and public health data quality resources.:.</a:t>
-            </a:r>
-            <a:endParaRPr lang="en-US" sz="1700" dirty="0"/>
-          </a:p>
-        </p:txBody>
-      </p:sp>
-      <p:sp>
-        <p:nvSpPr>
-          <p:cNvPr id="9" name="Shape 7"/>
+            <a:endParaRPr lang="en-US" sz="2100" dirty="0"/>
+          </a:p>
+        </p:txBody>
+      </p:sp>
+      <p:sp>
+        <p:nvSpPr>
+          <p:cNvPr id="10" name="Shape 8"/>
           <p:cNvSpPr/>
           <p:nvPr/>
         </p:nvSpPr>
@@ -10924,14 +11572,14 @@
       </p:sp>
       <p:sp>
         <p:nvSpPr>
-          <p:cNvPr id="10" name="Text 8"/>
+          <p:cNvPr id="11" name="Text 9"/>
           <p:cNvSpPr/>
           <p:nvPr/>
         </p:nvSpPr>
         <p:spPr>
           <a:xfrm>
             <a:off x="8074152" y="1563624"/>
-            <a:ext cx="2825496" cy="201168"/>
+            <a:ext cx="2825496" cy="256032"/>
           </a:xfrm>
           <a:prstGeom prst="rect">
             <a:avLst/>
@@ -10947,7 +11595,7 @@
               <a:buNone/>
             </a:pPr>
             <a:r>
-              <a:rPr lang="en-US" sz="950" b="1" dirty="0">
+              <a:rPr lang="en-US" sz="1300" b="1" dirty="0">
                 <a:solidFill>
                   <a:srgbClr val="0068B7"/>
                 </a:solidFill>
@@ -10957,20 +11605,20 @@
               </a:rPr>
               <a:t>Key idea</a:t>
             </a:r>
-            <a:endParaRPr lang="en-US" sz="950" dirty="0"/>
-          </a:p>
-        </p:txBody>
-      </p:sp>
-      <p:sp>
-        <p:nvSpPr>
-          <p:cNvPr id="11" name="Text 9"/>
-          <p:cNvSpPr/>
-          <p:nvPr/>
-        </p:nvSpPr>
-        <p:spPr>
-          <a:xfrm>
-            <a:off x="8074152" y="1856232"/>
-            <a:ext cx="2825496" cy="1261872"/>
+            <a:endParaRPr lang="en-US" sz="1300" dirty="0"/>
+          </a:p>
+        </p:txBody>
+      </p:sp>
+      <p:sp>
+        <p:nvSpPr>
+          <p:cNvPr id="12" name="Text 10"/>
+          <p:cNvSpPr/>
+          <p:nvPr/>
+        </p:nvSpPr>
+        <p:spPr>
+          <a:xfrm>
+            <a:off x="8074152" y="1920240"/>
+            <a:ext cx="2825496" cy="1188720"/>
           </a:xfrm>
           <a:prstGeom prst="rect">
             <a:avLst/>
@@ -10988,7 +11636,7 @@
               <a:buNone/>
             </a:pPr>
             <a:r>
-              <a:rPr lang="en-US" sz="1250" dirty="0">
+              <a:rPr lang="en-US" sz="1550" dirty="0">
                 <a:solidFill>
                   <a:srgbClr val="17364A"/>
                 </a:solidFill>
@@ -10996,15 +11644,15 @@
                 <a:ea typeface="Aptos" pitchFamily="34" charset="-122"/>
                 <a:cs typeface="Aptos" pitchFamily="34" charset="-120"/>
               </a:rPr>
-              <a:t>Agency policies for privacy, public records, cybersecurity, procurement, civil rights, accessibility, language access, and.</a:t>
-            </a:r>
-            <a:endParaRPr lang="en-US" sz="1250" dirty="0"/>
-          </a:p>
-        </p:txBody>
-      </p:sp>
-      <p:sp>
-        <p:nvSpPr>
-          <p:cNvPr id="12" name="Shape 10"/>
+              <a:t>Agency policies for privacy, public records, cybersecurity, procurement, civil rights, accessibility,.</a:t>
+            </a:r>
+            <a:endParaRPr lang="en-US" sz="1550" dirty="0"/>
+          </a:p>
+        </p:txBody>
+      </p:sp>
+      <p:sp>
+        <p:nvSpPr>
+          <p:cNvPr id="13" name="Shape 11"/>
           <p:cNvSpPr/>
           <p:nvPr/>
         </p:nvSpPr>
@@ -11031,14 +11679,14 @@
       </p:sp>
       <p:sp>
         <p:nvSpPr>
-          <p:cNvPr id="13" name="Text 11"/>
+          <p:cNvPr id="14" name="Text 12"/>
           <p:cNvSpPr/>
           <p:nvPr/>
         </p:nvSpPr>
         <p:spPr>
           <a:xfrm>
             <a:off x="8074152" y="3666744"/>
-            <a:ext cx="2825496" cy="201168"/>
+            <a:ext cx="2825496" cy="256032"/>
           </a:xfrm>
           <a:prstGeom prst="rect">
             <a:avLst/>
@@ -11054,7 +11702,7 @@
               <a:buNone/>
             </a:pPr>
             <a:r>
-              <a:rPr lang="en-US" sz="950" b="1" dirty="0">
+              <a:rPr lang="en-US" sz="1300" b="1" dirty="0">
                 <a:solidFill>
                   <a:srgbClr val="0068B7"/>
                 </a:solidFill>
@@ -11064,20 +11712,20 @@
               </a:rPr>
               <a:t>Use this for</a:t>
             </a:r>
-            <a:endParaRPr lang="en-US" sz="950" dirty="0"/>
-          </a:p>
-        </p:txBody>
-      </p:sp>
-      <p:sp>
-        <p:nvSpPr>
-          <p:cNvPr id="14" name="Text 12"/>
-          <p:cNvSpPr/>
-          <p:nvPr/>
-        </p:nvSpPr>
-        <p:spPr>
-          <a:xfrm>
-            <a:off x="8074152" y="3959352"/>
-            <a:ext cx="2825496" cy="1170432"/>
+            <a:endParaRPr lang="en-US" sz="1300" dirty="0"/>
+          </a:p>
+        </p:txBody>
+      </p:sp>
+      <p:sp>
+        <p:nvSpPr>
+          <p:cNvPr id="15" name="Text 13"/>
+          <p:cNvSpPr/>
+          <p:nvPr/>
+        </p:nvSpPr>
+        <p:spPr>
+          <a:xfrm>
+            <a:off x="8074152" y="4023360"/>
+            <a:ext cx="2825496" cy="1097280"/>
           </a:xfrm>
           <a:prstGeom prst="rect">
             <a:avLst/>
@@ -11095,7 +11743,7 @@
               <a:buNone/>
             </a:pPr>
             <a:r>
-              <a:rPr lang="en-US" sz="1250" dirty="0">
+              <a:rPr lang="en-US" sz="1550" dirty="0">
                 <a:solidFill>
                   <a:srgbClr val="17364A"/>
                 </a:solidFill>
@@ -11105,7 +11753,7 @@
               </a:rPr>
               <a:t>Connect the concept to public health decisions, safeguards, documentation, or implementation work.</a:t>
             </a:r>
-            <a:endParaRPr lang="en-US" sz="1250" dirty="0"/>
+            <a:endParaRPr lang="en-US" sz="1550" dirty="0"/>
           </a:p>
         </p:txBody>
       </p:sp>
@@ -11302,7 +11950,7 @@
                 <a:ea typeface="Aptos" pitchFamily="34" charset="-122"/>
                 <a:cs typeface="Aptos" pitchFamily="34" charset="-120"/>
               </a:rPr>
-              <a:t>© Paula Soper</a:t>
+              <a:t>Â© Paula Soper</a:t>
             </a:r>
             <a:endParaRPr lang="en-US" sz="800" dirty="0"/>
           </a:p>
@@ -11316,8 +11964,47 @@
         </p:nvSpPr>
         <p:spPr>
           <a:xfrm>
+            <a:off x="11137392" y="6510528"/>
+            <a:ext cx="411480" cy="201168"/>
+          </a:xfrm>
+          <a:prstGeom prst="rect">
+            <a:avLst/>
+          </a:prstGeom>
+          <a:noFill/>
+          <a:ln/>
+        </p:spPr>
+        <p:txBody>
+          <a:bodyPr wrap="square" lIns="0" tIns="0" rIns="0" bIns="0" rtlCol="0" anchor="ctr"/>
+          <a:lstStyle/>
+          <a:p>
+            <a:pPr algn="r" indent="0" marL="0">
+              <a:buNone/>
+            </a:pPr>
+            <a:r>
+              <a:rPr lang="en-US" sz="900" dirty="0">
+                <a:solidFill>
+                  <a:srgbClr val="5F7181"/>
+                </a:solidFill>
+                <a:latin typeface="Aptos" pitchFamily="34" charset="0"/>
+                <a:ea typeface="Aptos" pitchFamily="34" charset="-122"/>
+                <a:cs typeface="Aptos" pitchFamily="34" charset="-120"/>
+              </a:rPr>
+              <a:t>23</a:t>
+            </a:r>
+            <a:endParaRPr lang="en-US" sz="900" dirty="0"/>
+          </a:p>
+        </p:txBody>
+      </p:sp>
+      <p:sp>
+        <p:nvSpPr>
+          <p:cNvPr id="8" name="Text 6"/>
+          <p:cNvSpPr/>
+          <p:nvPr/>
+        </p:nvSpPr>
+        <p:spPr>
+          <a:xfrm>
             <a:off x="640080" y="658368"/>
-            <a:ext cx="10881360" cy="566928"/>
+            <a:ext cx="10881360" cy="713232"/>
           </a:xfrm>
           <a:prstGeom prst="rect">
             <a:avLst/>
@@ -11335,7 +12022,7 @@
               <a:buNone/>
             </a:pPr>
             <a:r>
-              <a:rPr lang="en-US" sz="2700" b="1" dirty="0">
+              <a:rPr lang="en-US" sz="3400" b="1" dirty="0">
                 <a:solidFill>
                   <a:srgbClr val="003A63"/>
                 </a:solidFill>
@@ -11345,20 +12032,20 @@
               </a:rPr>
               <a:t>References and Resources Continued</a:t>
             </a:r>
-            <a:endParaRPr lang="en-US" sz="2700" dirty="0"/>
-          </a:p>
-        </p:txBody>
-      </p:sp>
-      <p:sp>
-        <p:nvSpPr>
-          <p:cNvPr id="8" name="Text 6"/>
-          <p:cNvSpPr/>
-          <p:nvPr/>
-        </p:nvSpPr>
-        <p:spPr>
-          <a:xfrm>
-            <a:off x="868680" y="1417320"/>
-            <a:ext cx="6675120" cy="4434840"/>
+            <a:endParaRPr lang="en-US" sz="3400" dirty="0"/>
+          </a:p>
+        </p:txBody>
+      </p:sp>
+      <p:sp>
+        <p:nvSpPr>
+          <p:cNvPr id="9" name="Text 7"/>
+          <p:cNvSpPr/>
+          <p:nvPr/>
+        </p:nvSpPr>
+        <p:spPr>
+          <a:xfrm>
+            <a:off x="868680" y="1508760"/>
+            <a:ext cx="6537960" cy="4160520"/>
           </a:xfrm>
           <a:prstGeom prst="rect">
             <a:avLst/>
@@ -11373,7 +12060,7 @@
           <a:lstStyle/>
           <a:p>
             <a:r>
-              <a:rPr lang="en-US" sz="1700" dirty="0">
+              <a:rPr lang="en-US" sz="2100" dirty="0">
                 <a:solidFill>
                   <a:srgbClr val="17364A"/>
                 </a:solidFill>
@@ -11383,11 +12070,11 @@
               </a:rPr>
               <a:t>ONC USCDI, health IT, interoperability, and information blocking resources.:.</a:t>
             </a:r>
-            <a:endParaRPr lang="en-US" sz="1700" dirty="0"/>
-          </a:p>
-          <a:p>
-            <a:r>
-              <a:rPr lang="en-US" sz="1700" dirty="0">
+            <a:endParaRPr lang="en-US" sz="2100" dirty="0"/>
+          </a:p>
+          <a:p>
+            <a:r>
+              <a:rPr lang="en-US" sz="2100" dirty="0">
                 <a:solidFill>
                   <a:srgbClr val="17364A"/>
                 </a:solidFill>
@@ -11395,13 +12082,13 @@
                 <a:ea typeface="Aptos" pitchFamily="34" charset="-122"/>
                 <a:cs typeface="Aptos" pitchFamily="34" charset="-120"/>
               </a:rPr>
-              <a:t>NIST Artificial Intelligence Risk Management Framework, NIST Generative AI Profile, NIST Privacy Framework, and related NIST.</a:t>
-            </a:r>
-            <a:endParaRPr lang="en-US" sz="1700" dirty="0"/>
-          </a:p>
-          <a:p>
-            <a:r>
-              <a:rPr lang="en-US" sz="1700" dirty="0">
+              <a:t>NIST Artificial Intelligence Risk Management Framework, NIST Generative AI Profile, NIST Privacy.</a:t>
+            </a:r>
+            <a:endParaRPr lang="en-US" sz="2100" dirty="0"/>
+          </a:p>
+          <a:p>
+            <a:r>
+              <a:rPr lang="en-US" sz="2100" dirty="0">
                 <a:solidFill>
                   <a:srgbClr val="17364A"/>
                 </a:solidFill>
@@ -11411,27 +12098,13 @@
               </a:rPr>
               <a:t>OWASP Top 10 for Large Language Model Applications and related secure AI application guidance.:.</a:t>
             </a:r>
-            <a:endParaRPr lang="en-US" sz="1700" dirty="0"/>
-          </a:p>
-          <a:p>
-            <a:r>
-              <a:rPr lang="en-US" sz="1700" dirty="0">
-                <a:solidFill>
-                  <a:srgbClr val="17364A"/>
-                </a:solidFill>
-                <a:latin typeface="Aptos" pitchFamily="34" charset="0"/>
-                <a:ea typeface="Aptos" pitchFamily="34" charset="-122"/>
-                <a:cs typeface="Aptos" pitchFamily="34" charset="-120"/>
-              </a:rPr>
-              <a:t>WHO ethics and governance guidance for artificial intelligence in health.</a:t>
-            </a:r>
-            <a:endParaRPr lang="en-US" sz="1700" dirty="0"/>
-          </a:p>
-        </p:txBody>
-      </p:sp>
-      <p:sp>
-        <p:nvSpPr>
-          <p:cNvPr id="9" name="Shape 7"/>
+            <a:endParaRPr lang="en-US" sz="2100" dirty="0"/>
+          </a:p>
+        </p:txBody>
+      </p:sp>
+      <p:sp>
+        <p:nvSpPr>
+          <p:cNvPr id="10" name="Shape 8"/>
           <p:cNvSpPr/>
           <p:nvPr/>
         </p:nvSpPr>
@@ -11458,14 +12131,14 @@
       </p:sp>
       <p:sp>
         <p:nvSpPr>
-          <p:cNvPr id="10" name="Text 8"/>
+          <p:cNvPr id="11" name="Text 9"/>
           <p:cNvSpPr/>
           <p:nvPr/>
         </p:nvSpPr>
         <p:spPr>
           <a:xfrm>
             <a:off x="8074152" y="1563624"/>
-            <a:ext cx="2825496" cy="201168"/>
+            <a:ext cx="2825496" cy="256032"/>
           </a:xfrm>
           <a:prstGeom prst="rect">
             <a:avLst/>
@@ -11481,7 +12154,7 @@
               <a:buNone/>
             </a:pPr>
             <a:r>
-              <a:rPr lang="en-US" sz="950" b="1" dirty="0">
+              <a:rPr lang="en-US" sz="1300" b="1" dirty="0">
                 <a:solidFill>
                   <a:srgbClr val="0068B7"/>
                 </a:solidFill>
@@ -11491,20 +12164,20 @@
               </a:rPr>
               <a:t>Key idea</a:t>
             </a:r>
-            <a:endParaRPr lang="en-US" sz="950" dirty="0"/>
-          </a:p>
-        </p:txBody>
-      </p:sp>
-      <p:sp>
-        <p:nvSpPr>
-          <p:cNvPr id="11" name="Text 9"/>
-          <p:cNvSpPr/>
-          <p:nvPr/>
-        </p:nvSpPr>
-        <p:spPr>
-          <a:xfrm>
-            <a:off x="8074152" y="1856232"/>
-            <a:ext cx="2825496" cy="1261872"/>
+            <a:endParaRPr lang="en-US" sz="1300" dirty="0"/>
+          </a:p>
+        </p:txBody>
+      </p:sp>
+      <p:sp>
+        <p:nvSpPr>
+          <p:cNvPr id="12" name="Text 10"/>
+          <p:cNvSpPr/>
+          <p:nvPr/>
+        </p:nvSpPr>
+        <p:spPr>
+          <a:xfrm>
+            <a:off x="8074152" y="1920240"/>
+            <a:ext cx="2825496" cy="1188720"/>
           </a:xfrm>
           <a:prstGeom prst="rect">
             <a:avLst/>
@@ -11522,7 +12195,7 @@
               <a:buNone/>
             </a:pPr>
             <a:r>
-              <a:rPr lang="en-US" sz="1250" dirty="0">
+              <a:rPr lang="en-US" sz="1550" dirty="0">
                 <a:solidFill>
                   <a:srgbClr val="17364A"/>
                 </a:solidFill>
@@ -11532,13 +12205,13 @@
               </a:rPr>
               <a:t>ONC USCDI, health IT, interoperability, and information blocking resources.:.</a:t>
             </a:r>
-            <a:endParaRPr lang="en-US" sz="1250" dirty="0"/>
-          </a:p>
-        </p:txBody>
-      </p:sp>
-      <p:sp>
-        <p:nvSpPr>
-          <p:cNvPr id="12" name="Shape 10"/>
+            <a:endParaRPr lang="en-US" sz="1550" dirty="0"/>
+          </a:p>
+        </p:txBody>
+      </p:sp>
+      <p:sp>
+        <p:nvSpPr>
+          <p:cNvPr id="13" name="Shape 11"/>
           <p:cNvSpPr/>
           <p:nvPr/>
         </p:nvSpPr>
@@ -11565,14 +12238,14 @@
       </p:sp>
       <p:sp>
         <p:nvSpPr>
-          <p:cNvPr id="13" name="Text 11"/>
+          <p:cNvPr id="14" name="Text 12"/>
           <p:cNvSpPr/>
           <p:nvPr/>
         </p:nvSpPr>
         <p:spPr>
           <a:xfrm>
             <a:off x="8074152" y="3666744"/>
-            <a:ext cx="2825496" cy="201168"/>
+            <a:ext cx="2825496" cy="256032"/>
           </a:xfrm>
           <a:prstGeom prst="rect">
             <a:avLst/>
@@ -11588,7 +12261,7 @@
               <a:buNone/>
             </a:pPr>
             <a:r>
-              <a:rPr lang="en-US" sz="950" b="1" dirty="0">
+              <a:rPr lang="en-US" sz="1300" b="1" dirty="0">
                 <a:solidFill>
                   <a:srgbClr val="0068B7"/>
                 </a:solidFill>
@@ -11598,20 +12271,20 @@
               </a:rPr>
               <a:t>Use this for</a:t>
             </a:r>
-            <a:endParaRPr lang="en-US" sz="950" dirty="0"/>
-          </a:p>
-        </p:txBody>
-      </p:sp>
-      <p:sp>
-        <p:nvSpPr>
-          <p:cNvPr id="14" name="Text 12"/>
-          <p:cNvSpPr/>
-          <p:nvPr/>
-        </p:nvSpPr>
-        <p:spPr>
-          <a:xfrm>
-            <a:off x="8074152" y="3959352"/>
-            <a:ext cx="2825496" cy="1170432"/>
+            <a:endParaRPr lang="en-US" sz="1300" dirty="0"/>
+          </a:p>
+        </p:txBody>
+      </p:sp>
+      <p:sp>
+        <p:nvSpPr>
+          <p:cNvPr id="15" name="Text 13"/>
+          <p:cNvSpPr/>
+          <p:nvPr/>
+        </p:nvSpPr>
+        <p:spPr>
+          <a:xfrm>
+            <a:off x="8074152" y="4023360"/>
+            <a:ext cx="2825496" cy="1097280"/>
           </a:xfrm>
           <a:prstGeom prst="rect">
             <a:avLst/>
@@ -11629,7 +12302,7 @@
               <a:buNone/>
             </a:pPr>
             <a:r>
-              <a:rPr lang="en-US" sz="1250" dirty="0">
+              <a:rPr lang="en-US" sz="1550" dirty="0">
                 <a:solidFill>
                   <a:srgbClr val="17364A"/>
                 </a:solidFill>
@@ -11639,7 +12312,7 @@
               </a:rPr>
               <a:t>Connect the concept to public health decisions, safeguards, documentation, or implementation work.</a:t>
             </a:r>
-            <a:endParaRPr lang="en-US" sz="1250" dirty="0"/>
+            <a:endParaRPr lang="en-US" sz="1550" dirty="0"/>
           </a:p>
         </p:txBody>
       </p:sp>
@@ -11836,7 +12509,7 @@
                 <a:ea typeface="Aptos" pitchFamily="34" charset="-122"/>
                 <a:cs typeface="Aptos" pitchFamily="34" charset="-120"/>
               </a:rPr>
-              <a:t>© Paula Soper</a:t>
+              <a:t>Â© Paula Soper</a:t>
             </a:r>
             <a:endParaRPr lang="en-US" sz="800" dirty="0"/>
           </a:p>
@@ -11850,8 +12523,47 @@
         </p:nvSpPr>
         <p:spPr>
           <a:xfrm>
+            <a:off x="11137392" y="6510528"/>
+            <a:ext cx="411480" cy="201168"/>
+          </a:xfrm>
+          <a:prstGeom prst="rect">
+            <a:avLst/>
+          </a:prstGeom>
+          <a:noFill/>
+          <a:ln/>
+        </p:spPr>
+        <p:txBody>
+          <a:bodyPr wrap="square" lIns="0" tIns="0" rIns="0" bIns="0" rtlCol="0" anchor="ctr"/>
+          <a:lstStyle/>
+          <a:p>
+            <a:pPr algn="r" indent="0" marL="0">
+              <a:buNone/>
+            </a:pPr>
+            <a:r>
+              <a:rPr lang="en-US" sz="900" dirty="0">
+                <a:solidFill>
+                  <a:srgbClr val="5F7181"/>
+                </a:solidFill>
+                <a:latin typeface="Aptos" pitchFamily="34" charset="0"/>
+                <a:ea typeface="Aptos" pitchFamily="34" charset="-122"/>
+                <a:cs typeface="Aptos" pitchFamily="34" charset="-120"/>
+              </a:rPr>
+              <a:t>3</a:t>
+            </a:r>
+            <a:endParaRPr lang="en-US" sz="900" dirty="0"/>
+          </a:p>
+        </p:txBody>
+      </p:sp>
+      <p:sp>
+        <p:nvSpPr>
+          <p:cNvPr id="8" name="Text 6"/>
+          <p:cNvSpPr/>
+          <p:nvPr/>
+        </p:nvSpPr>
+        <p:spPr>
+          <a:xfrm>
             <a:off x="640080" y="658368"/>
-            <a:ext cx="10881360" cy="566928"/>
+            <a:ext cx="10881360" cy="713232"/>
           </a:xfrm>
           <a:prstGeom prst="rect">
             <a:avLst/>
@@ -11869,7 +12581,7 @@
               <a:buNone/>
             </a:pPr>
             <a:r>
-              <a:rPr lang="en-US" sz="2700" b="1" dirty="0">
+              <a:rPr lang="en-US" sz="3400" b="1" dirty="0">
                 <a:solidFill>
                   <a:srgbClr val="003A63"/>
                 </a:solidFill>
@@ -11879,20 +12591,20 @@
               </a:rPr>
               <a:t>How this module connects to the playbook</a:t>
             </a:r>
-            <a:endParaRPr lang="en-US" sz="2700" dirty="0"/>
-          </a:p>
-        </p:txBody>
-      </p:sp>
-      <p:sp>
-        <p:nvSpPr>
-          <p:cNvPr id="8" name="Text 6"/>
-          <p:cNvSpPr/>
-          <p:nvPr/>
-        </p:nvSpPr>
-        <p:spPr>
-          <a:xfrm>
-            <a:off x="868680" y="1417320"/>
-            <a:ext cx="6903720" cy="4480560"/>
+            <a:endParaRPr lang="en-US" sz="3400" dirty="0"/>
+          </a:p>
+        </p:txBody>
+      </p:sp>
+      <p:sp>
+        <p:nvSpPr>
+          <p:cNvPr id="9" name="Text 7"/>
+          <p:cNvSpPr/>
+          <p:nvPr/>
+        </p:nvSpPr>
+        <p:spPr>
+          <a:xfrm>
+            <a:off x="868680" y="1508760"/>
+            <a:ext cx="6812280" cy="3977640"/>
           </a:xfrm>
           <a:prstGeom prst="rect">
             <a:avLst/>
@@ -11907,7 +12619,7 @@
           <a:lstStyle/>
           <a:p>
             <a:r>
-              <a:rPr lang="en-US" sz="1540" dirty="0">
+              <a:rPr lang="en-US" sz="1900" dirty="0">
                 <a:solidFill>
                   <a:srgbClr val="17364A"/>
                 </a:solidFill>
@@ -11915,13 +12627,13 @@
                 <a:ea typeface="Aptos" pitchFamily="34" charset="-122"/>
                 <a:cs typeface="Aptos" pitchFamily="34" charset="-120"/>
               </a:rPr>
-              <a:t>Play 11: Build and Deploy AI Solutions - This lesson informs Play 11 by helping learners connect the lesson topic to build and deploy.</a:t>
-            </a:r>
-            <a:endParaRPr lang="en-US" sz="1540" dirty="0"/>
-          </a:p>
-          <a:p>
-            <a:r>
-              <a:rPr lang="en-US" sz="1540" dirty="0">
+              <a:t>Play 11: Build and Deploy AI Solutions - This lesson informs Play 11 by helping learners connect the lesson.</a:t>
+            </a:r>
+            <a:endParaRPr lang="en-US" sz="1900" dirty="0"/>
+          </a:p>
+          <a:p>
+            <a:r>
+              <a:rPr lang="en-US" sz="1900" dirty="0">
                 <a:solidFill>
                   <a:srgbClr val="17364A"/>
                 </a:solidFill>
@@ -11929,13 +12641,13 @@
                 <a:ea typeface="Aptos" pitchFamily="34" charset="-122"/>
                 <a:cs typeface="Aptos" pitchFamily="34" charset="-120"/>
               </a:rPr>
-              <a:t>Play 2: Readiness Assessment - This lesson informs Play 2 by helping learners connect the lesson topic to readiness assessment work.</a:t>
-            </a:r>
-            <a:endParaRPr lang="en-US" sz="1540" dirty="0"/>
-          </a:p>
-          <a:p>
-            <a:r>
-              <a:rPr lang="en-US" sz="1540" dirty="0">
+              <a:t>Play 2: Readiness Assessment - This lesson informs Play 2 by helping learners connect the lesson topic to.</a:t>
+            </a:r>
+            <a:endParaRPr lang="en-US" sz="1900" dirty="0"/>
+          </a:p>
+          <a:p>
+            <a:r>
+              <a:rPr lang="en-US" sz="1900" dirty="0">
                 <a:solidFill>
                   <a:srgbClr val="17364A"/>
                 </a:solidFill>
@@ -11943,13 +12655,13 @@
                 <a:ea typeface="Aptos" pitchFamily="34" charset="-122"/>
                 <a:cs typeface="Aptos" pitchFamily="34" charset="-120"/>
               </a:rPr>
-              <a:t>Play 3: Establish AI Governance - This lesson informs Play 3 by helping learners connect the lesson topic to establish ai governance.</a:t>
-            </a:r>
-            <a:endParaRPr lang="en-US" sz="1540" dirty="0"/>
-          </a:p>
-          <a:p>
-            <a:r>
-              <a:rPr lang="en-US" sz="1540" dirty="0">
+              <a:t>Play 3: Establish AI Governance - This lesson informs Play 3 by helping learners connect the lesson topic to.</a:t>
+            </a:r>
+            <a:endParaRPr lang="en-US" sz="1900" dirty="0"/>
+          </a:p>
+          <a:p>
+            <a:r>
+              <a:rPr lang="en-US" sz="1900" dirty="0">
                 <a:solidFill>
                   <a:srgbClr val="17364A"/>
                 </a:solidFill>
@@ -11957,15 +12669,15 @@
                 <a:ea typeface="Aptos" pitchFamily="34" charset="-122"/>
                 <a:cs typeface="Aptos" pitchFamily="34" charset="-120"/>
               </a:rPr>
-              <a:t>Play 1: Vision &amp; Guardrails - This lesson informs Play 1 by helping learners connect the lesson topic to vision &amp; guardrails work in.</a:t>
-            </a:r>
-            <a:endParaRPr lang="en-US" sz="1540" dirty="0"/>
-          </a:p>
-        </p:txBody>
-      </p:sp>
-      <p:sp>
-        <p:nvSpPr>
-          <p:cNvPr id="9" name="Shape 7"/>
+              <a:t>Play 1: Vision &amp; Guardrails - This lesson informs Play 1 by helping learners connect the lesson topic to.</a:t>
+            </a:r>
+            <a:endParaRPr lang="en-US" sz="1900" dirty="0"/>
+          </a:p>
+        </p:txBody>
+      </p:sp>
+      <p:sp>
+        <p:nvSpPr>
+          <p:cNvPr id="10" name="Shape 8"/>
           <p:cNvSpPr/>
           <p:nvPr/>
         </p:nvSpPr>
@@ -11992,14 +12704,14 @@
       </p:sp>
       <p:sp>
         <p:nvSpPr>
-          <p:cNvPr id="10" name="Text 8"/>
+          <p:cNvPr id="11" name="Text 9"/>
           <p:cNvSpPr/>
           <p:nvPr/>
         </p:nvSpPr>
         <p:spPr>
           <a:xfrm>
             <a:off x="8211312" y="1563624"/>
-            <a:ext cx="2734056" cy="201168"/>
+            <a:ext cx="2734056" cy="256032"/>
           </a:xfrm>
           <a:prstGeom prst="rect">
             <a:avLst/>
@@ -12015,7 +12727,7 @@
               <a:buNone/>
             </a:pPr>
             <a:r>
-              <a:rPr lang="en-US" sz="950" b="1" dirty="0">
+              <a:rPr lang="en-US" sz="1300" b="1" dirty="0">
                 <a:solidFill>
                   <a:srgbClr val="0068B7"/>
                 </a:solidFill>
@@ -12025,20 +12737,20 @@
               </a:rPr>
               <a:t>Apply the lesson</a:t>
             </a:r>
-            <a:endParaRPr lang="en-US" sz="950" dirty="0"/>
-          </a:p>
-        </p:txBody>
-      </p:sp>
-      <p:sp>
-        <p:nvSpPr>
-          <p:cNvPr id="11" name="Text 9"/>
-          <p:cNvSpPr/>
-          <p:nvPr/>
-        </p:nvSpPr>
-        <p:spPr>
-          <a:xfrm>
-            <a:off x="8211312" y="1856232"/>
-            <a:ext cx="2734056" cy="1536192"/>
+            <a:endParaRPr lang="en-US" sz="1300" dirty="0"/>
+          </a:p>
+        </p:txBody>
+      </p:sp>
+      <p:sp>
+        <p:nvSpPr>
+          <p:cNvPr id="12" name="Text 10"/>
+          <p:cNvSpPr/>
+          <p:nvPr/>
+        </p:nvSpPr>
+        <p:spPr>
+          <a:xfrm>
+            <a:off x="8211312" y="1920240"/>
+            <a:ext cx="2734056" cy="1463040"/>
           </a:xfrm>
           <a:prstGeom prst="rect">
             <a:avLst/>
@@ -12056,7 +12768,7 @@
               <a:buNone/>
             </a:pPr>
             <a:r>
-              <a:rPr lang="en-US" sz="1250" dirty="0">
+              <a:rPr lang="en-US" sz="1550" dirty="0">
                 <a:solidFill>
                   <a:srgbClr val="17364A"/>
                 </a:solidFill>
@@ -12066,32 +12778,32 @@
               </a:rPr>
               <a:t>Use the related plays to identify decisions, participants, timing, approvals, and documentation needed for responsible implementation.</a:t>
             </a:r>
-            <a:endParaRPr lang="en-US" sz="1250" dirty="0"/>
-          </a:p>
-        </p:txBody>
-      </p:sp>
-      <p:sp>
-        <p:nvSpPr>
-          <p:cNvPr id="12" name="Shape 10"/>
-          <p:cNvSpPr/>
-          <p:nvPr/>
-        </p:nvSpPr>
-        <p:spPr>
-          <a:xfrm>
-            <a:off x="8046720" y="3794760"/>
-            <a:ext cx="3063240" cy="1508760"/>
+            <a:endParaRPr lang="en-US" sz="1550" dirty="0"/>
+          </a:p>
+        </p:txBody>
+      </p:sp>
+      <p:sp>
+        <p:nvSpPr>
+          <p:cNvPr id="13" name="Shape 11"/>
+          <p:cNvSpPr/>
+          <p:nvPr/>
+        </p:nvSpPr>
+        <p:spPr>
+          <a:xfrm>
+            <a:off x="7818120" y="3977640"/>
+            <a:ext cx="972312" cy="749808"/>
           </a:xfrm>
           <a:prstGeom prst="roundRect">
             <a:avLst>
-              <a:gd name="adj" fmla="val 7273"/>
+              <a:gd name="adj" fmla="val 14634"/>
             </a:avLst>
           </a:prstGeom>
           <a:solidFill>
-            <a:srgbClr val="FFF4D9"/>
+            <a:srgbClr val="0068B7"/>
           </a:solidFill>
           <a:ln w="12700">
             <a:solidFill>
-              <a:srgbClr val="B9D7E6"/>
+              <a:srgbClr val="0068B7"/>
             </a:solidFill>
             <a:prstDash val="solid"/>
           </a:ln>
@@ -12099,81 +12811,256 @@
       </p:sp>
       <p:sp>
         <p:nvSpPr>
-          <p:cNvPr id="13" name="Text 11"/>
-          <p:cNvSpPr/>
-          <p:nvPr/>
-        </p:nvSpPr>
-        <p:spPr>
-          <a:xfrm>
-            <a:off x="8211312" y="3941064"/>
-            <a:ext cx="2734056" cy="201168"/>
-          </a:xfrm>
-          <a:prstGeom prst="rect">
-            <a:avLst/>
-          </a:prstGeom>
-          <a:noFill/>
-          <a:ln/>
-        </p:spPr>
-        <p:txBody>
-          <a:bodyPr wrap="square" lIns="0" tIns="0" rIns="0" bIns="0" rtlCol="0" anchor="ctr"/>
-          <a:lstStyle/>
-          <a:p>
-            <a:pPr indent="0" marL="0">
-              <a:buNone/>
-            </a:pPr>
-            <a:r>
-              <a:rPr lang="en-US" sz="950" b="1" dirty="0">
-                <a:solidFill>
-                  <a:srgbClr val="0068B7"/>
-                </a:solidFill>
-                <a:latin typeface="Aptos" pitchFamily="34" charset="0"/>
-                <a:ea typeface="Aptos" pitchFamily="34" charset="-122"/>
-                <a:cs typeface="Aptos" pitchFamily="34" charset="-120"/>
-              </a:rPr>
-              <a:t>Keep in mind</a:t>
-            </a:r>
-            <a:endParaRPr lang="en-US" sz="950" dirty="0"/>
-          </a:p>
-        </p:txBody>
-      </p:sp>
-      <p:sp>
-        <p:nvSpPr>
           <p:cNvPr id="14" name="Text 12"/>
           <p:cNvSpPr/>
           <p:nvPr/>
         </p:nvSpPr>
         <p:spPr>
           <a:xfrm>
-            <a:off x="8211312" y="4233672"/>
-            <a:ext cx="2734056" cy="941832"/>
-          </a:xfrm>
-          <a:prstGeom prst="rect">
-            <a:avLst/>
-          </a:prstGeom>
-          <a:noFill/>
-          <a:ln/>
-        </p:spPr>
-        <p:txBody>
-          <a:bodyPr wrap="square" lIns="0" tIns="0" rIns="0" bIns="0" rtlCol="0" anchor="t">
+            <a:off x="7891272" y="4169664"/>
+            <a:ext cx="826008" cy="310896"/>
+          </a:xfrm>
+          <a:prstGeom prst="rect">
+            <a:avLst/>
+          </a:prstGeom>
+          <a:noFill/>
+          <a:ln/>
+        </p:spPr>
+        <p:txBody>
+          <a:bodyPr wrap="square" lIns="0" tIns="0" rIns="0" bIns="0" rtlCol="0" anchor="ctr">
             <a:normAutofit/>
           </a:bodyPr>
           <a:lstStyle/>
           <a:p>
-            <a:pPr indent="0" marL="0">
-              <a:buNone/>
-            </a:pPr>
-            <a:r>
-              <a:rPr lang="en-US" sz="1250" dirty="0">
-                <a:solidFill>
-                  <a:srgbClr val="17364A"/>
-                </a:solidFill>
-                <a:latin typeface="Aptos" pitchFamily="34" charset="0"/>
-                <a:ea typeface="Aptos" pitchFamily="34" charset="-122"/>
-                <a:cs typeface="Aptos" pitchFamily="34" charset="-120"/>
-              </a:rPr>
-              <a:t>The playbook connection helps turn training into agency work, not just individual knowledge.</a:t>
-            </a:r>
-            <a:endParaRPr lang="en-US" sz="1250" dirty="0"/>
+            <a:pPr algn="ctr" indent="0" marL="0">
+              <a:buNone/>
+            </a:pPr>
+            <a:r>
+              <a:rPr lang="en-US" sz="1500" b="1" dirty="0">
+                <a:solidFill>
+                  <a:srgbClr val="FFFFFF"/>
+                </a:solidFill>
+                <a:latin typeface="Aptos" pitchFamily="34" charset="0"/>
+                <a:ea typeface="Aptos" pitchFamily="34" charset="-122"/>
+                <a:cs typeface="Aptos" pitchFamily="34" charset="-120"/>
+              </a:rPr>
+              <a:t>Lesson</a:t>
+            </a:r>
+            <a:endParaRPr lang="en-US" sz="1500" dirty="0"/>
+          </a:p>
+        </p:txBody>
+      </p:sp>
+      <p:sp>
+        <p:nvSpPr>
+          <p:cNvPr id="15" name="Text 13"/>
+          <p:cNvSpPr/>
+          <p:nvPr/>
+        </p:nvSpPr>
+        <p:spPr>
+          <a:xfrm>
+            <a:off x="8817864" y="4187952"/>
+            <a:ext cx="201168" cy="256032"/>
+          </a:xfrm>
+          <a:prstGeom prst="rect">
+            <a:avLst/>
+          </a:prstGeom>
+          <a:noFill/>
+          <a:ln/>
+        </p:spPr>
+        <p:txBody>
+          <a:bodyPr wrap="square" lIns="0" tIns="0" rIns="0" bIns="0" rtlCol="0" anchor="ctr"/>
+          <a:lstStyle/>
+          <a:p>
+            <a:pPr algn="ctr" indent="0" marL="0">
+              <a:buNone/>
+            </a:pPr>
+            <a:r>
+              <a:rPr lang="en-US" sz="1800" b="1" dirty="0">
+                <a:solidFill>
+                  <a:srgbClr val="0068B7"/>
+                </a:solidFill>
+                <a:latin typeface="Aptos" pitchFamily="34" charset="0"/>
+                <a:ea typeface="Aptos" pitchFamily="34" charset="-122"/>
+                <a:cs typeface="Aptos" pitchFamily="34" charset="-120"/>
+              </a:rPr>
+              <a:t>â†’</a:t>
+            </a:r>
+            <a:endParaRPr lang="en-US" sz="1800" dirty="0"/>
+          </a:p>
+        </p:txBody>
+      </p:sp>
+      <p:sp>
+        <p:nvSpPr>
+          <p:cNvPr id="16" name="Shape 14"/>
+          <p:cNvSpPr/>
+          <p:nvPr/>
+        </p:nvSpPr>
+        <p:spPr>
+          <a:xfrm>
+            <a:off x="9046464" y="3977640"/>
+            <a:ext cx="972312" cy="749808"/>
+          </a:xfrm>
+          <a:prstGeom prst="roundRect">
+            <a:avLst>
+              <a:gd name="adj" fmla="val 14634"/>
+            </a:avLst>
+          </a:prstGeom>
+          <a:solidFill>
+            <a:srgbClr val="2F8A28"/>
+          </a:solidFill>
+          <a:ln w="12700">
+            <a:solidFill>
+              <a:srgbClr val="2F8A28"/>
+            </a:solidFill>
+            <a:prstDash val="solid"/>
+          </a:ln>
+        </p:spPr>
+      </p:sp>
+      <p:sp>
+        <p:nvSpPr>
+          <p:cNvPr id="17" name="Text 15"/>
+          <p:cNvSpPr/>
+          <p:nvPr/>
+        </p:nvSpPr>
+        <p:spPr>
+          <a:xfrm>
+            <a:off x="9119616" y="4169664"/>
+            <a:ext cx="826008" cy="310896"/>
+          </a:xfrm>
+          <a:prstGeom prst="rect">
+            <a:avLst/>
+          </a:prstGeom>
+          <a:noFill/>
+          <a:ln/>
+        </p:spPr>
+        <p:txBody>
+          <a:bodyPr wrap="square" lIns="0" tIns="0" rIns="0" bIns="0" rtlCol="0" anchor="ctr">
+            <a:normAutofit/>
+          </a:bodyPr>
+          <a:lstStyle/>
+          <a:p>
+            <a:pPr algn="ctr" indent="0" marL="0">
+              <a:buNone/>
+            </a:pPr>
+            <a:r>
+              <a:rPr lang="en-US" sz="1500" b="1" dirty="0">
+                <a:solidFill>
+                  <a:srgbClr val="FFFFFF"/>
+                </a:solidFill>
+                <a:latin typeface="Aptos" pitchFamily="34" charset="0"/>
+                <a:ea typeface="Aptos" pitchFamily="34" charset="-122"/>
+                <a:cs typeface="Aptos" pitchFamily="34" charset="-120"/>
+              </a:rPr>
+              <a:t>Plays</a:t>
+            </a:r>
+            <a:endParaRPr lang="en-US" sz="1500" dirty="0"/>
+          </a:p>
+        </p:txBody>
+      </p:sp>
+      <p:sp>
+        <p:nvSpPr>
+          <p:cNvPr id="18" name="Text 16"/>
+          <p:cNvSpPr/>
+          <p:nvPr/>
+        </p:nvSpPr>
+        <p:spPr>
+          <a:xfrm>
+            <a:off x="10046208" y="4187952"/>
+            <a:ext cx="201168" cy="256032"/>
+          </a:xfrm>
+          <a:prstGeom prst="rect">
+            <a:avLst/>
+          </a:prstGeom>
+          <a:noFill/>
+          <a:ln/>
+        </p:spPr>
+        <p:txBody>
+          <a:bodyPr wrap="square" lIns="0" tIns="0" rIns="0" bIns="0" rtlCol="0" anchor="ctr"/>
+          <a:lstStyle/>
+          <a:p>
+            <a:pPr algn="ctr" indent="0" marL="0">
+              <a:buNone/>
+            </a:pPr>
+            <a:r>
+              <a:rPr lang="en-US" sz="1800" b="1" dirty="0">
+                <a:solidFill>
+                  <a:srgbClr val="0068B7"/>
+                </a:solidFill>
+                <a:latin typeface="Aptos" pitchFamily="34" charset="0"/>
+                <a:ea typeface="Aptos" pitchFamily="34" charset="-122"/>
+                <a:cs typeface="Aptos" pitchFamily="34" charset="-120"/>
+              </a:rPr>
+              <a:t>â†’</a:t>
+            </a:r>
+            <a:endParaRPr lang="en-US" sz="1800" dirty="0"/>
+          </a:p>
+        </p:txBody>
+      </p:sp>
+      <p:sp>
+        <p:nvSpPr>
+          <p:cNvPr id="19" name="Shape 17"/>
+          <p:cNvSpPr/>
+          <p:nvPr/>
+        </p:nvSpPr>
+        <p:spPr>
+          <a:xfrm>
+            <a:off x="10274808" y="3977640"/>
+            <a:ext cx="972312" cy="749808"/>
+          </a:xfrm>
+          <a:prstGeom prst="roundRect">
+            <a:avLst>
+              <a:gd name="adj" fmla="val 14634"/>
+            </a:avLst>
+          </a:prstGeom>
+          <a:solidFill>
+            <a:srgbClr val="6A4CA3"/>
+          </a:solidFill>
+          <a:ln w="12700">
+            <a:solidFill>
+              <a:srgbClr val="6A4CA3"/>
+            </a:solidFill>
+            <a:prstDash val="solid"/>
+          </a:ln>
+        </p:spPr>
+      </p:sp>
+      <p:sp>
+        <p:nvSpPr>
+          <p:cNvPr id="20" name="Text 18"/>
+          <p:cNvSpPr/>
+          <p:nvPr/>
+        </p:nvSpPr>
+        <p:spPr>
+          <a:xfrm>
+            <a:off x="10347960" y="4169664"/>
+            <a:ext cx="826008" cy="310896"/>
+          </a:xfrm>
+          <a:prstGeom prst="rect">
+            <a:avLst/>
+          </a:prstGeom>
+          <a:noFill/>
+          <a:ln/>
+        </p:spPr>
+        <p:txBody>
+          <a:bodyPr wrap="square" lIns="0" tIns="0" rIns="0" bIns="0" rtlCol="0" anchor="ctr">
+            <a:normAutofit/>
+          </a:bodyPr>
+          <a:lstStyle/>
+          <a:p>
+            <a:pPr algn="ctr" indent="0" marL="0">
+              <a:buNone/>
+            </a:pPr>
+            <a:r>
+              <a:rPr lang="en-US" sz="1500" b="1" dirty="0">
+                <a:solidFill>
+                  <a:srgbClr val="FFFFFF"/>
+                </a:solidFill>
+                <a:latin typeface="Aptos" pitchFamily="34" charset="0"/>
+                <a:ea typeface="Aptos" pitchFamily="34" charset="-122"/>
+                <a:cs typeface="Aptos" pitchFamily="34" charset="-120"/>
+              </a:rPr>
+              <a:t>Action</a:t>
+            </a:r>
+            <a:endParaRPr lang="en-US" sz="1500" dirty="0"/>
           </a:p>
         </p:txBody>
       </p:sp>
@@ -12370,7 +13257,7 @@
                 <a:ea typeface="Aptos" pitchFamily="34" charset="-122"/>
                 <a:cs typeface="Aptos" pitchFamily="34" charset="-120"/>
               </a:rPr>
-              <a:t>© Paula Soper</a:t>
+              <a:t>Â© Paula Soper</a:t>
             </a:r>
             <a:endParaRPr lang="en-US" sz="800" dirty="0"/>
           </a:p>
@@ -12384,8 +13271,47 @@
         </p:nvSpPr>
         <p:spPr>
           <a:xfrm>
+            <a:off x="11137392" y="6510528"/>
+            <a:ext cx="411480" cy="201168"/>
+          </a:xfrm>
+          <a:prstGeom prst="rect">
+            <a:avLst/>
+          </a:prstGeom>
+          <a:noFill/>
+          <a:ln/>
+        </p:spPr>
+        <p:txBody>
+          <a:bodyPr wrap="square" lIns="0" tIns="0" rIns="0" bIns="0" rtlCol="0" anchor="ctr"/>
+          <a:lstStyle/>
+          <a:p>
+            <a:pPr algn="r" indent="0" marL="0">
+              <a:buNone/>
+            </a:pPr>
+            <a:r>
+              <a:rPr lang="en-US" sz="900" dirty="0">
+                <a:solidFill>
+                  <a:srgbClr val="5F7181"/>
+                </a:solidFill>
+                <a:latin typeface="Aptos" pitchFamily="34" charset="0"/>
+                <a:ea typeface="Aptos" pitchFamily="34" charset="-122"/>
+                <a:cs typeface="Aptos" pitchFamily="34" charset="-120"/>
+              </a:rPr>
+              <a:t>4</a:t>
+            </a:r>
+            <a:endParaRPr lang="en-US" sz="900" dirty="0"/>
+          </a:p>
+        </p:txBody>
+      </p:sp>
+      <p:sp>
+        <p:nvSpPr>
+          <p:cNvPr id="8" name="Text 6"/>
+          <p:cNvSpPr/>
+          <p:nvPr/>
+        </p:nvSpPr>
+        <p:spPr>
+          <a:xfrm>
             <a:off x="640080" y="658368"/>
-            <a:ext cx="10881360" cy="566928"/>
+            <a:ext cx="10881360" cy="713232"/>
           </a:xfrm>
           <a:prstGeom prst="rect">
             <a:avLst/>
@@ -12403,7 +13329,7 @@
               <a:buNone/>
             </a:pPr>
             <a:r>
-              <a:rPr lang="en-US" sz="2700" b="1" dirty="0">
+              <a:rPr lang="en-US" sz="3400" b="1" dirty="0">
                 <a:solidFill>
                   <a:srgbClr val="003A63"/>
                 </a:solidFill>
@@ -12413,20 +13339,20 @@
               </a:rPr>
               <a:t>Related toolkit resources</a:t>
             </a:r>
-            <a:endParaRPr lang="en-US" sz="2700" dirty="0"/>
-          </a:p>
-        </p:txBody>
-      </p:sp>
-      <p:sp>
-        <p:nvSpPr>
-          <p:cNvPr id="8" name="Text 6"/>
-          <p:cNvSpPr/>
-          <p:nvPr/>
-        </p:nvSpPr>
-        <p:spPr>
-          <a:xfrm>
-            <a:off x="868680" y="1417320"/>
-            <a:ext cx="6903720" cy="4480560"/>
+            <a:endParaRPr lang="en-US" sz="3400" dirty="0"/>
+          </a:p>
+        </p:txBody>
+      </p:sp>
+      <p:sp>
+        <p:nvSpPr>
+          <p:cNvPr id="9" name="Text 7"/>
+          <p:cNvSpPr/>
+          <p:nvPr/>
+        </p:nvSpPr>
+        <p:spPr>
+          <a:xfrm>
+            <a:off x="868680" y="1508760"/>
+            <a:ext cx="6812280" cy="3977640"/>
           </a:xfrm>
           <a:prstGeom prst="rect">
             <a:avLst/>
@@ -12441,7 +13367,7 @@
           <a:lstStyle/>
           <a:p>
             <a:r>
-              <a:rPr lang="en-US" sz="1460" dirty="0">
+              <a:rPr lang="en-US" sz="1850" dirty="0">
                 <a:solidFill>
                   <a:srgbClr val="17364A"/>
                 </a:solidFill>
@@ -12449,13 +13375,13 @@
                 <a:ea typeface="Aptos" pitchFamily="34" charset="-122"/>
                 <a:cs typeface="Aptos" pitchFamily="34" charset="-120"/>
               </a:rPr>
-              <a:t>Tool 4: AI Policy Landscape Scan (Worksheet) - Use AI Policy Landscape Scan to translate this lesson into a documented public health.</a:t>
-            </a:r>
-            <a:endParaRPr lang="en-US" sz="1460" dirty="0"/>
-          </a:p>
-          <a:p>
-            <a:r>
-              <a:rPr lang="en-US" sz="1460" dirty="0">
+              <a:t>Tool 4: AI Policy Landscape Scan (Worksheet) - Use AI Policy Landscape Scan to translate this lesson into a.</a:t>
+            </a:r>
+            <a:endParaRPr lang="en-US" sz="1850" dirty="0"/>
+          </a:p>
+          <a:p>
+            <a:r>
+              <a:rPr lang="en-US" sz="1850" dirty="0">
                 <a:solidFill>
                   <a:srgbClr val="17364A"/>
                 </a:solidFill>
@@ -12463,13 +13389,13 @@
                 <a:ea typeface="Aptos" pitchFamily="34" charset="-122"/>
                 <a:cs typeface="Aptos" pitchFamily="34" charset="-120"/>
               </a:rPr>
-              <a:t>Tool 5: AI Environmental and Resource Impact Review (Checklist) - Use this tool to complete or strengthen the practical exercise for.</a:t>
-            </a:r>
-            <a:endParaRPr lang="en-US" sz="1460" dirty="0"/>
-          </a:p>
-          <a:p>
-            <a:r>
-              <a:rPr lang="en-US" sz="1460" dirty="0">
+              <a:t>Tool 5: AI Environmental and Resource Impact Review (Checklist) - Use this tool to complete or strengthen.</a:t>
+            </a:r>
+            <a:endParaRPr lang="en-US" sz="1850" dirty="0"/>
+          </a:p>
+          <a:p>
+            <a:r>
+              <a:rPr lang="en-US" sz="1850" dirty="0">
                 <a:solidFill>
                   <a:srgbClr val="17364A"/>
                 </a:solidFill>
@@ -12477,13 +13403,13 @@
                 <a:ea typeface="Aptos" pitchFamily="34" charset="-122"/>
                 <a:cs typeface="Aptos" pitchFamily="34" charset="-120"/>
               </a:rPr>
-              <a:t>Tool 6: Human-Centered AI Decision Rule Checklist (Checklist) - Use Human-Centered AI Decision Rule Checklist to translate this.</a:t>
-            </a:r>
-            <a:endParaRPr lang="en-US" sz="1460" dirty="0"/>
-          </a:p>
-          <a:p>
-            <a:r>
-              <a:rPr lang="en-US" sz="1460" dirty="0">
+              <a:t>Tool 6: Human-Centered AI Decision Rule Checklist (Checklist) - Use Human-Centered AI Decision Rule.</a:t>
+            </a:r>
+            <a:endParaRPr lang="en-US" sz="1850" dirty="0"/>
+          </a:p>
+          <a:p>
+            <a:r>
+              <a:rPr lang="en-US" sz="1850" dirty="0">
                 <a:solidFill>
                   <a:srgbClr val="17364A"/>
                 </a:solidFill>
@@ -12491,29 +13417,15 @@
                 <a:ea typeface="Aptos" pitchFamily="34" charset="-122"/>
                 <a:cs typeface="Aptos" pitchFamily="34" charset="-120"/>
               </a:rPr>
-              <a:t>Tool 8: AI Project Charter (Planning) - Use AI Project Charter to translate this lesson into a documented public health AI planning,.</a:t>
-            </a:r>
-            <a:endParaRPr lang="en-US" sz="1460" dirty="0"/>
-          </a:p>
-          <a:p>
-            <a:r>
-              <a:rPr lang="en-US" sz="1460" dirty="0">
-                <a:solidFill>
-                  <a:srgbClr val="17364A"/>
-                </a:solidFill>
-                <a:latin typeface="Aptos" pitchFamily="34" charset="0"/>
-                <a:ea typeface="Aptos" pitchFamily="34" charset="-122"/>
-                <a:cs typeface="Aptos" pitchFamily="34" charset="-120"/>
-              </a:rPr>
-              <a:t>Tool 9: Data Quality Assessment Checklist (Checklist) - Use this tool to complete or strengthen the practical exercise for the module.</a:t>
-            </a:r>
-            <a:endParaRPr lang="en-US" sz="1460" dirty="0"/>
-          </a:p>
-        </p:txBody>
-      </p:sp>
-      <p:sp>
-        <p:nvSpPr>
-          <p:cNvPr id="9" name="Shape 7"/>
+              <a:t>Tool 8: AI Project Charter (Planning) - Use AI Project Charter to translate this lesson into a documented.</a:t>
+            </a:r>
+            <a:endParaRPr lang="en-US" sz="1850" dirty="0"/>
+          </a:p>
+        </p:txBody>
+      </p:sp>
+      <p:sp>
+        <p:nvSpPr>
+          <p:cNvPr id="10" name="Shape 8"/>
           <p:cNvSpPr/>
           <p:nvPr/>
         </p:nvSpPr>
@@ -12540,14 +13452,14 @@
       </p:sp>
       <p:sp>
         <p:nvSpPr>
-          <p:cNvPr id="10" name="Text 8"/>
+          <p:cNvPr id="11" name="Text 9"/>
           <p:cNvSpPr/>
           <p:nvPr/>
         </p:nvSpPr>
         <p:spPr>
           <a:xfrm>
             <a:off x="8211312" y="1563624"/>
-            <a:ext cx="2734056" cy="201168"/>
+            <a:ext cx="2734056" cy="256032"/>
           </a:xfrm>
           <a:prstGeom prst="rect">
             <a:avLst/>
@@ -12563,7 +13475,7 @@
               <a:buNone/>
             </a:pPr>
             <a:r>
-              <a:rPr lang="en-US" sz="950" b="1" dirty="0">
+              <a:rPr lang="en-US" sz="1300" b="1" dirty="0">
                 <a:solidFill>
                   <a:srgbClr val="0068B7"/>
                 </a:solidFill>
@@ -12573,20 +13485,20 @@
               </a:rPr>
               <a:t>Use the tools</a:t>
             </a:r>
-            <a:endParaRPr lang="en-US" sz="950" dirty="0"/>
-          </a:p>
-        </p:txBody>
-      </p:sp>
-      <p:sp>
-        <p:nvSpPr>
-          <p:cNvPr id="11" name="Text 9"/>
-          <p:cNvSpPr/>
-          <p:nvPr/>
-        </p:nvSpPr>
-        <p:spPr>
-          <a:xfrm>
-            <a:off x="8211312" y="1856232"/>
-            <a:ext cx="2734056" cy="1536192"/>
+            <a:endParaRPr lang="en-US" sz="1300" dirty="0"/>
+          </a:p>
+        </p:txBody>
+      </p:sp>
+      <p:sp>
+        <p:nvSpPr>
+          <p:cNvPr id="12" name="Text 10"/>
+          <p:cNvSpPr/>
+          <p:nvPr/>
+        </p:nvSpPr>
+        <p:spPr>
+          <a:xfrm>
+            <a:off x="8211312" y="1920240"/>
+            <a:ext cx="2734056" cy="1463040"/>
           </a:xfrm>
           <a:prstGeom prst="rect">
             <a:avLst/>
@@ -12604,7 +13516,7 @@
               <a:buNone/>
             </a:pPr>
             <a:r>
-              <a:rPr lang="en-US" sz="1250" dirty="0">
+              <a:rPr lang="en-US" sz="1550" dirty="0">
                 <a:solidFill>
                   <a:srgbClr val="17364A"/>
                 </a:solidFill>
@@ -12614,32 +13526,32 @@
               </a:rPr>
               <a:t>Use linked tools when your department needs a structured worksheet, template, checklist, review process, or documentation artifact.</a:t>
             </a:r>
-            <a:endParaRPr lang="en-US" sz="1250" dirty="0"/>
-          </a:p>
-        </p:txBody>
-      </p:sp>
-      <p:sp>
-        <p:nvSpPr>
-          <p:cNvPr id="12" name="Shape 10"/>
-          <p:cNvSpPr/>
-          <p:nvPr/>
-        </p:nvSpPr>
-        <p:spPr>
-          <a:xfrm>
-            <a:off x="8046720" y="3794760"/>
-            <a:ext cx="3063240" cy="1508760"/>
+            <a:endParaRPr lang="en-US" sz="1550" dirty="0"/>
+          </a:p>
+        </p:txBody>
+      </p:sp>
+      <p:sp>
+        <p:nvSpPr>
+          <p:cNvPr id="13" name="Shape 11"/>
+          <p:cNvSpPr/>
+          <p:nvPr/>
+        </p:nvSpPr>
+        <p:spPr>
+          <a:xfrm>
+            <a:off x="7818120" y="3977640"/>
+            <a:ext cx="972312" cy="749808"/>
           </a:xfrm>
           <a:prstGeom prst="roundRect">
             <a:avLst>
-              <a:gd name="adj" fmla="val 7273"/>
+              <a:gd name="adj" fmla="val 14634"/>
             </a:avLst>
           </a:prstGeom>
           <a:solidFill>
-            <a:srgbClr val="EEF8ED"/>
+            <a:srgbClr val="0068B7"/>
           </a:solidFill>
           <a:ln w="12700">
             <a:solidFill>
-              <a:srgbClr val="B9D7E6"/>
+              <a:srgbClr val="0068B7"/>
             </a:solidFill>
             <a:prstDash val="solid"/>
           </a:ln>
@@ -12647,81 +13559,256 @@
       </p:sp>
       <p:sp>
         <p:nvSpPr>
-          <p:cNvPr id="13" name="Text 11"/>
-          <p:cNvSpPr/>
-          <p:nvPr/>
-        </p:nvSpPr>
-        <p:spPr>
-          <a:xfrm>
-            <a:off x="8211312" y="3941064"/>
-            <a:ext cx="2734056" cy="201168"/>
-          </a:xfrm>
-          <a:prstGeom prst="rect">
-            <a:avLst/>
-          </a:prstGeom>
-          <a:noFill/>
-          <a:ln/>
-        </p:spPr>
-        <p:txBody>
-          <a:bodyPr wrap="square" lIns="0" tIns="0" rIns="0" bIns="0" rtlCol="0" anchor="ctr"/>
-          <a:lstStyle/>
-          <a:p>
-            <a:pPr indent="0" marL="0">
-              <a:buNone/>
-            </a:pPr>
-            <a:r>
-              <a:rPr lang="en-US" sz="950" b="1" dirty="0">
-                <a:solidFill>
-                  <a:srgbClr val="0068B7"/>
-                </a:solidFill>
-                <a:latin typeface="Aptos" pitchFamily="34" charset="0"/>
-                <a:ea typeface="Aptos" pitchFamily="34" charset="-122"/>
-                <a:cs typeface="Aptos" pitchFamily="34" charset="-120"/>
-              </a:rPr>
-              <a:t>Avoid duplication</a:t>
-            </a:r>
-            <a:endParaRPr lang="en-US" sz="950" dirty="0"/>
-          </a:p>
-        </p:txBody>
-      </p:sp>
-      <p:sp>
-        <p:nvSpPr>
           <p:cNvPr id="14" name="Text 12"/>
           <p:cNvSpPr/>
           <p:nvPr/>
         </p:nvSpPr>
         <p:spPr>
           <a:xfrm>
-            <a:off x="8211312" y="4233672"/>
-            <a:ext cx="2734056" cy="941832"/>
-          </a:xfrm>
-          <a:prstGeom prst="rect">
-            <a:avLst/>
-          </a:prstGeom>
-          <a:noFill/>
-          <a:ln/>
-        </p:spPr>
-        <p:txBody>
-          <a:bodyPr wrap="square" lIns="0" tIns="0" rIns="0" bIns="0" rtlCol="0" anchor="t">
+            <a:off x="7891272" y="4169664"/>
+            <a:ext cx="826008" cy="310896"/>
+          </a:xfrm>
+          <a:prstGeom prst="rect">
+            <a:avLst/>
+          </a:prstGeom>
+          <a:noFill/>
+          <a:ln/>
+        </p:spPr>
+        <p:txBody>
+          <a:bodyPr wrap="square" lIns="0" tIns="0" rIns="0" bIns="0" rtlCol="0" anchor="ctr">
             <a:normAutofit/>
           </a:bodyPr>
           <a:lstStyle/>
           <a:p>
-            <a:pPr indent="0" marL="0">
-              <a:buNone/>
-            </a:pPr>
-            <a:r>
-              <a:rPr lang="en-US" sz="1250" dirty="0">
-                <a:solidFill>
-                  <a:srgbClr val="17364A"/>
-                </a:solidFill>
-                <a:latin typeface="Aptos" pitchFamily="34" charset="0"/>
-                <a:ea typeface="Aptos" pitchFamily="34" charset="-122"/>
-                <a:cs typeface="Aptos" pitchFamily="34" charset="-120"/>
-              </a:rPr>
-              <a:t>If your department already has a strong equivalent tool, adapt or use the existing process instead of recreating it.</a:t>
-            </a:r>
-            <a:endParaRPr lang="en-US" sz="1250" dirty="0"/>
+            <a:pPr algn="ctr" indent="0" marL="0">
+              <a:buNone/>
+            </a:pPr>
+            <a:r>
+              <a:rPr lang="en-US" sz="1500" b="1" dirty="0">
+                <a:solidFill>
+                  <a:srgbClr val="FFFFFF"/>
+                </a:solidFill>
+                <a:latin typeface="Aptos" pitchFamily="34" charset="0"/>
+                <a:ea typeface="Aptos" pitchFamily="34" charset="-122"/>
+                <a:cs typeface="Aptos" pitchFamily="34" charset="-120"/>
+              </a:rPr>
+              <a:t>Concept</a:t>
+            </a:r>
+            <a:endParaRPr lang="en-US" sz="1500" dirty="0"/>
+          </a:p>
+        </p:txBody>
+      </p:sp>
+      <p:sp>
+        <p:nvSpPr>
+          <p:cNvPr id="15" name="Text 13"/>
+          <p:cNvSpPr/>
+          <p:nvPr/>
+        </p:nvSpPr>
+        <p:spPr>
+          <a:xfrm>
+            <a:off x="8817864" y="4187952"/>
+            <a:ext cx="201168" cy="256032"/>
+          </a:xfrm>
+          <a:prstGeom prst="rect">
+            <a:avLst/>
+          </a:prstGeom>
+          <a:noFill/>
+          <a:ln/>
+        </p:spPr>
+        <p:txBody>
+          <a:bodyPr wrap="square" lIns="0" tIns="0" rIns="0" bIns="0" rtlCol="0" anchor="ctr"/>
+          <a:lstStyle/>
+          <a:p>
+            <a:pPr algn="ctr" indent="0" marL="0">
+              <a:buNone/>
+            </a:pPr>
+            <a:r>
+              <a:rPr lang="en-US" sz="1800" b="1" dirty="0">
+                <a:solidFill>
+                  <a:srgbClr val="0068B7"/>
+                </a:solidFill>
+                <a:latin typeface="Aptos" pitchFamily="34" charset="0"/>
+                <a:ea typeface="Aptos" pitchFamily="34" charset="-122"/>
+                <a:cs typeface="Aptos" pitchFamily="34" charset="-120"/>
+              </a:rPr>
+              <a:t>â†’</a:t>
+            </a:r>
+            <a:endParaRPr lang="en-US" sz="1800" dirty="0"/>
+          </a:p>
+        </p:txBody>
+      </p:sp>
+      <p:sp>
+        <p:nvSpPr>
+          <p:cNvPr id="16" name="Shape 14"/>
+          <p:cNvSpPr/>
+          <p:nvPr/>
+        </p:nvSpPr>
+        <p:spPr>
+          <a:xfrm>
+            <a:off x="9046464" y="3977640"/>
+            <a:ext cx="972312" cy="749808"/>
+          </a:xfrm>
+          <a:prstGeom prst="roundRect">
+            <a:avLst>
+              <a:gd name="adj" fmla="val 14634"/>
+            </a:avLst>
+          </a:prstGeom>
+          <a:solidFill>
+            <a:srgbClr val="2F8A28"/>
+          </a:solidFill>
+          <a:ln w="12700">
+            <a:solidFill>
+              <a:srgbClr val="2F8A28"/>
+            </a:solidFill>
+            <a:prstDash val="solid"/>
+          </a:ln>
+        </p:spPr>
+      </p:sp>
+      <p:sp>
+        <p:nvSpPr>
+          <p:cNvPr id="17" name="Text 15"/>
+          <p:cNvSpPr/>
+          <p:nvPr/>
+        </p:nvSpPr>
+        <p:spPr>
+          <a:xfrm>
+            <a:off x="9119616" y="4169664"/>
+            <a:ext cx="826008" cy="310896"/>
+          </a:xfrm>
+          <a:prstGeom prst="rect">
+            <a:avLst/>
+          </a:prstGeom>
+          <a:noFill/>
+          <a:ln/>
+        </p:spPr>
+        <p:txBody>
+          <a:bodyPr wrap="square" lIns="0" tIns="0" rIns="0" bIns="0" rtlCol="0" anchor="ctr">
+            <a:normAutofit/>
+          </a:bodyPr>
+          <a:lstStyle/>
+          <a:p>
+            <a:pPr algn="ctr" indent="0" marL="0">
+              <a:buNone/>
+            </a:pPr>
+            <a:r>
+              <a:rPr lang="en-US" sz="1500" b="1" dirty="0">
+                <a:solidFill>
+                  <a:srgbClr val="FFFFFF"/>
+                </a:solidFill>
+                <a:latin typeface="Aptos" pitchFamily="34" charset="0"/>
+                <a:ea typeface="Aptos" pitchFamily="34" charset="-122"/>
+                <a:cs typeface="Aptos" pitchFamily="34" charset="-120"/>
+              </a:rPr>
+              <a:t>Tool</a:t>
+            </a:r>
+            <a:endParaRPr lang="en-US" sz="1500" dirty="0"/>
+          </a:p>
+        </p:txBody>
+      </p:sp>
+      <p:sp>
+        <p:nvSpPr>
+          <p:cNvPr id="18" name="Text 16"/>
+          <p:cNvSpPr/>
+          <p:nvPr/>
+        </p:nvSpPr>
+        <p:spPr>
+          <a:xfrm>
+            <a:off x="10046208" y="4187952"/>
+            <a:ext cx="201168" cy="256032"/>
+          </a:xfrm>
+          <a:prstGeom prst="rect">
+            <a:avLst/>
+          </a:prstGeom>
+          <a:noFill/>
+          <a:ln/>
+        </p:spPr>
+        <p:txBody>
+          <a:bodyPr wrap="square" lIns="0" tIns="0" rIns="0" bIns="0" rtlCol="0" anchor="ctr"/>
+          <a:lstStyle/>
+          <a:p>
+            <a:pPr algn="ctr" indent="0" marL="0">
+              <a:buNone/>
+            </a:pPr>
+            <a:r>
+              <a:rPr lang="en-US" sz="1800" b="1" dirty="0">
+                <a:solidFill>
+                  <a:srgbClr val="0068B7"/>
+                </a:solidFill>
+                <a:latin typeface="Aptos" pitchFamily="34" charset="0"/>
+                <a:ea typeface="Aptos" pitchFamily="34" charset="-122"/>
+                <a:cs typeface="Aptos" pitchFamily="34" charset="-120"/>
+              </a:rPr>
+              <a:t>â†’</a:t>
+            </a:r>
+            <a:endParaRPr lang="en-US" sz="1800" dirty="0"/>
+          </a:p>
+        </p:txBody>
+      </p:sp>
+      <p:sp>
+        <p:nvSpPr>
+          <p:cNvPr id="19" name="Shape 17"/>
+          <p:cNvSpPr/>
+          <p:nvPr/>
+        </p:nvSpPr>
+        <p:spPr>
+          <a:xfrm>
+            <a:off x="10274808" y="3977640"/>
+            <a:ext cx="972312" cy="749808"/>
+          </a:xfrm>
+          <a:prstGeom prst="roundRect">
+            <a:avLst>
+              <a:gd name="adj" fmla="val 14634"/>
+            </a:avLst>
+          </a:prstGeom>
+          <a:solidFill>
+            <a:srgbClr val="D69A2D"/>
+          </a:solidFill>
+          <a:ln w="12700">
+            <a:solidFill>
+              <a:srgbClr val="D69A2D"/>
+            </a:solidFill>
+            <a:prstDash val="solid"/>
+          </a:ln>
+        </p:spPr>
+      </p:sp>
+      <p:sp>
+        <p:nvSpPr>
+          <p:cNvPr id="20" name="Text 18"/>
+          <p:cNvSpPr/>
+          <p:nvPr/>
+        </p:nvSpPr>
+        <p:spPr>
+          <a:xfrm>
+            <a:off x="10347960" y="4169664"/>
+            <a:ext cx="826008" cy="310896"/>
+          </a:xfrm>
+          <a:prstGeom prst="rect">
+            <a:avLst/>
+          </a:prstGeom>
+          <a:noFill/>
+          <a:ln/>
+        </p:spPr>
+        <p:txBody>
+          <a:bodyPr wrap="square" lIns="0" tIns="0" rIns="0" bIns="0" rtlCol="0" anchor="ctr">
+            <a:normAutofit/>
+          </a:bodyPr>
+          <a:lstStyle/>
+          <a:p>
+            <a:pPr algn="ctr" indent="0" marL="0">
+              <a:buNone/>
+            </a:pPr>
+            <a:r>
+              <a:rPr lang="en-US" sz="1500" b="1" dirty="0">
+                <a:solidFill>
+                  <a:srgbClr val="FFFFFF"/>
+                </a:solidFill>
+                <a:latin typeface="Aptos" pitchFamily="34" charset="0"/>
+                <a:ea typeface="Aptos" pitchFamily="34" charset="-122"/>
+                <a:cs typeface="Aptos" pitchFamily="34" charset="-120"/>
+              </a:rPr>
+              <a:t>Artifact</a:t>
+            </a:r>
+            <a:endParaRPr lang="en-US" sz="1500" dirty="0"/>
           </a:p>
         </p:txBody>
       </p:sp>
@@ -12918,7 +14005,7 @@
                 <a:ea typeface="Aptos" pitchFamily="34" charset="-122"/>
                 <a:cs typeface="Aptos" pitchFamily="34" charset="-120"/>
               </a:rPr>
-              <a:t>© Paula Soper</a:t>
+              <a:t>Â© Paula Soper</a:t>
             </a:r>
             <a:endParaRPr lang="en-US" sz="800" dirty="0"/>
           </a:p>
@@ -12926,7 +14013,46 @@
       </p:sp>
       <p:sp>
         <p:nvSpPr>
-          <p:cNvPr id="7" name="Shape 5"/>
+          <p:cNvPr id="7" name="Text 5"/>
+          <p:cNvSpPr/>
+          <p:nvPr/>
+        </p:nvSpPr>
+        <p:spPr>
+          <a:xfrm>
+            <a:off x="11137392" y="6510528"/>
+            <a:ext cx="411480" cy="201168"/>
+          </a:xfrm>
+          <a:prstGeom prst="rect">
+            <a:avLst/>
+          </a:prstGeom>
+          <a:noFill/>
+          <a:ln/>
+        </p:spPr>
+        <p:txBody>
+          <a:bodyPr wrap="square" lIns="0" tIns="0" rIns="0" bIns="0" rtlCol="0" anchor="ctr"/>
+          <a:lstStyle/>
+          <a:p>
+            <a:pPr algn="r" indent="0" marL="0">
+              <a:buNone/>
+            </a:pPr>
+            <a:r>
+              <a:rPr lang="en-US" sz="900" dirty="0">
+                <a:solidFill>
+                  <a:srgbClr val="5F7181"/>
+                </a:solidFill>
+                <a:latin typeface="Aptos" pitchFamily="34" charset="0"/>
+                <a:ea typeface="Aptos" pitchFamily="34" charset="-122"/>
+                <a:cs typeface="Aptos" pitchFamily="34" charset="-120"/>
+              </a:rPr>
+              <a:t>5</a:t>
+            </a:r>
+            <a:endParaRPr lang="en-US" sz="900" dirty="0"/>
+          </a:p>
+        </p:txBody>
+      </p:sp>
+      <p:sp>
+        <p:nvSpPr>
+          <p:cNvPr id="8" name="Shape 6"/>
           <p:cNvSpPr/>
           <p:nvPr/>
         </p:nvSpPr>
@@ -12951,7 +14077,7 @@
       </p:sp>
       <p:sp>
         <p:nvSpPr>
-          <p:cNvPr id="8" name="Text 6"/>
+          <p:cNvPr id="9" name="Text 7"/>
           <p:cNvSpPr/>
           <p:nvPr/>
         </p:nvSpPr>
@@ -12990,14 +14116,14 @@
       </p:sp>
       <p:sp>
         <p:nvSpPr>
-          <p:cNvPr id="9" name="Text 7"/>
+          <p:cNvPr id="10" name="Text 8"/>
           <p:cNvSpPr/>
           <p:nvPr/>
         </p:nvSpPr>
         <p:spPr>
           <a:xfrm>
             <a:off x="640080" y="621792"/>
-            <a:ext cx="10881360" cy="566928"/>
+            <a:ext cx="10881360" cy="713232"/>
           </a:xfrm>
           <a:prstGeom prst="rect">
             <a:avLst/>
@@ -13015,7 +14141,7 @@
               <a:buNone/>
             </a:pPr>
             <a:r>
-              <a:rPr lang="en-US" sz="2700" b="1" dirty="0">
+              <a:rPr lang="en-US" sz="3400" b="1" dirty="0">
                 <a:solidFill>
                   <a:srgbClr val="003A63"/>
                 </a:solidFill>
@@ -13025,20 +14151,20 @@
               </a:rPr>
               <a:t>Learning Objectives</a:t>
             </a:r>
-            <a:endParaRPr lang="en-US" sz="2700" dirty="0"/>
-          </a:p>
-        </p:txBody>
-      </p:sp>
-      <p:sp>
-        <p:nvSpPr>
-          <p:cNvPr id="10" name="Text 8"/>
-          <p:cNvSpPr/>
-          <p:nvPr/>
-        </p:nvSpPr>
-        <p:spPr>
-          <a:xfrm>
-            <a:off x="868680" y="1417320"/>
-            <a:ext cx="6675120" cy="4434840"/>
+            <a:endParaRPr lang="en-US" sz="3400" dirty="0"/>
+          </a:p>
+        </p:txBody>
+      </p:sp>
+      <p:sp>
+        <p:nvSpPr>
+          <p:cNvPr id="11" name="Text 9"/>
+          <p:cNvSpPr/>
+          <p:nvPr/>
+        </p:nvSpPr>
+        <p:spPr>
+          <a:xfrm>
+            <a:off x="868680" y="1508760"/>
+            <a:ext cx="6537960" cy="4160520"/>
           </a:xfrm>
           <a:prstGeom prst="rect">
             <a:avLst/>
@@ -13053,7 +14179,7 @@
           <a:lstStyle/>
           <a:p>
             <a:r>
-              <a:rPr lang="en-US" sz="1700" dirty="0">
+              <a:rPr lang="en-US" sz="2100" dirty="0">
                 <a:solidFill>
                   <a:srgbClr val="17364A"/>
                 </a:solidFill>
@@ -13063,11 +14189,11 @@
               </a:rPr>
               <a:t>Explain the purpose of grant and funding management for ai projects in public health AI.</a:t>
             </a:r>
-            <a:endParaRPr lang="en-US" sz="1700" dirty="0"/>
-          </a:p>
-          <a:p>
-            <a:r>
-              <a:rPr lang="en-US" sz="1700" dirty="0">
+            <a:endParaRPr lang="en-US" sz="2100" dirty="0"/>
+          </a:p>
+          <a:p>
+            <a:r>
+              <a:rPr lang="en-US" sz="2100" dirty="0">
                 <a:solidFill>
                   <a:srgbClr val="17364A"/>
                 </a:solidFill>
@@ -13077,11 +14203,11 @@
               </a:rPr>
               <a:t>Identify the roles, decisions, risks, and documentation needed for the topic.</a:t>
             </a:r>
-            <a:endParaRPr lang="en-US" sz="1700" dirty="0"/>
-          </a:p>
-          <a:p>
-            <a:r>
-              <a:rPr lang="en-US" sz="1700" dirty="0">
+            <a:endParaRPr lang="en-US" sz="2100" dirty="0"/>
+          </a:p>
+          <a:p>
+            <a:r>
+              <a:rPr lang="en-US" sz="2100" dirty="0">
                 <a:solidFill>
                   <a:srgbClr val="17364A"/>
                 </a:solidFill>
@@ -13091,27 +14217,13 @@
               </a:rPr>
               <a:t>Apply the topic to a real or realistic public health workflow or decision.</a:t>
             </a:r>
-            <a:endParaRPr lang="en-US" sz="1700" dirty="0"/>
-          </a:p>
-          <a:p>
-            <a:r>
-              <a:rPr lang="en-US" sz="1700" dirty="0">
-                <a:solidFill>
-                  <a:srgbClr val="17364A"/>
-                </a:solidFill>
-                <a:latin typeface="Aptos" pitchFamily="34" charset="0"/>
-                <a:ea typeface="Aptos" pitchFamily="34" charset="-122"/>
-                <a:cs typeface="Aptos" pitchFamily="34" charset="-120"/>
-              </a:rPr>
-              <a:t>Recognize equity, privacy, security, legal, operational, and public trust implications.</a:t>
-            </a:r>
-            <a:endParaRPr lang="en-US" sz="1700" dirty="0"/>
-          </a:p>
-        </p:txBody>
-      </p:sp>
-      <p:sp>
-        <p:nvSpPr>
-          <p:cNvPr id="11" name="Shape 9"/>
+            <a:endParaRPr lang="en-US" sz="2100" dirty="0"/>
+          </a:p>
+        </p:txBody>
+      </p:sp>
+      <p:sp>
+        <p:nvSpPr>
+          <p:cNvPr id="12" name="Shape 10"/>
           <p:cNvSpPr/>
           <p:nvPr/>
         </p:nvSpPr>
@@ -13138,14 +14250,14 @@
       </p:sp>
       <p:sp>
         <p:nvSpPr>
-          <p:cNvPr id="12" name="Text 10"/>
+          <p:cNvPr id="13" name="Text 11"/>
           <p:cNvSpPr/>
           <p:nvPr/>
         </p:nvSpPr>
         <p:spPr>
           <a:xfrm>
             <a:off x="8074152" y="1563624"/>
-            <a:ext cx="2825496" cy="201168"/>
+            <a:ext cx="2825496" cy="256032"/>
           </a:xfrm>
           <a:prstGeom prst="rect">
             <a:avLst/>
@@ -13161,7 +14273,7 @@
               <a:buNone/>
             </a:pPr>
             <a:r>
-              <a:rPr lang="en-US" sz="950" b="1" dirty="0">
+              <a:rPr lang="en-US" sz="1300" b="1" dirty="0">
                 <a:solidFill>
                   <a:srgbClr val="0068B7"/>
                 </a:solidFill>
@@ -13171,20 +14283,20 @@
               </a:rPr>
               <a:t>Key idea</a:t>
             </a:r>
-            <a:endParaRPr lang="en-US" sz="950" dirty="0"/>
-          </a:p>
-        </p:txBody>
-      </p:sp>
-      <p:sp>
-        <p:nvSpPr>
-          <p:cNvPr id="13" name="Text 11"/>
-          <p:cNvSpPr/>
-          <p:nvPr/>
-        </p:nvSpPr>
-        <p:spPr>
-          <a:xfrm>
-            <a:off x="8074152" y="1856232"/>
-            <a:ext cx="2825496" cy="1261872"/>
+            <a:endParaRPr lang="en-US" sz="1300" dirty="0"/>
+          </a:p>
+        </p:txBody>
+      </p:sp>
+      <p:sp>
+        <p:nvSpPr>
+          <p:cNvPr id="14" name="Text 12"/>
+          <p:cNvSpPr/>
+          <p:nvPr/>
+        </p:nvSpPr>
+        <p:spPr>
+          <a:xfrm>
+            <a:off x="8074152" y="1920240"/>
+            <a:ext cx="2825496" cy="1188720"/>
           </a:xfrm>
           <a:prstGeom prst="rect">
             <a:avLst/>
@@ -13202,7 +14314,7 @@
               <a:buNone/>
             </a:pPr>
             <a:r>
-              <a:rPr lang="en-US" sz="1250" dirty="0">
+              <a:rPr lang="en-US" sz="1550" dirty="0">
                 <a:solidFill>
                   <a:srgbClr val="17364A"/>
                 </a:solidFill>
@@ -13212,13 +14324,13 @@
               </a:rPr>
               <a:t>Explain the purpose of grant and funding management for ai projects in public health AI.</a:t>
             </a:r>
-            <a:endParaRPr lang="en-US" sz="1250" dirty="0"/>
-          </a:p>
-        </p:txBody>
-      </p:sp>
-      <p:sp>
-        <p:nvSpPr>
-          <p:cNvPr id="14" name="Shape 12"/>
+            <a:endParaRPr lang="en-US" sz="1550" dirty="0"/>
+          </a:p>
+        </p:txBody>
+      </p:sp>
+      <p:sp>
+        <p:nvSpPr>
+          <p:cNvPr id="15" name="Shape 13"/>
           <p:cNvSpPr/>
           <p:nvPr/>
         </p:nvSpPr>
@@ -13245,14 +14357,14 @@
       </p:sp>
       <p:sp>
         <p:nvSpPr>
-          <p:cNvPr id="15" name="Text 13"/>
+          <p:cNvPr id="16" name="Text 14"/>
           <p:cNvSpPr/>
           <p:nvPr/>
         </p:nvSpPr>
         <p:spPr>
           <a:xfrm>
             <a:off x="8074152" y="3666744"/>
-            <a:ext cx="2825496" cy="201168"/>
+            <a:ext cx="2825496" cy="256032"/>
           </a:xfrm>
           <a:prstGeom prst="rect">
             <a:avLst/>
@@ -13268,7 +14380,7 @@
               <a:buNone/>
             </a:pPr>
             <a:r>
-              <a:rPr lang="en-US" sz="950" b="1" dirty="0">
+              <a:rPr lang="en-US" sz="1300" b="1" dirty="0">
                 <a:solidFill>
                   <a:srgbClr val="0068B7"/>
                 </a:solidFill>
@@ -13278,20 +14390,20 @@
               </a:rPr>
               <a:t>Use this for</a:t>
             </a:r>
-            <a:endParaRPr lang="en-US" sz="950" dirty="0"/>
-          </a:p>
-        </p:txBody>
-      </p:sp>
-      <p:sp>
-        <p:nvSpPr>
-          <p:cNvPr id="16" name="Text 14"/>
-          <p:cNvSpPr/>
-          <p:nvPr/>
-        </p:nvSpPr>
-        <p:spPr>
-          <a:xfrm>
-            <a:off x="8074152" y="3959352"/>
-            <a:ext cx="2825496" cy="1170432"/>
+            <a:endParaRPr lang="en-US" sz="1300" dirty="0"/>
+          </a:p>
+        </p:txBody>
+      </p:sp>
+      <p:sp>
+        <p:nvSpPr>
+          <p:cNvPr id="17" name="Text 15"/>
+          <p:cNvSpPr/>
+          <p:nvPr/>
+        </p:nvSpPr>
+        <p:spPr>
+          <a:xfrm>
+            <a:off x="8074152" y="4023360"/>
+            <a:ext cx="2825496" cy="1097280"/>
           </a:xfrm>
           <a:prstGeom prst="rect">
             <a:avLst/>
@@ -13309,7 +14421,7 @@
               <a:buNone/>
             </a:pPr>
             <a:r>
-              <a:rPr lang="en-US" sz="1250" dirty="0">
+              <a:rPr lang="en-US" sz="1550" dirty="0">
                 <a:solidFill>
                   <a:srgbClr val="17364A"/>
                 </a:solidFill>
@@ -13319,7 +14431,7 @@
               </a:rPr>
               <a:t>Connect the concept to public health decisions, safeguards, documentation, or implementation work.</a:t>
             </a:r>
-            <a:endParaRPr lang="en-US" sz="1250" dirty="0"/>
+            <a:endParaRPr lang="en-US" sz="1550" dirty="0"/>
           </a:p>
         </p:txBody>
       </p:sp>
@@ -13516,7 +14628,7 @@
                 <a:ea typeface="Aptos" pitchFamily="34" charset="-122"/>
                 <a:cs typeface="Aptos" pitchFamily="34" charset="-120"/>
               </a:rPr>
-              <a:t>© Paula Soper</a:t>
+              <a:t>Â© Paula Soper</a:t>
             </a:r>
             <a:endParaRPr lang="en-US" sz="800" dirty="0"/>
           </a:p>
@@ -13524,7 +14636,46 @@
       </p:sp>
       <p:sp>
         <p:nvSpPr>
-          <p:cNvPr id="7" name="Shape 5"/>
+          <p:cNvPr id="7" name="Text 5"/>
+          <p:cNvSpPr/>
+          <p:nvPr/>
+        </p:nvSpPr>
+        <p:spPr>
+          <a:xfrm>
+            <a:off x="11137392" y="6510528"/>
+            <a:ext cx="411480" cy="201168"/>
+          </a:xfrm>
+          <a:prstGeom prst="rect">
+            <a:avLst/>
+          </a:prstGeom>
+          <a:noFill/>
+          <a:ln/>
+        </p:spPr>
+        <p:txBody>
+          <a:bodyPr wrap="square" lIns="0" tIns="0" rIns="0" bIns="0" rtlCol="0" anchor="ctr"/>
+          <a:lstStyle/>
+          <a:p>
+            <a:pPr algn="r" indent="0" marL="0">
+              <a:buNone/>
+            </a:pPr>
+            <a:r>
+              <a:rPr lang="en-US" sz="900" dirty="0">
+                <a:solidFill>
+                  <a:srgbClr val="5F7181"/>
+                </a:solidFill>
+                <a:latin typeface="Aptos" pitchFamily="34" charset="0"/>
+                <a:ea typeface="Aptos" pitchFamily="34" charset="-122"/>
+                <a:cs typeface="Aptos" pitchFamily="34" charset="-120"/>
+              </a:rPr>
+              <a:t>6</a:t>
+            </a:r>
+            <a:endParaRPr lang="en-US" sz="900" dirty="0"/>
+          </a:p>
+        </p:txBody>
+      </p:sp>
+      <p:sp>
+        <p:nvSpPr>
+          <p:cNvPr id="8" name="Shape 6"/>
           <p:cNvSpPr/>
           <p:nvPr/>
         </p:nvSpPr>
@@ -13549,7 +14700,7 @@
       </p:sp>
       <p:sp>
         <p:nvSpPr>
-          <p:cNvPr id="8" name="Text 6"/>
+          <p:cNvPr id="9" name="Text 7"/>
           <p:cNvSpPr/>
           <p:nvPr/>
         </p:nvSpPr>
@@ -13588,14 +14739,14 @@
       </p:sp>
       <p:sp>
         <p:nvSpPr>
-          <p:cNvPr id="9" name="Text 7"/>
+          <p:cNvPr id="10" name="Text 8"/>
           <p:cNvSpPr/>
           <p:nvPr/>
         </p:nvSpPr>
         <p:spPr>
           <a:xfrm>
             <a:off x="640080" y="621792"/>
-            <a:ext cx="10881360" cy="566928"/>
+            <a:ext cx="10881360" cy="713232"/>
           </a:xfrm>
           <a:prstGeom prst="rect">
             <a:avLst/>
@@ -13613,7 +14764,7 @@
               <a:buNone/>
             </a:pPr>
             <a:r>
-              <a:rPr lang="en-US" sz="2700" b="1" dirty="0">
+              <a:rPr lang="en-US" sz="3400" b="1" dirty="0">
                 <a:solidFill>
                   <a:srgbClr val="003A63"/>
                 </a:solidFill>
@@ -13623,20 +14774,20 @@
               </a:rPr>
               <a:t>Module Overview</a:t>
             </a:r>
-            <a:endParaRPr lang="en-US" sz="2700" dirty="0"/>
-          </a:p>
-        </p:txBody>
-      </p:sp>
-      <p:sp>
-        <p:nvSpPr>
-          <p:cNvPr id="10" name="Text 8"/>
-          <p:cNvSpPr/>
-          <p:nvPr/>
-        </p:nvSpPr>
-        <p:spPr>
-          <a:xfrm>
-            <a:off x="868680" y="1417320"/>
-            <a:ext cx="6675120" cy="4434840"/>
+            <a:endParaRPr lang="en-US" sz="3400" dirty="0"/>
+          </a:p>
+        </p:txBody>
+      </p:sp>
+      <p:sp>
+        <p:nvSpPr>
+          <p:cNvPr id="11" name="Text 9"/>
+          <p:cNvSpPr/>
+          <p:nvPr/>
+        </p:nvSpPr>
+        <p:spPr>
+          <a:xfrm>
+            <a:off x="868680" y="1508760"/>
+            <a:ext cx="6537960" cy="4160520"/>
           </a:xfrm>
           <a:prstGeom prst="rect">
             <a:avLst/>
@@ -13651,7 +14802,7 @@
           <a:lstStyle/>
           <a:p>
             <a:r>
-              <a:rPr lang="en-US" sz="1700" dirty="0">
+              <a:rPr lang="en-US" sz="2100" dirty="0">
                 <a:solidFill>
                   <a:srgbClr val="17364A"/>
                 </a:solidFill>
@@ -13659,13 +14810,13 @@
                 <a:ea typeface="Aptos" pitchFamily="34" charset="-122"/>
                 <a:cs typeface="Aptos" pitchFamily="34" charset="-120"/>
               </a:rPr>
-              <a:t>This module focuses on connecting AI projects to allowable costs, deliverables, reporting, performance measures, and.</a:t>
-            </a:r>
-            <a:endParaRPr lang="en-US" sz="1700" dirty="0"/>
-          </a:p>
-          <a:p>
-            <a:r>
-              <a:rPr lang="en-US" sz="1700" dirty="0">
+              <a:t>This module focuses on connecting AI projects to allowable costs, deliverables, reporting, performance.</a:t>
+            </a:r>
+            <a:endParaRPr lang="en-US" sz="2100" dirty="0"/>
+          </a:p>
+          <a:p>
+            <a:r>
+              <a:rPr lang="en-US" sz="2100" dirty="0">
                 <a:solidFill>
                   <a:srgbClr val="17364A"/>
                 </a:solidFill>
@@ -13673,13 +14824,13 @@
                 <a:ea typeface="Aptos" pitchFamily="34" charset="-122"/>
                 <a:cs typeface="Aptos" pitchFamily="34" charset="-120"/>
               </a:rPr>
-              <a:t>It is designed for public health staff who must translate responsible AI principles into repeatable decisions, documents,.</a:t>
-            </a:r>
-            <a:endParaRPr lang="en-US" sz="1700" dirty="0"/>
-          </a:p>
-          <a:p>
-            <a:r>
-              <a:rPr lang="en-US" sz="1700" dirty="0">
+              <a:t>It is designed for public health staff who must translate responsible AI principles into repeatable.</a:t>
+            </a:r>
+            <a:endParaRPr lang="en-US" sz="2100" dirty="0"/>
+          </a:p>
+          <a:p>
+            <a:r>
+              <a:rPr lang="en-US" sz="2100" dirty="0">
                 <a:solidFill>
                   <a:srgbClr val="17364A"/>
                 </a:solidFill>
@@ -13687,29 +14838,15 @@
                 <a:ea typeface="Aptos" pitchFamily="34" charset="-122"/>
                 <a:cs typeface="Aptos" pitchFamily="34" charset="-120"/>
               </a:rPr>
-              <a:t>The module helps learners move beyond general awareness by producing a practical artifact that can be used in governance.</a:t>
-            </a:r>
-            <a:endParaRPr lang="en-US" sz="1700" dirty="0"/>
-          </a:p>
-          <a:p>
-            <a:r>
-              <a:rPr lang="en-US" sz="1700" dirty="0">
-                <a:solidFill>
-                  <a:srgbClr val="17364A"/>
-                </a:solidFill>
-                <a:latin typeface="Aptos" pitchFamily="34" charset="0"/>
-                <a:ea typeface="Aptos" pitchFamily="34" charset="-122"/>
-                <a:cs typeface="Aptos" pitchFamily="34" charset="-120"/>
-              </a:rPr>
-              <a:t>It emphasizes paragraph-based reasoning, defined responsibilities, and documentation that can withstand public health,.</a:t>
-            </a:r>
-            <a:endParaRPr lang="en-US" sz="1700" dirty="0"/>
-          </a:p>
-        </p:txBody>
-      </p:sp>
-      <p:sp>
-        <p:nvSpPr>
-          <p:cNvPr id="11" name="Shape 9"/>
+              <a:t>The module helps learners move beyond general awareness by producing a practical artifact that can be.</a:t>
+            </a:r>
+            <a:endParaRPr lang="en-US" sz="2100" dirty="0"/>
+          </a:p>
+        </p:txBody>
+      </p:sp>
+      <p:sp>
+        <p:nvSpPr>
+          <p:cNvPr id="12" name="Shape 10"/>
           <p:cNvSpPr/>
           <p:nvPr/>
         </p:nvSpPr>
@@ -13736,14 +14873,14 @@
       </p:sp>
       <p:sp>
         <p:nvSpPr>
-          <p:cNvPr id="12" name="Text 10"/>
+          <p:cNvPr id="13" name="Text 11"/>
           <p:cNvSpPr/>
           <p:nvPr/>
         </p:nvSpPr>
         <p:spPr>
           <a:xfrm>
             <a:off x="8074152" y="1563624"/>
-            <a:ext cx="2825496" cy="201168"/>
+            <a:ext cx="2825496" cy="256032"/>
           </a:xfrm>
           <a:prstGeom prst="rect">
             <a:avLst/>
@@ -13759,7 +14896,7 @@
               <a:buNone/>
             </a:pPr>
             <a:r>
-              <a:rPr lang="en-US" sz="950" b="1" dirty="0">
+              <a:rPr lang="en-US" sz="1300" b="1" dirty="0">
                 <a:solidFill>
                   <a:srgbClr val="0068B7"/>
                 </a:solidFill>
@@ -13769,20 +14906,20 @@
               </a:rPr>
               <a:t>Key idea</a:t>
             </a:r>
-            <a:endParaRPr lang="en-US" sz="950" dirty="0"/>
-          </a:p>
-        </p:txBody>
-      </p:sp>
-      <p:sp>
-        <p:nvSpPr>
-          <p:cNvPr id="13" name="Text 11"/>
-          <p:cNvSpPr/>
-          <p:nvPr/>
-        </p:nvSpPr>
-        <p:spPr>
-          <a:xfrm>
-            <a:off x="8074152" y="1856232"/>
-            <a:ext cx="2825496" cy="1261872"/>
+            <a:endParaRPr lang="en-US" sz="1300" dirty="0"/>
+          </a:p>
+        </p:txBody>
+      </p:sp>
+      <p:sp>
+        <p:nvSpPr>
+          <p:cNvPr id="14" name="Text 12"/>
+          <p:cNvSpPr/>
+          <p:nvPr/>
+        </p:nvSpPr>
+        <p:spPr>
+          <a:xfrm>
+            <a:off x="8074152" y="1920240"/>
+            <a:ext cx="2825496" cy="1188720"/>
           </a:xfrm>
           <a:prstGeom prst="rect">
             <a:avLst/>
@@ -13800,7 +14937,7 @@
               <a:buNone/>
             </a:pPr>
             <a:r>
-              <a:rPr lang="en-US" sz="1250" dirty="0">
+              <a:rPr lang="en-US" sz="1550" dirty="0">
                 <a:solidFill>
                   <a:srgbClr val="17364A"/>
                 </a:solidFill>
@@ -13808,15 +14945,15 @@
                 <a:ea typeface="Aptos" pitchFamily="34" charset="-122"/>
                 <a:cs typeface="Aptos" pitchFamily="34" charset="-120"/>
               </a:rPr>
-              <a:t>This module focuses on connecting AI projects to allowable costs, deliverables, reporting, performance measures, and.</a:t>
-            </a:r>
-            <a:endParaRPr lang="en-US" sz="1250" dirty="0"/>
-          </a:p>
-        </p:txBody>
-      </p:sp>
-      <p:sp>
-        <p:nvSpPr>
-          <p:cNvPr id="14" name="Shape 12"/>
+              <a:t>This module focuses on connecting AI projects to allowable costs, deliverables, reporting, performance.</a:t>
+            </a:r>
+            <a:endParaRPr lang="en-US" sz="1550" dirty="0"/>
+          </a:p>
+        </p:txBody>
+      </p:sp>
+      <p:sp>
+        <p:nvSpPr>
+          <p:cNvPr id="15" name="Shape 13"/>
           <p:cNvSpPr/>
           <p:nvPr/>
         </p:nvSpPr>
@@ -13843,14 +14980,14 @@
       </p:sp>
       <p:sp>
         <p:nvSpPr>
-          <p:cNvPr id="15" name="Text 13"/>
+          <p:cNvPr id="16" name="Text 14"/>
           <p:cNvSpPr/>
           <p:nvPr/>
         </p:nvSpPr>
         <p:spPr>
           <a:xfrm>
             <a:off x="8074152" y="3666744"/>
-            <a:ext cx="2825496" cy="201168"/>
+            <a:ext cx="2825496" cy="256032"/>
           </a:xfrm>
           <a:prstGeom prst="rect">
             <a:avLst/>
@@ -13866,7 +15003,7 @@
               <a:buNone/>
             </a:pPr>
             <a:r>
-              <a:rPr lang="en-US" sz="950" b="1" dirty="0">
+              <a:rPr lang="en-US" sz="1300" b="1" dirty="0">
                 <a:solidFill>
                   <a:srgbClr val="0068B7"/>
                 </a:solidFill>
@@ -13876,20 +15013,20 @@
               </a:rPr>
               <a:t>Use this for</a:t>
             </a:r>
-            <a:endParaRPr lang="en-US" sz="950" dirty="0"/>
-          </a:p>
-        </p:txBody>
-      </p:sp>
-      <p:sp>
-        <p:nvSpPr>
-          <p:cNvPr id="16" name="Text 14"/>
-          <p:cNvSpPr/>
-          <p:nvPr/>
-        </p:nvSpPr>
-        <p:spPr>
-          <a:xfrm>
-            <a:off x="8074152" y="3959352"/>
-            <a:ext cx="2825496" cy="1170432"/>
+            <a:endParaRPr lang="en-US" sz="1300" dirty="0"/>
+          </a:p>
+        </p:txBody>
+      </p:sp>
+      <p:sp>
+        <p:nvSpPr>
+          <p:cNvPr id="17" name="Text 15"/>
+          <p:cNvSpPr/>
+          <p:nvPr/>
+        </p:nvSpPr>
+        <p:spPr>
+          <a:xfrm>
+            <a:off x="8074152" y="4023360"/>
+            <a:ext cx="2825496" cy="1097280"/>
           </a:xfrm>
           <a:prstGeom prst="rect">
             <a:avLst/>
@@ -13907,7 +15044,7 @@
               <a:buNone/>
             </a:pPr>
             <a:r>
-              <a:rPr lang="en-US" sz="1250" dirty="0">
+              <a:rPr lang="en-US" sz="1550" dirty="0">
                 <a:solidFill>
                   <a:srgbClr val="17364A"/>
                 </a:solidFill>
@@ -13917,7 +15054,7 @@
               </a:rPr>
               <a:t>Connect the concept to public health decisions, safeguards, documentation, or implementation work.</a:t>
             </a:r>
-            <a:endParaRPr lang="en-US" sz="1250" dirty="0"/>
+            <a:endParaRPr lang="en-US" sz="1550" dirty="0"/>
           </a:p>
         </p:txBody>
       </p:sp>
@@ -14114,7 +15251,7 @@
                 <a:ea typeface="Aptos" pitchFamily="34" charset="-122"/>
                 <a:cs typeface="Aptos" pitchFamily="34" charset="-120"/>
               </a:rPr>
-              <a:t>© Paula Soper</a:t>
+              <a:t>Â© Paula Soper</a:t>
             </a:r>
             <a:endParaRPr lang="en-US" sz="800" dirty="0"/>
           </a:p>
@@ -14122,7 +15259,46 @@
       </p:sp>
       <p:sp>
         <p:nvSpPr>
-          <p:cNvPr id="7" name="Shape 5"/>
+          <p:cNvPr id="7" name="Text 5"/>
+          <p:cNvSpPr/>
+          <p:nvPr/>
+        </p:nvSpPr>
+        <p:spPr>
+          <a:xfrm>
+            <a:off x="11137392" y="6510528"/>
+            <a:ext cx="411480" cy="201168"/>
+          </a:xfrm>
+          <a:prstGeom prst="rect">
+            <a:avLst/>
+          </a:prstGeom>
+          <a:noFill/>
+          <a:ln/>
+        </p:spPr>
+        <p:txBody>
+          <a:bodyPr wrap="square" lIns="0" tIns="0" rIns="0" bIns="0" rtlCol="0" anchor="ctr"/>
+          <a:lstStyle/>
+          <a:p>
+            <a:pPr algn="r" indent="0" marL="0">
+              <a:buNone/>
+            </a:pPr>
+            <a:r>
+              <a:rPr lang="en-US" sz="900" dirty="0">
+                <a:solidFill>
+                  <a:srgbClr val="5F7181"/>
+                </a:solidFill>
+                <a:latin typeface="Aptos" pitchFamily="34" charset="0"/>
+                <a:ea typeface="Aptos" pitchFamily="34" charset="-122"/>
+                <a:cs typeface="Aptos" pitchFamily="34" charset="-120"/>
+              </a:rPr>
+              <a:t>7</a:t>
+            </a:r>
+            <a:endParaRPr lang="en-US" sz="900" dirty="0"/>
+          </a:p>
+        </p:txBody>
+      </p:sp>
+      <p:sp>
+        <p:nvSpPr>
+          <p:cNvPr id="8" name="Shape 6"/>
           <p:cNvSpPr/>
           <p:nvPr/>
         </p:nvSpPr>
@@ -14147,7 +15323,7 @@
       </p:sp>
       <p:sp>
         <p:nvSpPr>
-          <p:cNvPr id="8" name="Text 6"/>
+          <p:cNvPr id="9" name="Text 7"/>
           <p:cNvSpPr/>
           <p:nvPr/>
         </p:nvSpPr>
@@ -14186,14 +15362,14 @@
       </p:sp>
       <p:sp>
         <p:nvSpPr>
-          <p:cNvPr id="9" name="Text 7"/>
+          <p:cNvPr id="10" name="Text 8"/>
           <p:cNvSpPr/>
           <p:nvPr/>
         </p:nvSpPr>
         <p:spPr>
           <a:xfrm>
             <a:off x="640080" y="621792"/>
-            <a:ext cx="10881360" cy="566928"/>
+            <a:ext cx="10881360" cy="713232"/>
           </a:xfrm>
           <a:prstGeom prst="rect">
             <a:avLst/>
@@ -14211,7 +15387,7 @@
               <a:buNone/>
             </a:pPr>
             <a:r>
-              <a:rPr lang="en-US" sz="2700" b="1" dirty="0">
+              <a:rPr lang="en-US" sz="3400" b="1" dirty="0">
                 <a:solidFill>
                   <a:srgbClr val="003A63"/>
                 </a:solidFill>
@@ -14221,20 +15397,20 @@
               </a:rPr>
               <a:t>Definitions</a:t>
             </a:r>
-            <a:endParaRPr lang="en-US" sz="2700" dirty="0"/>
-          </a:p>
-        </p:txBody>
-      </p:sp>
-      <p:sp>
-        <p:nvSpPr>
-          <p:cNvPr id="10" name="Text 8"/>
-          <p:cNvSpPr/>
-          <p:nvPr/>
-        </p:nvSpPr>
-        <p:spPr>
-          <a:xfrm>
-            <a:off x="868680" y="1417320"/>
-            <a:ext cx="6675120" cy="4434840"/>
+            <a:endParaRPr lang="en-US" sz="3400" dirty="0"/>
+          </a:p>
+        </p:txBody>
+      </p:sp>
+      <p:sp>
+        <p:nvSpPr>
+          <p:cNvPr id="11" name="Text 9"/>
+          <p:cNvSpPr/>
+          <p:nvPr/>
+        </p:nvSpPr>
+        <p:spPr>
+          <a:xfrm>
+            <a:off x="868680" y="1508760"/>
+            <a:ext cx="6537960" cy="4160520"/>
           </a:xfrm>
           <a:prstGeom prst="rect">
             <a:avLst/>
@@ -14249,7 +15425,7 @@
           <a:lstStyle/>
           <a:p>
             <a:r>
-              <a:rPr lang="en-US" sz="1700" dirty="0">
+              <a:rPr lang="en-US" sz="2100" dirty="0">
                 <a:solidFill>
                   <a:srgbClr val="17364A"/>
                 </a:solidFill>
@@ -14257,13 +15433,13 @@
                 <a:ea typeface="Aptos" pitchFamily="34" charset="-122"/>
                 <a:cs typeface="Aptos" pitchFamily="34" charset="-120"/>
               </a:rPr>
-              <a:t>Decision right: The authority to approve, deny, modify, pause, or escalate an AI use case or operational decision.</a:t>
-            </a:r>
-            <a:endParaRPr lang="en-US" sz="1700" dirty="0"/>
-          </a:p>
-          <a:p>
-            <a:r>
-              <a:rPr lang="en-US" sz="1700" dirty="0">
+              <a:t>Decision right: The authority to approve, deny, modify, pause, or escalate an AI use case or.</a:t>
+            </a:r>
+            <a:endParaRPr lang="en-US" sz="2100" dirty="0"/>
+          </a:p>
+          <a:p>
+            <a:r>
+              <a:rPr lang="en-US" sz="2100" dirty="0">
                 <a:solidFill>
                   <a:srgbClr val="17364A"/>
                 </a:solidFill>
@@ -14271,13 +15447,13 @@
                 <a:ea typeface="Aptos" pitchFamily="34" charset="-122"/>
                 <a:cs typeface="Aptos" pitchFamily="34" charset="-120"/>
               </a:rPr>
-              <a:t>Evidence artifact: A document, log, checklist, test result, approval record, or review note that demonstrates responsible AI.</a:t>
-            </a:r>
-            <a:endParaRPr lang="en-US" sz="1700" dirty="0"/>
-          </a:p>
-          <a:p>
-            <a:r>
-              <a:rPr lang="en-US" sz="1700" dirty="0">
+              <a:t>Evidence artifact: A document, log, checklist, test result, approval record, or review note that.</a:t>
+            </a:r>
+            <a:endParaRPr lang="en-US" sz="2100" dirty="0"/>
+          </a:p>
+          <a:p>
+            <a:r>
+              <a:rPr lang="en-US" sz="2100" dirty="0">
                 <a:solidFill>
                   <a:srgbClr val="17364A"/>
                 </a:solidFill>
@@ -14287,27 +15463,13 @@
               </a:rPr>
               <a:t>Escalation pathway: A defined route for raising concerns to the appropriate reviewer or decision-maker.</a:t>
             </a:r>
-            <a:endParaRPr lang="en-US" sz="1700" dirty="0"/>
-          </a:p>
-          <a:p>
-            <a:r>
-              <a:rPr lang="en-US" sz="1700" dirty="0">
-                <a:solidFill>
-                  <a:srgbClr val="17364A"/>
-                </a:solidFill>
-                <a:latin typeface="Aptos" pitchFamily="34" charset="0"/>
-                <a:ea typeface="Aptos" pitchFamily="34" charset="-122"/>
-                <a:cs typeface="Aptos" pitchFamily="34" charset="-120"/>
-              </a:rPr>
-              <a:t>Accountability owner: The person or role responsible for ensuring that an AI use case is governed, monitored, and corrected.</a:t>
-            </a:r>
-            <a:endParaRPr lang="en-US" sz="1700" dirty="0"/>
-          </a:p>
-        </p:txBody>
-      </p:sp>
-      <p:sp>
-        <p:nvSpPr>
-          <p:cNvPr id="11" name="Shape 9"/>
+            <a:endParaRPr lang="en-US" sz="2100" dirty="0"/>
+          </a:p>
+        </p:txBody>
+      </p:sp>
+      <p:sp>
+        <p:nvSpPr>
+          <p:cNvPr id="12" name="Shape 10"/>
           <p:cNvSpPr/>
           <p:nvPr/>
         </p:nvSpPr>
@@ -14334,14 +15496,14 @@
       </p:sp>
       <p:sp>
         <p:nvSpPr>
-          <p:cNvPr id="12" name="Text 10"/>
+          <p:cNvPr id="13" name="Text 11"/>
           <p:cNvSpPr/>
           <p:nvPr/>
         </p:nvSpPr>
         <p:spPr>
           <a:xfrm>
             <a:off x="8074152" y="1563624"/>
-            <a:ext cx="2825496" cy="201168"/>
+            <a:ext cx="2825496" cy="256032"/>
           </a:xfrm>
           <a:prstGeom prst="rect">
             <a:avLst/>
@@ -14357,7 +15519,7 @@
               <a:buNone/>
             </a:pPr>
             <a:r>
-              <a:rPr lang="en-US" sz="950" b="1" dirty="0">
+              <a:rPr lang="en-US" sz="1300" b="1" dirty="0">
                 <a:solidFill>
                   <a:srgbClr val="0068B7"/>
                 </a:solidFill>
@@ -14367,20 +15529,20 @@
               </a:rPr>
               <a:t>Key idea</a:t>
             </a:r>
-            <a:endParaRPr lang="en-US" sz="950" dirty="0"/>
-          </a:p>
-        </p:txBody>
-      </p:sp>
-      <p:sp>
-        <p:nvSpPr>
-          <p:cNvPr id="13" name="Text 11"/>
-          <p:cNvSpPr/>
-          <p:nvPr/>
-        </p:nvSpPr>
-        <p:spPr>
-          <a:xfrm>
-            <a:off x="8074152" y="1856232"/>
-            <a:ext cx="2825496" cy="1261872"/>
+            <a:endParaRPr lang="en-US" sz="1300" dirty="0"/>
+          </a:p>
+        </p:txBody>
+      </p:sp>
+      <p:sp>
+        <p:nvSpPr>
+          <p:cNvPr id="14" name="Text 12"/>
+          <p:cNvSpPr/>
+          <p:nvPr/>
+        </p:nvSpPr>
+        <p:spPr>
+          <a:xfrm>
+            <a:off x="8074152" y="1920240"/>
+            <a:ext cx="2825496" cy="1188720"/>
           </a:xfrm>
           <a:prstGeom prst="rect">
             <a:avLst/>
@@ -14398,7 +15560,7 @@
               <a:buNone/>
             </a:pPr>
             <a:r>
-              <a:rPr lang="en-US" sz="1250" dirty="0">
+              <a:rPr lang="en-US" sz="1550" dirty="0">
                 <a:solidFill>
                   <a:srgbClr val="17364A"/>
                 </a:solidFill>
@@ -14406,15 +15568,15 @@
                 <a:ea typeface="Aptos" pitchFamily="34" charset="-122"/>
                 <a:cs typeface="Aptos" pitchFamily="34" charset="-120"/>
               </a:rPr>
-              <a:t>Decision right: The authority to approve, deny, modify, pause, or escalate an AI use case or operational decision.</a:t>
-            </a:r>
-            <a:endParaRPr lang="en-US" sz="1250" dirty="0"/>
-          </a:p>
-        </p:txBody>
-      </p:sp>
-      <p:sp>
-        <p:nvSpPr>
-          <p:cNvPr id="14" name="Shape 12"/>
+              <a:t>Decision right: The authority to approve, deny, modify, pause, or escalate an AI use case or.</a:t>
+            </a:r>
+            <a:endParaRPr lang="en-US" sz="1550" dirty="0"/>
+          </a:p>
+        </p:txBody>
+      </p:sp>
+      <p:sp>
+        <p:nvSpPr>
+          <p:cNvPr id="15" name="Shape 13"/>
           <p:cNvSpPr/>
           <p:nvPr/>
         </p:nvSpPr>
@@ -14441,14 +15603,14 @@
       </p:sp>
       <p:sp>
         <p:nvSpPr>
-          <p:cNvPr id="15" name="Text 13"/>
+          <p:cNvPr id="16" name="Text 14"/>
           <p:cNvSpPr/>
           <p:nvPr/>
         </p:nvSpPr>
         <p:spPr>
           <a:xfrm>
             <a:off x="8074152" y="3666744"/>
-            <a:ext cx="2825496" cy="201168"/>
+            <a:ext cx="2825496" cy="256032"/>
           </a:xfrm>
           <a:prstGeom prst="rect">
             <a:avLst/>
@@ -14464,7 +15626,7 @@
               <a:buNone/>
             </a:pPr>
             <a:r>
-              <a:rPr lang="en-US" sz="950" b="1" dirty="0">
+              <a:rPr lang="en-US" sz="1300" b="1" dirty="0">
                 <a:solidFill>
                   <a:srgbClr val="0068B7"/>
                 </a:solidFill>
@@ -14474,20 +15636,20 @@
               </a:rPr>
               <a:t>Use this for</a:t>
             </a:r>
-            <a:endParaRPr lang="en-US" sz="950" dirty="0"/>
-          </a:p>
-        </p:txBody>
-      </p:sp>
-      <p:sp>
-        <p:nvSpPr>
-          <p:cNvPr id="16" name="Text 14"/>
-          <p:cNvSpPr/>
-          <p:nvPr/>
-        </p:nvSpPr>
-        <p:spPr>
-          <a:xfrm>
-            <a:off x="8074152" y="3959352"/>
-            <a:ext cx="2825496" cy="1170432"/>
+            <a:endParaRPr lang="en-US" sz="1300" dirty="0"/>
+          </a:p>
+        </p:txBody>
+      </p:sp>
+      <p:sp>
+        <p:nvSpPr>
+          <p:cNvPr id="17" name="Text 15"/>
+          <p:cNvSpPr/>
+          <p:nvPr/>
+        </p:nvSpPr>
+        <p:spPr>
+          <a:xfrm>
+            <a:off x="8074152" y="4023360"/>
+            <a:ext cx="2825496" cy="1097280"/>
           </a:xfrm>
           <a:prstGeom prst="rect">
             <a:avLst/>
@@ -14505,7 +15667,7 @@
               <a:buNone/>
             </a:pPr>
             <a:r>
-              <a:rPr lang="en-US" sz="1250" dirty="0">
+              <a:rPr lang="en-US" sz="1550" dirty="0">
                 <a:solidFill>
                   <a:srgbClr val="17364A"/>
                 </a:solidFill>
@@ -14515,7 +15677,7 @@
               </a:rPr>
               <a:t>Connect the concept to public health decisions, safeguards, documentation, or implementation work.</a:t>
             </a:r>
-            <a:endParaRPr lang="en-US" sz="1250" dirty="0"/>
+            <a:endParaRPr lang="en-US" sz="1550" dirty="0"/>
           </a:p>
         </p:txBody>
       </p:sp>
@@ -14712,7 +15874,7 @@
                 <a:ea typeface="Aptos" pitchFamily="34" charset="-122"/>
                 <a:cs typeface="Aptos" pitchFamily="34" charset="-120"/>
               </a:rPr>
-              <a:t>© Paula Soper</a:t>
+              <a:t>Â© Paula Soper</a:t>
             </a:r>
             <a:endParaRPr lang="en-US" sz="800" dirty="0"/>
           </a:p>
@@ -14720,7 +15882,46 @@
       </p:sp>
       <p:sp>
         <p:nvSpPr>
-          <p:cNvPr id="7" name="Shape 5"/>
+          <p:cNvPr id="7" name="Text 5"/>
+          <p:cNvSpPr/>
+          <p:nvPr/>
+        </p:nvSpPr>
+        <p:spPr>
+          <a:xfrm>
+            <a:off x="11137392" y="6510528"/>
+            <a:ext cx="411480" cy="201168"/>
+          </a:xfrm>
+          <a:prstGeom prst="rect">
+            <a:avLst/>
+          </a:prstGeom>
+          <a:noFill/>
+          <a:ln/>
+        </p:spPr>
+        <p:txBody>
+          <a:bodyPr wrap="square" lIns="0" tIns="0" rIns="0" bIns="0" rtlCol="0" anchor="ctr"/>
+          <a:lstStyle/>
+          <a:p>
+            <a:pPr algn="r" indent="0" marL="0">
+              <a:buNone/>
+            </a:pPr>
+            <a:r>
+              <a:rPr lang="en-US" sz="900" dirty="0">
+                <a:solidFill>
+                  <a:srgbClr val="5F7181"/>
+                </a:solidFill>
+                <a:latin typeface="Aptos" pitchFamily="34" charset="0"/>
+                <a:ea typeface="Aptos" pitchFamily="34" charset="-122"/>
+                <a:cs typeface="Aptos" pitchFamily="34" charset="-120"/>
+              </a:rPr>
+              <a:t>8</a:t>
+            </a:r>
+            <a:endParaRPr lang="en-US" sz="900" dirty="0"/>
+          </a:p>
+        </p:txBody>
+      </p:sp>
+      <p:sp>
+        <p:nvSpPr>
+          <p:cNvPr id="8" name="Shape 6"/>
           <p:cNvSpPr/>
           <p:nvPr/>
         </p:nvSpPr>
@@ -14745,7 +15946,7 @@
       </p:sp>
       <p:sp>
         <p:nvSpPr>
-          <p:cNvPr id="8" name="Text 6"/>
+          <p:cNvPr id="9" name="Text 7"/>
           <p:cNvSpPr/>
           <p:nvPr/>
         </p:nvSpPr>
@@ -14784,14 +15985,14 @@
       </p:sp>
       <p:sp>
         <p:nvSpPr>
-          <p:cNvPr id="9" name="Text 7"/>
+          <p:cNvPr id="10" name="Text 8"/>
           <p:cNvSpPr/>
           <p:nvPr/>
         </p:nvSpPr>
         <p:spPr>
           <a:xfrm>
             <a:off x="640080" y="621792"/>
-            <a:ext cx="10881360" cy="566928"/>
+            <a:ext cx="10881360" cy="713232"/>
           </a:xfrm>
           <a:prstGeom prst="rect">
             <a:avLst/>
@@ -14809,7 +16010,7 @@
               <a:buNone/>
             </a:pPr>
             <a:r>
-              <a:rPr lang="en-US" sz="2700" b="1" dirty="0">
+              <a:rPr lang="en-US" sz="3400" b="1" dirty="0">
                 <a:solidFill>
                   <a:srgbClr val="003A63"/>
                 </a:solidFill>
@@ -14819,20 +16020,20 @@
               </a:rPr>
               <a:t>Jurisdiction and Agency Policy Note</a:t>
             </a:r>
-            <a:endParaRPr lang="en-US" sz="2700" dirty="0"/>
-          </a:p>
-        </p:txBody>
-      </p:sp>
-      <p:sp>
-        <p:nvSpPr>
-          <p:cNvPr id="10" name="Text 8"/>
-          <p:cNvSpPr/>
-          <p:nvPr/>
-        </p:nvSpPr>
-        <p:spPr>
-          <a:xfrm>
-            <a:off x="868680" y="1417320"/>
-            <a:ext cx="6675120" cy="4434840"/>
+            <a:endParaRPr lang="en-US" sz="3400" dirty="0"/>
+          </a:p>
+        </p:txBody>
+      </p:sp>
+      <p:sp>
+        <p:nvSpPr>
+          <p:cNvPr id="11" name="Text 9"/>
+          <p:cNvSpPr/>
+          <p:nvPr/>
+        </p:nvSpPr>
+        <p:spPr>
+          <a:xfrm>
+            <a:off x="868680" y="1508760"/>
+            <a:ext cx="6537960" cy="4160520"/>
           </a:xfrm>
           <a:prstGeom prst="rect">
             <a:avLst/>
@@ -14847,7 +16048,7 @@
           <a:lstStyle/>
           <a:p>
             <a:r>
-              <a:rPr lang="en-US" sz="1700" dirty="0">
+              <a:rPr lang="en-US" sz="2100" dirty="0">
                 <a:solidFill>
                   <a:srgbClr val="17364A"/>
                 </a:solidFill>
@@ -14857,11 +16058,11 @@
               </a:rPr>
               <a:t>This module provides national-level training guidance for public health agencies and partners.</a:t>
             </a:r>
-            <a:endParaRPr lang="en-US" sz="1700" dirty="0"/>
-          </a:p>
-          <a:p>
-            <a:r>
-              <a:rPr lang="en-US" sz="1700" dirty="0">
+            <a:endParaRPr lang="en-US" sz="2100" dirty="0"/>
+          </a:p>
+          <a:p>
+            <a:r>
+              <a:rPr lang="en-US" sz="2100" dirty="0">
                 <a:solidFill>
                   <a:srgbClr val="17364A"/>
                 </a:solidFill>
@@ -14869,13 +16070,13 @@
                 <a:ea typeface="Aptos" pitchFamily="34" charset="-122"/>
                 <a:cs typeface="Aptos" pitchFamily="34" charset="-120"/>
               </a:rPr>
-              <a:t>It is not legal advice and does not replace review by agency legal counsel, privacy officers, procurement officials, civil.</a:t>
-            </a:r>
-            <a:endParaRPr lang="en-US" sz="1700" dirty="0"/>
-          </a:p>
-          <a:p>
-            <a:r>
-              <a:rPr lang="en-US" sz="1700" dirty="0">
+              <a:t>It is not legal advice and does not replace review by agency legal counsel, privacy officers,.</a:t>
+            </a:r>
+            <a:endParaRPr lang="en-US" sz="2100" dirty="0"/>
+          </a:p>
+          <a:p>
+            <a:r>
+              <a:rPr lang="en-US" sz="2100" dirty="0">
                 <a:solidFill>
                   <a:srgbClr val="17364A"/>
                 </a:solidFill>
@@ -14883,29 +16084,15 @@
                 <a:ea typeface="Aptos" pitchFamily="34" charset="-122"/>
                 <a:cs typeface="Aptos" pitchFamily="34" charset="-120"/>
               </a:rPr>
-              <a:t>Requirements may vary by state, locality, territory, Tribe, agency, funding source, data-sharing agreement, emergency.</a:t>
-            </a:r>
-            <a:endParaRPr lang="en-US" sz="1700" dirty="0"/>
-          </a:p>
-          <a:p>
-            <a:r>
-              <a:rPr lang="en-US" sz="1700" dirty="0">
-                <a:solidFill>
-                  <a:srgbClr val="17364A"/>
-                </a:solidFill>
-                <a:latin typeface="Aptos" pitchFamily="34" charset="0"/>
-                <a:ea typeface="Aptos" pitchFamily="34" charset="-122"/>
-                <a:cs typeface="Aptos" pitchFamily="34" charset="-120"/>
-              </a:rPr>
-              <a:t>Learners should use this module to identify the issues that require review and should confirm applicable requirements.</a:t>
-            </a:r>
-            <a:endParaRPr lang="en-US" sz="1700" dirty="0"/>
-          </a:p>
-        </p:txBody>
-      </p:sp>
-      <p:sp>
-        <p:nvSpPr>
-          <p:cNvPr id="11" name="Shape 9"/>
+              <a:t>Requirements may vary by state, locality, territory, Tribe, agency, funding source, data-sharing.</a:t>
+            </a:r>
+            <a:endParaRPr lang="en-US" sz="2100" dirty="0"/>
+          </a:p>
+        </p:txBody>
+      </p:sp>
+      <p:sp>
+        <p:nvSpPr>
+          <p:cNvPr id="12" name="Shape 10"/>
           <p:cNvSpPr/>
           <p:nvPr/>
         </p:nvSpPr>
@@ -14932,14 +16119,14 @@
       </p:sp>
       <p:sp>
         <p:nvSpPr>
-          <p:cNvPr id="12" name="Text 10"/>
+          <p:cNvPr id="13" name="Text 11"/>
           <p:cNvSpPr/>
           <p:nvPr/>
         </p:nvSpPr>
         <p:spPr>
           <a:xfrm>
             <a:off x="8074152" y="1563624"/>
-            <a:ext cx="2825496" cy="201168"/>
+            <a:ext cx="2825496" cy="256032"/>
           </a:xfrm>
           <a:prstGeom prst="rect">
             <a:avLst/>
@@ -14955,7 +16142,7 @@
               <a:buNone/>
             </a:pPr>
             <a:r>
-              <a:rPr lang="en-US" sz="950" b="1" dirty="0">
+              <a:rPr lang="en-US" sz="1300" b="1" dirty="0">
                 <a:solidFill>
                   <a:srgbClr val="0068B7"/>
                 </a:solidFill>
@@ -14965,20 +16152,20 @@
               </a:rPr>
               <a:t>Key idea</a:t>
             </a:r>
-            <a:endParaRPr lang="en-US" sz="950" dirty="0"/>
-          </a:p>
-        </p:txBody>
-      </p:sp>
-      <p:sp>
-        <p:nvSpPr>
-          <p:cNvPr id="13" name="Text 11"/>
-          <p:cNvSpPr/>
-          <p:nvPr/>
-        </p:nvSpPr>
-        <p:spPr>
-          <a:xfrm>
-            <a:off x="8074152" y="1856232"/>
-            <a:ext cx="2825496" cy="1261872"/>
+            <a:endParaRPr lang="en-US" sz="1300" dirty="0"/>
+          </a:p>
+        </p:txBody>
+      </p:sp>
+      <p:sp>
+        <p:nvSpPr>
+          <p:cNvPr id="14" name="Text 12"/>
+          <p:cNvSpPr/>
+          <p:nvPr/>
+        </p:nvSpPr>
+        <p:spPr>
+          <a:xfrm>
+            <a:off x="8074152" y="1920240"/>
+            <a:ext cx="2825496" cy="1188720"/>
           </a:xfrm>
           <a:prstGeom prst="rect">
             <a:avLst/>
@@ -14996,7 +16183,7 @@
               <a:buNone/>
             </a:pPr>
             <a:r>
-              <a:rPr lang="en-US" sz="1250" dirty="0">
+              <a:rPr lang="en-US" sz="1550" dirty="0">
                 <a:solidFill>
                   <a:srgbClr val="17364A"/>
                 </a:solidFill>
@@ -15006,13 +16193,13 @@
               </a:rPr>
               <a:t>This module provides national-level training guidance for public health agencies and partners.</a:t>
             </a:r>
-            <a:endParaRPr lang="en-US" sz="1250" dirty="0"/>
-          </a:p>
-        </p:txBody>
-      </p:sp>
-      <p:sp>
-        <p:nvSpPr>
-          <p:cNvPr id="14" name="Shape 12"/>
+            <a:endParaRPr lang="en-US" sz="1550" dirty="0"/>
+          </a:p>
+        </p:txBody>
+      </p:sp>
+      <p:sp>
+        <p:nvSpPr>
+          <p:cNvPr id="15" name="Shape 13"/>
           <p:cNvSpPr/>
           <p:nvPr/>
         </p:nvSpPr>
@@ -15039,14 +16226,14 @@
       </p:sp>
       <p:sp>
         <p:nvSpPr>
-          <p:cNvPr id="15" name="Text 13"/>
+          <p:cNvPr id="16" name="Text 14"/>
           <p:cNvSpPr/>
           <p:nvPr/>
         </p:nvSpPr>
         <p:spPr>
           <a:xfrm>
             <a:off x="8074152" y="3666744"/>
-            <a:ext cx="2825496" cy="201168"/>
+            <a:ext cx="2825496" cy="256032"/>
           </a:xfrm>
           <a:prstGeom prst="rect">
             <a:avLst/>
@@ -15062,7 +16249,7 @@
               <a:buNone/>
             </a:pPr>
             <a:r>
-              <a:rPr lang="en-US" sz="950" b="1" dirty="0">
+              <a:rPr lang="en-US" sz="1300" b="1" dirty="0">
                 <a:solidFill>
                   <a:srgbClr val="0068B7"/>
                 </a:solidFill>
@@ -15072,20 +16259,20 @@
               </a:rPr>
               <a:t>Use this for</a:t>
             </a:r>
-            <a:endParaRPr lang="en-US" sz="950" dirty="0"/>
-          </a:p>
-        </p:txBody>
-      </p:sp>
-      <p:sp>
-        <p:nvSpPr>
-          <p:cNvPr id="16" name="Text 14"/>
-          <p:cNvSpPr/>
-          <p:nvPr/>
-        </p:nvSpPr>
-        <p:spPr>
-          <a:xfrm>
-            <a:off x="8074152" y="3959352"/>
-            <a:ext cx="2825496" cy="1170432"/>
+            <a:endParaRPr lang="en-US" sz="1300" dirty="0"/>
+          </a:p>
+        </p:txBody>
+      </p:sp>
+      <p:sp>
+        <p:nvSpPr>
+          <p:cNvPr id="17" name="Text 15"/>
+          <p:cNvSpPr/>
+          <p:nvPr/>
+        </p:nvSpPr>
+        <p:spPr>
+          <a:xfrm>
+            <a:off x="8074152" y="4023360"/>
+            <a:ext cx="2825496" cy="1097280"/>
           </a:xfrm>
           <a:prstGeom prst="rect">
             <a:avLst/>
@@ -15103,7 +16290,7 @@
               <a:buNone/>
             </a:pPr>
             <a:r>
-              <a:rPr lang="en-US" sz="1250" dirty="0">
+              <a:rPr lang="en-US" sz="1550" dirty="0">
                 <a:solidFill>
                   <a:srgbClr val="17364A"/>
                 </a:solidFill>
@@ -15113,7 +16300,7 @@
               </a:rPr>
               <a:t>Connect the concept to public health decisions, safeguards, documentation, or implementation work.</a:t>
             </a:r>
-            <a:endParaRPr lang="en-US" sz="1250" dirty="0"/>
+            <a:endParaRPr lang="en-US" sz="1550" dirty="0"/>
           </a:p>
         </p:txBody>
       </p:sp>
@@ -15310,7 +16497,7 @@
                 <a:ea typeface="Aptos" pitchFamily="34" charset="-122"/>
                 <a:cs typeface="Aptos" pitchFamily="34" charset="-120"/>
               </a:rPr>
-              <a:t>© Paula Soper</a:t>
+              <a:t>Â© Paula Soper</a:t>
             </a:r>
             <a:endParaRPr lang="en-US" sz="800" dirty="0"/>
           </a:p>
@@ -15318,7 +16505,46 @@
       </p:sp>
       <p:sp>
         <p:nvSpPr>
-          <p:cNvPr id="7" name="Shape 5"/>
+          <p:cNvPr id="7" name="Text 5"/>
+          <p:cNvSpPr/>
+          <p:nvPr/>
+        </p:nvSpPr>
+        <p:spPr>
+          <a:xfrm>
+            <a:off x="11137392" y="6510528"/>
+            <a:ext cx="411480" cy="201168"/>
+          </a:xfrm>
+          <a:prstGeom prst="rect">
+            <a:avLst/>
+          </a:prstGeom>
+          <a:noFill/>
+          <a:ln/>
+        </p:spPr>
+        <p:txBody>
+          <a:bodyPr wrap="square" lIns="0" tIns="0" rIns="0" bIns="0" rtlCol="0" anchor="ctr"/>
+          <a:lstStyle/>
+          <a:p>
+            <a:pPr algn="r" indent="0" marL="0">
+              <a:buNone/>
+            </a:pPr>
+            <a:r>
+              <a:rPr lang="en-US" sz="900" dirty="0">
+                <a:solidFill>
+                  <a:srgbClr val="5F7181"/>
+                </a:solidFill>
+                <a:latin typeface="Aptos" pitchFamily="34" charset="0"/>
+                <a:ea typeface="Aptos" pitchFamily="34" charset="-122"/>
+                <a:cs typeface="Aptos" pitchFamily="34" charset="-120"/>
+              </a:rPr>
+              <a:t>9</a:t>
+            </a:r>
+            <a:endParaRPr lang="en-US" sz="900" dirty="0"/>
+          </a:p>
+        </p:txBody>
+      </p:sp>
+      <p:sp>
+        <p:nvSpPr>
+          <p:cNvPr id="8" name="Shape 6"/>
           <p:cNvSpPr/>
           <p:nvPr/>
         </p:nvSpPr>
@@ -15343,7 +16569,7 @@
       </p:sp>
       <p:sp>
         <p:nvSpPr>
-          <p:cNvPr id="8" name="Text 6"/>
+          <p:cNvPr id="9" name="Text 7"/>
           <p:cNvSpPr/>
           <p:nvPr/>
         </p:nvSpPr>
@@ -15382,14 +16608,14 @@
       </p:sp>
       <p:sp>
         <p:nvSpPr>
-          <p:cNvPr id="9" name="Text 7"/>
+          <p:cNvPr id="10" name="Text 8"/>
           <p:cNvSpPr/>
           <p:nvPr/>
         </p:nvSpPr>
         <p:spPr>
           <a:xfrm>
             <a:off x="640080" y="621792"/>
-            <a:ext cx="10881360" cy="566928"/>
+            <a:ext cx="10881360" cy="713232"/>
           </a:xfrm>
           <a:prstGeom prst="rect">
             <a:avLst/>
@@ -15407,7 +16633,7 @@
               <a:buNone/>
             </a:pPr>
             <a:r>
-              <a:rPr lang="en-US" sz="2700" b="1" dirty="0">
+              <a:rPr lang="en-US" sz="3400" b="1" dirty="0">
                 <a:solidFill>
                   <a:srgbClr val="003A63"/>
                 </a:solidFill>
@@ -15417,20 +16643,20 @@
               </a:rPr>
               <a:t>Why This Topic Matters for Public Health AI</a:t>
             </a:r>
-            <a:endParaRPr lang="en-US" sz="2700" dirty="0"/>
-          </a:p>
-        </p:txBody>
-      </p:sp>
-      <p:sp>
-        <p:nvSpPr>
-          <p:cNvPr id="10" name="Text 8"/>
-          <p:cNvSpPr/>
-          <p:nvPr/>
-        </p:nvSpPr>
-        <p:spPr>
-          <a:xfrm>
-            <a:off x="868680" y="1417320"/>
-            <a:ext cx="6675120" cy="4434840"/>
+            <a:endParaRPr lang="en-US" sz="3400" dirty="0"/>
+          </a:p>
+        </p:txBody>
+      </p:sp>
+      <p:sp>
+        <p:nvSpPr>
+          <p:cNvPr id="11" name="Text 9"/>
+          <p:cNvSpPr/>
+          <p:nvPr/>
+        </p:nvSpPr>
+        <p:spPr>
+          <a:xfrm>
+            <a:off x="868680" y="1508760"/>
+            <a:ext cx="6537960" cy="4160520"/>
           </a:xfrm>
           <a:prstGeom prst="rect">
             <a:avLst/>
@@ -15445,7 +16671,7 @@
           <a:lstStyle/>
           <a:p>
             <a:r>
-              <a:rPr lang="en-US" sz="1700" dirty="0">
+              <a:rPr lang="en-US" sz="2100" dirty="0">
                 <a:solidFill>
                   <a:srgbClr val="17364A"/>
                 </a:solidFill>
@@ -15453,13 +16679,13 @@
                 <a:ea typeface="Aptos" pitchFamily="34" charset="-122"/>
                 <a:cs typeface="Aptos" pitchFamily="34" charset="-120"/>
               </a:rPr>
-              <a:t>Grant and Funding Management for AI Projects matters because AI adoption changes how public health agencies make, document,.</a:t>
-            </a:r>
-            <a:endParaRPr lang="en-US" sz="1700" dirty="0"/>
-          </a:p>
-          <a:p>
-            <a:r>
-              <a:rPr lang="en-US" sz="1700" dirty="0">
+              <a:t>Grant and Funding Management for AI Projects matters because AI adoption changes how public health.</a:t>
+            </a:r>
+            <a:endParaRPr lang="en-US" sz="2100" dirty="0"/>
+          </a:p>
+          <a:p>
+            <a:r>
+              <a:rPr lang="en-US" sz="2100" dirty="0">
                 <a:solidFill>
                   <a:srgbClr val="17364A"/>
                 </a:solidFill>
@@ -15467,13 +16693,13 @@
                 <a:ea typeface="Aptos" pitchFamily="34" charset="-122"/>
                 <a:cs typeface="Aptos" pitchFamily="34" charset="-120"/>
               </a:rPr>
-              <a:t>Without a structured approach, staff may rely on informal practices, vendor assurances, or one-time approvals that do not.</a:t>
-            </a:r>
-            <a:endParaRPr lang="en-US" sz="1700" dirty="0"/>
-          </a:p>
-          <a:p>
-            <a:r>
-              <a:rPr lang="en-US" sz="1700" dirty="0">
+              <a:t>Without a structured approach, staff may rely on informal practices, vendor assurances, or one-time.</a:t>
+            </a:r>
+            <a:endParaRPr lang="en-US" sz="2100" dirty="0"/>
+          </a:p>
+          <a:p>
+            <a:r>
+              <a:rPr lang="en-US" sz="2100" dirty="0">
                 <a:solidFill>
                   <a:srgbClr val="17364A"/>
                 </a:solidFill>
@@ -15481,29 +16707,15 @@
                 <a:ea typeface="Aptos" pitchFamily="34" charset="-122"/>
                 <a:cs typeface="Aptos" pitchFamily="34" charset="-120"/>
               </a:rPr>
-              <a:t>Public health agencies operate under legal authorities, public accountability, resource constraints, and community trust.</a:t>
-            </a:r>
-            <a:endParaRPr lang="en-US" sz="1700" dirty="0"/>
-          </a:p>
-          <a:p>
-            <a:r>
-              <a:rPr lang="en-US" sz="1700" dirty="0">
-                <a:solidFill>
-                  <a:srgbClr val="17364A"/>
-                </a:solidFill>
-                <a:latin typeface="Aptos" pitchFamily="34" charset="0"/>
-                <a:ea typeface="Aptos" pitchFamily="34" charset="-122"/>
-                <a:cs typeface="Aptos" pitchFamily="34" charset="-120"/>
-              </a:rPr>
-              <a:t>A module on this topic helps agencies define repeatable expectations before urgent situations arise.</a:t>
-            </a:r>
-            <a:endParaRPr lang="en-US" sz="1700" dirty="0"/>
-          </a:p>
-        </p:txBody>
-      </p:sp>
-      <p:sp>
-        <p:nvSpPr>
-          <p:cNvPr id="11" name="Shape 9"/>
+              <a:t>Public health agencies operate under legal authorities, public accountability, resource constraints,.</a:t>
+            </a:r>
+            <a:endParaRPr lang="en-US" sz="2100" dirty="0"/>
+          </a:p>
+        </p:txBody>
+      </p:sp>
+      <p:sp>
+        <p:nvSpPr>
+          <p:cNvPr id="12" name="Shape 10"/>
           <p:cNvSpPr/>
           <p:nvPr/>
         </p:nvSpPr>
@@ -15530,14 +16742,14 @@
       </p:sp>
       <p:sp>
         <p:nvSpPr>
-          <p:cNvPr id="12" name="Text 10"/>
+          <p:cNvPr id="13" name="Text 11"/>
           <p:cNvSpPr/>
           <p:nvPr/>
         </p:nvSpPr>
         <p:spPr>
           <a:xfrm>
             <a:off x="8074152" y="1563624"/>
-            <a:ext cx="2825496" cy="201168"/>
+            <a:ext cx="2825496" cy="256032"/>
           </a:xfrm>
           <a:prstGeom prst="rect">
             <a:avLst/>
@@ -15553,7 +16765,7 @@
               <a:buNone/>
             </a:pPr>
             <a:r>
-              <a:rPr lang="en-US" sz="950" b="1" dirty="0">
+              <a:rPr lang="en-US" sz="1300" b="1" dirty="0">
                 <a:solidFill>
                   <a:srgbClr val="0068B7"/>
                 </a:solidFill>
@@ -15563,20 +16775,20 @@
               </a:rPr>
               <a:t>Key idea</a:t>
             </a:r>
-            <a:endParaRPr lang="en-US" sz="950" dirty="0"/>
-          </a:p>
-        </p:txBody>
-      </p:sp>
-      <p:sp>
-        <p:nvSpPr>
-          <p:cNvPr id="13" name="Text 11"/>
-          <p:cNvSpPr/>
-          <p:nvPr/>
-        </p:nvSpPr>
-        <p:spPr>
-          <a:xfrm>
-            <a:off x="8074152" y="1856232"/>
-            <a:ext cx="2825496" cy="1261872"/>
+            <a:endParaRPr lang="en-US" sz="1300" dirty="0"/>
+          </a:p>
+        </p:txBody>
+      </p:sp>
+      <p:sp>
+        <p:nvSpPr>
+          <p:cNvPr id="14" name="Text 12"/>
+          <p:cNvSpPr/>
+          <p:nvPr/>
+        </p:nvSpPr>
+        <p:spPr>
+          <a:xfrm>
+            <a:off x="8074152" y="1920240"/>
+            <a:ext cx="2825496" cy="1188720"/>
           </a:xfrm>
           <a:prstGeom prst="rect">
             <a:avLst/>
@@ -15594,7 +16806,7 @@
               <a:buNone/>
             </a:pPr>
             <a:r>
-              <a:rPr lang="en-US" sz="1250" dirty="0">
+              <a:rPr lang="en-US" sz="1550" dirty="0">
                 <a:solidFill>
                   <a:srgbClr val="17364A"/>
                 </a:solidFill>
@@ -15602,15 +16814,15 @@
                 <a:ea typeface="Aptos" pitchFamily="34" charset="-122"/>
                 <a:cs typeface="Aptos" pitchFamily="34" charset="-120"/>
               </a:rPr>
-              <a:t>Grant and Funding Management for AI Projects matters because AI adoption changes how public health agencies make, document,.</a:t>
-            </a:r>
-            <a:endParaRPr lang="en-US" sz="1250" dirty="0"/>
-          </a:p>
-        </p:txBody>
-      </p:sp>
-      <p:sp>
-        <p:nvSpPr>
-          <p:cNvPr id="14" name="Shape 12"/>
+              <a:t>Grant and Funding Management for AI Projects matters because AI adoption changes how public health.</a:t>
+            </a:r>
+            <a:endParaRPr lang="en-US" sz="1550" dirty="0"/>
+          </a:p>
+        </p:txBody>
+      </p:sp>
+      <p:sp>
+        <p:nvSpPr>
+          <p:cNvPr id="15" name="Shape 13"/>
           <p:cNvSpPr/>
           <p:nvPr/>
         </p:nvSpPr>
@@ -15637,14 +16849,14 @@
       </p:sp>
       <p:sp>
         <p:nvSpPr>
-          <p:cNvPr id="15" name="Text 13"/>
+          <p:cNvPr id="16" name="Text 14"/>
           <p:cNvSpPr/>
           <p:nvPr/>
         </p:nvSpPr>
         <p:spPr>
           <a:xfrm>
             <a:off x="8074152" y="3666744"/>
-            <a:ext cx="2825496" cy="201168"/>
+            <a:ext cx="2825496" cy="256032"/>
           </a:xfrm>
           <a:prstGeom prst="rect">
             <a:avLst/>
@@ -15660,7 +16872,7 @@
               <a:buNone/>
             </a:pPr>
             <a:r>
-              <a:rPr lang="en-US" sz="950" b="1" dirty="0">
+              <a:rPr lang="en-US" sz="1300" b="1" dirty="0">
                 <a:solidFill>
                   <a:srgbClr val="0068B7"/>
                 </a:solidFill>
@@ -15670,20 +16882,20 @@
               </a:rPr>
               <a:t>Use this for</a:t>
             </a:r>
-            <a:endParaRPr lang="en-US" sz="950" dirty="0"/>
-          </a:p>
-        </p:txBody>
-      </p:sp>
-      <p:sp>
-        <p:nvSpPr>
-          <p:cNvPr id="16" name="Text 14"/>
-          <p:cNvSpPr/>
-          <p:nvPr/>
-        </p:nvSpPr>
-        <p:spPr>
-          <a:xfrm>
-            <a:off x="8074152" y="3959352"/>
-            <a:ext cx="2825496" cy="1170432"/>
+            <a:endParaRPr lang="en-US" sz="1300" dirty="0"/>
+          </a:p>
+        </p:txBody>
+      </p:sp>
+      <p:sp>
+        <p:nvSpPr>
+          <p:cNvPr id="17" name="Text 15"/>
+          <p:cNvSpPr/>
+          <p:nvPr/>
+        </p:nvSpPr>
+        <p:spPr>
+          <a:xfrm>
+            <a:off x="8074152" y="4023360"/>
+            <a:ext cx="2825496" cy="1097280"/>
           </a:xfrm>
           <a:prstGeom prst="rect">
             <a:avLst/>
@@ -15701,7 +16913,7 @@
               <a:buNone/>
             </a:pPr>
             <a:r>
-              <a:rPr lang="en-US" sz="1250" dirty="0">
+              <a:rPr lang="en-US" sz="1550" dirty="0">
                 <a:solidFill>
                   <a:srgbClr val="17364A"/>
                 </a:solidFill>
@@ -15711,7 +16923,7 @@
               </a:rPr>
               <a:t>Connect the concept to public health decisions, safeguards, documentation, or implementation work.</a:t>
             </a:r>
-            <a:endParaRPr lang="en-US" sz="1250" dirty="0"/>
+            <a:endParaRPr lang="en-US" sz="1550" dirty="0"/>
           </a:p>
         </p:txBody>
       </p:sp>
